--- a/Andy/FinMem_PPT_完整版.pptx
+++ b/Andy/FinMem_PPT_完整版.pptx
@@ -3173,7 +3173,7 @@
                 </a:solidFill>
                 <a:latin typeface="Microsoft JhengHei"/>
               </a:rPr>
-              <a:t>原始新聞與財報先在模擬開始前離線摘要好,交易當天則把摘要文字與即時股價一起送進系統,先分類成文字/股價兩路——文字存進分層長期記憶、股價直接算動能——再把檢索出的相關記憶、動能事實、與一次性設定好的角色人設一起交給 LLM 反思,最後產出買進/賣出/持有的決策。</a:t>
+              <a:t>原始新聞與財報先在模擬開始前離線摘要好,交易當天則把摘要文字與即時股價一起送進系統,先分類成文字/股價兩路——文字存進分層長期記憶、股價直接算動能;檢索記憶時以一次性設定好的角色人設當查詢依據,找出最相關的記憶,再連同動能事實一起交給 LLM 反思,最後產出買進/賣出/持有的決策。</a:t>
             </a:r>
           </a:p>
         </p:txBody>
@@ -3329,7 +3329,7 @@
         </p:nvSpPr>
         <p:spPr>
           <a:xfrm>
-            <a:off x="7653528" y="1234440"/>
+            <a:off x="6080760" y="1234440"/>
             <a:ext cx="1828800" cy="548640"/>
           </a:xfrm>
           <a:prstGeom prst="roundRect">
@@ -3396,7 +3396,7 @@
         </p:nvCxnSpPr>
         <p:spPr>
           <a:xfrm>
-            <a:off x="8567928" y="1783080"/>
+            <a:off x="6995160" y="1783080"/>
             <a:ext cx="0" cy="365760"/>
           </a:xfrm>
           <a:prstGeom prst="line">
@@ -3433,8 +3433,8 @@
         </p:nvSpPr>
         <p:spPr>
           <a:xfrm>
-            <a:off x="6830568" y="1801368"/>
-            <a:ext cx="3474720" cy="274320"/>
+            <a:off x="5166360" y="1801368"/>
+            <a:ext cx="3657600" cy="274320"/>
           </a:xfrm>
           <a:prstGeom prst="rect">
             <a:avLst/>
@@ -3459,7 +3459,7 @@
                 </a:solidFill>
                 <a:latin typeface="Microsoft JhengHei"/>
               </a:rPr>
-              <a:t>建立 Agent 時設定一次,非每日流程</a:t>
+              <a:t>建立 Agent 時設定一次,當作檢索記憶的查詢依據</a:t>
             </a:r>
           </a:p>
         </p:txBody>
@@ -4547,6 +4547,264 @@
                           </a:solidFill>
                           <a:latin typeface="Microsoft JhengHei"/>
                         </a:rPr>
+                        <a:t>Summarize</a:t>
+                      </a:r>
+                    </a:p>
+                    <a:p>
+                      <a:pPr algn="ctr"/>
+                      <a:r>
+                        <a:rPr sz="860" b="1">
+                          <a:solidFill>
+                            <a:srgbClr val="000000"/>
+                          </a:solidFill>
+                          <a:latin typeface="Microsoft JhengHei"/>
+                        </a:rPr>
+                        <a:t>摘要</a:t>
+                      </a:r>
+                    </a:p>
+                  </a:txBody>
+                  <a:tcPr marL="40000" marR="40000" marT="10000" marB="10000" anchor="ctr">
+                    <a:solidFill>
+                      <a:srgbClr val="FFFFFF"/>
+                    </a:solidFill>
+                  </a:tcPr>
+                </a:tc>
+                <a:tc>
+                  <a:txBody>
+                    <a:bodyPr wrap="square"/>
+                    <a:lstStyle/>
+                    <a:p>
+                      <a:pPr algn="l"/>
+                      <a:r>
+                        <a:rPr sz="780" b="0">
+                          <a:solidFill>
+                            <a:srgbClr val="000000"/>
+                          </a:solidFill>
+                          <a:latin typeface="Microsoft JhengHei"/>
+                        </a:rPr>
+                        <a:t>不在每日流程裡,是模擬開始前的離線腳本,呼叫 LLM 把原文壓成約 200 tokens 摘要,另用 VADER/FinBERT 幫新聞標情緒分數</a:t>
+                      </a:r>
+                    </a:p>
+                  </a:txBody>
+                  <a:tcPr marL="40000" marR="40000" marT="10000" marB="10000" anchor="ctr">
+                    <a:solidFill>
+                      <a:srgbClr val="FFFFFF"/>
+                    </a:solidFill>
+                  </a:tcPr>
+                </a:tc>
+                <a:tc>
+                  <a:txBody>
+                    <a:bodyPr wrap="square"/>
+                    <a:lstStyle/>
+                    <a:p>
+                      <a:pPr algn="l"/>
+                      <a:r>
+                        <a:rPr sz="780" b="0">
+                          <a:solidFill>
+                            <a:srgbClr val="000000"/>
+                          </a:solidFill>
+                          <a:latin typeface="Microsoft JhengHei"/>
+                        </a:rPr>
+                        <a:t>清理過的原始新聞、10-K、10-Q 全文</a:t>
+                      </a:r>
+                    </a:p>
+                  </a:txBody>
+                  <a:tcPr marL="40000" marR="40000" marT="10000" marB="10000" anchor="ctr">
+                    <a:solidFill>
+                      <a:srgbClr val="FFFFFF"/>
+                    </a:solidFill>
+                  </a:tcPr>
+                </a:tc>
+                <a:tc>
+                  <a:txBody>
+                    <a:bodyPr wrap="square"/>
+                    <a:lstStyle/>
+                    <a:p>
+                      <a:pPr algn="l"/>
+                      <a:r>
+                        <a:rPr sz="780" b="0">
+                          <a:solidFill>
+                            <a:srgbClr val="000000"/>
+                          </a:solidFill>
+                          <a:latin typeface="Microsoft JhengHei"/>
+                        </a:rPr>
+                        <a:t>壓縮後的摘要文字(和情緒標註),供每日流程使用</a:t>
+                      </a:r>
+                    </a:p>
+                  </a:txBody>
+                  <a:tcPr marL="40000" marR="40000" marT="10000" marB="10000" anchor="ctr">
+                    <a:solidFill>
+                      <a:srgbClr val="FFFFFF"/>
+                    </a:solidFill>
+                  </a:tcPr>
+                </a:tc>
+                <a:tc>
+                  <a:txBody>
+                    <a:bodyPr wrap="square"/>
+                    <a:lstStyle/>
+                    <a:p>
+                      <a:pPr algn="l"/>
+                      <a:r>
+                        <a:rPr sz="780" b="0">
+                          <a:solidFill>
+                            <a:srgbClr val="000000"/>
+                          </a:solidFill>
+                          <a:latin typeface="Microsoft JhengHei"/>
+                        </a:rPr>
+                        <a:t>先把落落長的文件濃縮,減少之後存記憶與送 prompt 的負擔</a:t>
+                      </a:r>
+                    </a:p>
+                  </a:txBody>
+                  <a:tcPr marL="40000" marR="40000" marT="10000" marB="10000" anchor="ctr">
+                    <a:solidFill>
+                      <a:srgbClr val="FFFFFF"/>
+                    </a:solidFill>
+                  </a:tcPr>
+                </a:tc>
+              </a:tr>
+              <a:tr h="598932">
+                <a:tc>
+                  <a:txBody>
+                    <a:bodyPr wrap="square"/>
+                    <a:lstStyle/>
+                    <a:p>
+                      <a:pPr algn="ctr"/>
+                      <a:r>
+                        <a:rPr sz="860" b="1">
+                          <a:solidFill>
+                            <a:srgbClr val="000000"/>
+                          </a:solidFill>
+                          <a:latin typeface="Microsoft JhengHei"/>
+                        </a:rPr>
+                        <a:t>Profiling</a:t>
+                      </a:r>
+                    </a:p>
+                    <a:p>
+                      <a:pPr algn="ctr"/>
+                      <a:r>
+                        <a:rPr sz="860" b="1">
+                          <a:solidFill>
+                            <a:srgbClr val="000000"/>
+                          </a:solidFill>
+                          <a:latin typeface="Microsoft JhengHei"/>
+                        </a:rPr>
+                        <a:t>Module</a:t>
+                      </a:r>
+                    </a:p>
+                  </a:txBody>
+                  <a:tcPr marL="40000" marR="40000" marT="10000" marB="10000" anchor="ctr">
+                    <a:solidFill>
+                      <a:srgbClr val="F4F6F8"/>
+                    </a:solidFill>
+                  </a:tcPr>
+                </a:tc>
+                <a:tc>
+                  <a:txBody>
+                    <a:bodyPr wrap="square"/>
+                    <a:lstStyle/>
+                    <a:p>
+                      <a:pPr algn="l"/>
+                      <a:r>
+                        <a:rPr sz="780" b="0">
+                          <a:solidFill>
+                            <a:srgbClr val="000000"/>
+                          </a:solidFill>
+                          <a:latin typeface="Microsoft JhengHei"/>
+                        </a:rPr>
+                        <a:t>建立 Agent 時,由設定檔裡固定的一段文字模板決定,描述交易專長與風險傾向,模擬過程中不再改變</a:t>
+                      </a:r>
+                    </a:p>
+                  </a:txBody>
+                  <a:tcPr marL="40000" marR="40000" marT="10000" marB="10000" anchor="ctr">
+                    <a:solidFill>
+                      <a:srgbClr val="F4F6F8"/>
+                    </a:solidFill>
+                  </a:tcPr>
+                </a:tc>
+                <a:tc>
+                  <a:txBody>
+                    <a:bodyPr wrap="square"/>
+                    <a:lstStyle/>
+                    <a:p>
+                      <a:pPr algn="l"/>
+                      <a:r>
+                        <a:rPr sz="780" b="0">
+                          <a:solidFill>
+                            <a:srgbClr val="000000"/>
+                          </a:solidFill>
+                          <a:latin typeface="Microsoft JhengHei"/>
+                        </a:rPr>
+                        <a:t>設定檔裡寫好的產業背景與人設文字</a:t>
+                      </a:r>
+                    </a:p>
+                  </a:txBody>
+                  <a:tcPr marL="40000" marR="40000" marT="10000" marB="10000" anchor="ctr">
+                    <a:solidFill>
+                      <a:srgbClr val="F4F6F8"/>
+                    </a:solidFill>
+                  </a:tcPr>
+                </a:tc>
+                <a:tc>
+                  <a:txBody>
+                    <a:bodyPr wrap="square"/>
+                    <a:lstStyle/>
+                    <a:p>
+                      <a:pPr algn="l"/>
+                      <a:r>
+                        <a:rPr sz="780" b="0">
+                          <a:solidFill>
+                            <a:srgbClr val="000000"/>
+                          </a:solidFill>
+                          <a:latin typeface="Microsoft JhengHei"/>
+                        </a:rPr>
+                        <a:t>貫穿模擬過程使用的角色人設字串,做為 Retrieve 檢索記憶的查詢依據</a:t>
+                      </a:r>
+                    </a:p>
+                  </a:txBody>
+                  <a:tcPr marL="40000" marR="40000" marT="10000" marB="10000" anchor="ctr">
+                    <a:solidFill>
+                      <a:srgbClr val="F4F6F8"/>
+                    </a:solidFill>
+                  </a:tcPr>
+                </a:tc>
+                <a:tc>
+                  <a:txBody>
+                    <a:bodyPr wrap="square"/>
+                    <a:lstStyle/>
+                    <a:p>
+                      <a:pPr algn="l"/>
+                      <a:r>
+                        <a:rPr sz="780" b="0">
+                          <a:solidFill>
+                            <a:srgbClr val="000000"/>
+                          </a:solidFill>
+                          <a:latin typeface="Microsoft JhengHei"/>
+                        </a:rPr>
+                        <a:t>決定檢索時撈出哪些記憶,間接影響反思與決策,不隨每日資料變動</a:t>
+                      </a:r>
+                    </a:p>
+                  </a:txBody>
+                  <a:tcPr marL="40000" marR="40000" marT="10000" marB="10000" anchor="ctr">
+                    <a:solidFill>
+                      <a:srgbClr val="F4F6F8"/>
+                    </a:solidFill>
+                  </a:tcPr>
+                </a:tc>
+              </a:tr>
+              <a:tr h="598932">
+                <a:tc>
+                  <a:txBody>
+                    <a:bodyPr wrap="square"/>
+                    <a:lstStyle/>
+                    <a:p>
+                      <a:pPr algn="ctr"/>
+                      <a:r>
+                        <a:rPr sz="860" b="1">
+                          <a:solidFill>
+                            <a:srgbClr val="000000"/>
+                          </a:solidFill>
+                          <a:latin typeface="Microsoft JhengHei"/>
+                        </a:rPr>
                         <a:t>Sorting</a:t>
                       </a:r>
                     </a:p>
@@ -4652,264 +4910,6 @@
                           <a:latin typeface="Microsoft JhengHei"/>
                         </a:rPr>
                         <a:t>判斷資料型態,決定接下來走哪條路線</a:t>
-                      </a:r>
-                    </a:p>
-                  </a:txBody>
-                  <a:tcPr marL="40000" marR="40000" marT="10000" marB="10000" anchor="ctr">
-                    <a:solidFill>
-                      <a:srgbClr val="FFFFFF"/>
-                    </a:solidFill>
-                  </a:tcPr>
-                </a:tc>
-              </a:tr>
-              <a:tr h="598932">
-                <a:tc>
-                  <a:txBody>
-                    <a:bodyPr wrap="square"/>
-                    <a:lstStyle/>
-                    <a:p>
-                      <a:pPr algn="ctr"/>
-                      <a:r>
-                        <a:rPr sz="860" b="1">
-                          <a:solidFill>
-                            <a:srgbClr val="000000"/>
-                          </a:solidFill>
-                          <a:latin typeface="Microsoft JhengHei"/>
-                        </a:rPr>
-                        <a:t>Profiling</a:t>
-                      </a:r>
-                    </a:p>
-                    <a:p>
-                      <a:pPr algn="ctr"/>
-                      <a:r>
-                        <a:rPr sz="860" b="1">
-                          <a:solidFill>
-                            <a:srgbClr val="000000"/>
-                          </a:solidFill>
-                          <a:latin typeface="Microsoft JhengHei"/>
-                        </a:rPr>
-                        <a:t>Module</a:t>
-                      </a:r>
-                    </a:p>
-                  </a:txBody>
-                  <a:tcPr marL="40000" marR="40000" marT="10000" marB="10000" anchor="ctr">
-                    <a:solidFill>
-                      <a:srgbClr val="F4F6F8"/>
-                    </a:solidFill>
-                  </a:tcPr>
-                </a:tc>
-                <a:tc>
-                  <a:txBody>
-                    <a:bodyPr wrap="square"/>
-                    <a:lstStyle/>
-                    <a:p>
-                      <a:pPr algn="l"/>
-                      <a:r>
-                        <a:rPr sz="780" b="0">
-                          <a:solidFill>
-                            <a:srgbClr val="000000"/>
-                          </a:solidFill>
-                          <a:latin typeface="Microsoft JhengHei"/>
-                        </a:rPr>
-                        <a:t>建立 Agent 時,由設定檔裡固定的一段文字模板決定,描述交易專長與風險傾向,模擬過程中不再改變</a:t>
-                      </a:r>
-                    </a:p>
-                  </a:txBody>
-                  <a:tcPr marL="40000" marR="40000" marT="10000" marB="10000" anchor="ctr">
-                    <a:solidFill>
-                      <a:srgbClr val="F4F6F8"/>
-                    </a:solidFill>
-                  </a:tcPr>
-                </a:tc>
-                <a:tc>
-                  <a:txBody>
-                    <a:bodyPr wrap="square"/>
-                    <a:lstStyle/>
-                    <a:p>
-                      <a:pPr algn="l"/>
-                      <a:r>
-                        <a:rPr sz="780" b="0">
-                          <a:solidFill>
-                            <a:srgbClr val="000000"/>
-                          </a:solidFill>
-                          <a:latin typeface="Microsoft JhengHei"/>
-                        </a:rPr>
-                        <a:t>設定檔裡寫好的產業背景與人設文字</a:t>
-                      </a:r>
-                    </a:p>
-                  </a:txBody>
-                  <a:tcPr marL="40000" marR="40000" marT="10000" marB="10000" anchor="ctr">
-                    <a:solidFill>
-                      <a:srgbClr val="F4F6F8"/>
-                    </a:solidFill>
-                  </a:tcPr>
-                </a:tc>
-                <a:tc>
-                  <a:txBody>
-                    <a:bodyPr wrap="square"/>
-                    <a:lstStyle/>
-                    <a:p>
-                      <a:pPr algn="l"/>
-                      <a:r>
-                        <a:rPr sz="780" b="0">
-                          <a:solidFill>
-                            <a:srgbClr val="000000"/>
-                          </a:solidFill>
-                          <a:latin typeface="Microsoft JhengHei"/>
-                        </a:rPr>
-                        <a:t>貫穿整個模擬過程使用的角色人設字串</a:t>
-                      </a:r>
-                    </a:p>
-                  </a:txBody>
-                  <a:tcPr marL="40000" marR="40000" marT="10000" marB="10000" anchor="ctr">
-                    <a:solidFill>
-                      <a:srgbClr val="F4F6F8"/>
-                    </a:solidFill>
-                  </a:tcPr>
-                </a:tc>
-                <a:tc>
-                  <a:txBody>
-                    <a:bodyPr wrap="square"/>
-                    <a:lstStyle/>
-                    <a:p>
-                      <a:pPr algn="l"/>
-                      <a:r>
-                        <a:rPr sz="780" b="0">
-                          <a:solidFill>
-                            <a:srgbClr val="000000"/>
-                          </a:solidFill>
-                          <a:latin typeface="Microsoft JhengHei"/>
-                        </a:rPr>
-                        <a:t>決定這個 Agent 的判斷立場,不隨每日資料變動</a:t>
-                      </a:r>
-                    </a:p>
-                  </a:txBody>
-                  <a:tcPr marL="40000" marR="40000" marT="10000" marB="10000" anchor="ctr">
-                    <a:solidFill>
-                      <a:srgbClr val="F4F6F8"/>
-                    </a:solidFill>
-                  </a:tcPr>
-                </a:tc>
-              </a:tr>
-              <a:tr h="598932">
-                <a:tc>
-                  <a:txBody>
-                    <a:bodyPr wrap="square"/>
-                    <a:lstStyle/>
-                    <a:p>
-                      <a:pPr algn="ctr"/>
-                      <a:r>
-                        <a:rPr sz="860" b="1">
-                          <a:solidFill>
-                            <a:srgbClr val="000000"/>
-                          </a:solidFill>
-                          <a:latin typeface="Microsoft JhengHei"/>
-                        </a:rPr>
-                        <a:t>Summarize</a:t>
-                      </a:r>
-                    </a:p>
-                    <a:p>
-                      <a:pPr algn="ctr"/>
-                      <a:r>
-                        <a:rPr sz="860" b="1">
-                          <a:solidFill>
-                            <a:srgbClr val="000000"/>
-                          </a:solidFill>
-                          <a:latin typeface="Microsoft JhengHei"/>
-                        </a:rPr>
-                        <a:t>摘要</a:t>
-                      </a:r>
-                    </a:p>
-                  </a:txBody>
-                  <a:tcPr marL="40000" marR="40000" marT="10000" marB="10000" anchor="ctr">
-                    <a:solidFill>
-                      <a:srgbClr val="FFFFFF"/>
-                    </a:solidFill>
-                  </a:tcPr>
-                </a:tc>
-                <a:tc>
-                  <a:txBody>
-                    <a:bodyPr wrap="square"/>
-                    <a:lstStyle/>
-                    <a:p>
-                      <a:pPr algn="l"/>
-                      <a:r>
-                        <a:rPr sz="780" b="0">
-                          <a:solidFill>
-                            <a:srgbClr val="000000"/>
-                          </a:solidFill>
-                          <a:latin typeface="Microsoft JhengHei"/>
-                        </a:rPr>
-                        <a:t>不在每日流程裡,是模擬開始前的離線腳本,呼叫 LLM 把原文壓成約 200 tokens 摘要,另用 VADER/FinBERT 幫新聞標情緒分數</a:t>
-                      </a:r>
-                    </a:p>
-                  </a:txBody>
-                  <a:tcPr marL="40000" marR="40000" marT="10000" marB="10000" anchor="ctr">
-                    <a:solidFill>
-                      <a:srgbClr val="FFFFFF"/>
-                    </a:solidFill>
-                  </a:tcPr>
-                </a:tc>
-                <a:tc>
-                  <a:txBody>
-                    <a:bodyPr wrap="square"/>
-                    <a:lstStyle/>
-                    <a:p>
-                      <a:pPr algn="l"/>
-                      <a:r>
-                        <a:rPr sz="780" b="0">
-                          <a:solidFill>
-                            <a:srgbClr val="000000"/>
-                          </a:solidFill>
-                          <a:latin typeface="Microsoft JhengHei"/>
-                        </a:rPr>
-                        <a:t>清理過的原始新聞、10-K、10-Q 全文</a:t>
-                      </a:r>
-                    </a:p>
-                  </a:txBody>
-                  <a:tcPr marL="40000" marR="40000" marT="10000" marB="10000" anchor="ctr">
-                    <a:solidFill>
-                      <a:srgbClr val="FFFFFF"/>
-                    </a:solidFill>
-                  </a:tcPr>
-                </a:tc>
-                <a:tc>
-                  <a:txBody>
-                    <a:bodyPr wrap="square"/>
-                    <a:lstStyle/>
-                    <a:p>
-                      <a:pPr algn="l"/>
-                      <a:r>
-                        <a:rPr sz="780" b="0">
-                          <a:solidFill>
-                            <a:srgbClr val="000000"/>
-                          </a:solidFill>
-                          <a:latin typeface="Microsoft JhengHei"/>
-                        </a:rPr>
-                        <a:t>壓縮後的摘要文字(和情緒標註),供每日流程使用</a:t>
-                      </a:r>
-                    </a:p>
-                  </a:txBody>
-                  <a:tcPr marL="40000" marR="40000" marT="10000" marB="10000" anchor="ctr">
-                    <a:solidFill>
-                      <a:srgbClr val="FFFFFF"/>
-                    </a:solidFill>
-                  </a:tcPr>
-                </a:tc>
-                <a:tc>
-                  <a:txBody>
-                    <a:bodyPr wrap="square"/>
-                    <a:lstStyle/>
-                    <a:p>
-                      <a:pPr algn="l"/>
-                      <a:r>
-                        <a:rPr sz="780" b="0">
-                          <a:solidFill>
-                            <a:srgbClr val="000000"/>
-                          </a:solidFill>
-                          <a:latin typeface="Microsoft JhengHei"/>
-                        </a:rPr>
-                        <a:t>先把落落長的文件濃縮,減少之後存記憶與送 prompt 的負擔</a:t>
                       </a:r>
                     </a:p>
                   </a:txBody>
@@ -5379,7 +5379,7 @@
                           </a:solidFill>
                           <a:latin typeface="Microsoft JhengHei"/>
                         </a:rPr>
-                        <a:t>Retrieve 取出的記憶＋Observe 的市場事實＋Profiling 的角色人設</a:t>
+                        <a:t>Retrieve 取出的記憶＋Observe 的市場事實</a:t>
                       </a:r>
                     </a:p>
                   </a:txBody>

--- a/Andy/FinMem_PPT_完整版.pptx
+++ b/Andy/FinMem_PPT_完整版.pptx
@@ -4969,7 +4969,7 @@
                           </a:solidFill>
                           <a:latin typeface="Microsoft JhengHei"/>
                         </a:rPr>
-                        <a:t>規則式計算,不是 LLM,依訓練/測試模式取價差或過去幾天的累積報酬率</a:t>
+                        <a:t>規則式計算(非 LLM):portfolio.get_moment() 把最近 3 天每天的收盤價差加總,大於零記為漲、小於零記為跌</a:t>
                       </a:r>
                     </a:p>
                   </a:txBody>
@@ -5015,7 +5015,7 @@
                           </a:solidFill>
                           <a:latin typeface="Microsoft JhengHei"/>
                         </a:rPr>
-                        <a:t>動能趨勢描述文字</a:t>
+                        <a:t>動能趨勢描述文字(漲/跌/持平三選一)</a:t>
                       </a:r>
                     </a:p>
                   </a:txBody>
@@ -5098,7 +5098,7 @@
                           </a:solidFill>
                           <a:latin typeface="Microsoft JhengHei"/>
                         </a:rPr>
-                        <a:t>4 個獨立記憶庫(淺/中/深/反思),各自算重要性、新近度、被引用次數三種分數,分數達門檻就在淺中深之間升降,過低就刪除</a:t>
+                        <a:t>4 個獨立記憶庫(淺/中/深/反思),各自算重要性、新近度、綜合分數;重要性分數的增減來自 Decision-making 依實際損益給的回饋(賺加分、賠扣分),分數達門檻就在淺中深之間升降,反思層不參與升降層</a:t>
                       </a:r>
                     </a:p>
                   </a:txBody>
@@ -5121,7 +5121,7 @@
                           </a:solidFill>
                           <a:latin typeface="Microsoft JhengHei"/>
                         </a:rPr>
-                        <a:t>Summarize 產出的摘要文字</a:t>
+                        <a:t>Summarize 產出的摘要文字＋Reflect 產出的推理摘要</a:t>
                       </a:r>
                     </a:p>
                   </a:txBody>
@@ -5167,7 +5167,7 @@
                           </a:solidFill>
                           <a:latin typeface="Microsoft JhengHei"/>
                         </a:rPr>
-                        <a:t>模擬「常用的記得久、沒用的忘得快」,決定哪些資訊該長期保留</a:t>
+                        <a:t>模擬「常用且證實有效的記得久、沒用或誤導的忘得快」,決定哪些資訊該長期保留</a:t>
                       </a:r>
                     </a:p>
                   </a:txBody>
@@ -5227,7 +5227,7 @@
                           </a:solidFill>
                           <a:latin typeface="Microsoft JhengHei"/>
                         </a:rPr>
-                        <a:t>查詢文字轉 embedding,用向量相似度搜尋,再跟記憶本身的分數加總排序取 Top-K</a:t>
+                        <a:t>人設字串轉 embedding,對四層各自獨立做向量相似度搜尋,各層取分數最高的 Top-K(K=3)</a:t>
                       </a:r>
                     </a:p>
                   </a:txBody>
@@ -5250,7 +5250,7 @@
                           </a:solidFill>
                           <a:latin typeface="Microsoft JhengHei"/>
                         </a:rPr>
-                        <a:t>當下的查詢情境(角色人設字串)</a:t>
+                        <a:t>Profiling 設定的角色人設字串</a:t>
                       </a:r>
                     </a:p>
                   </a:txBody>
@@ -5273,7 +5273,7 @@
                           </a:solidFill>
                           <a:latin typeface="Microsoft JhengHei"/>
                         </a:rPr>
-                        <a:t>各層 Top-K 相關記憶(含編號)</a:t>
+                        <a:t>四層各自的 Top-K 相關記憶(含編號),最多 4×K 筆</a:t>
                       </a:r>
                     </a:p>
                   </a:txBody>
@@ -5296,7 +5296,7 @@
                           </a:solidFill>
                           <a:latin typeface="Microsoft JhengHei"/>
                         </a:rPr>
-                        <a:t>找出當下最相關的歷史依據</a:t>
+                        <a:t>找出當下最相關的歷史依據,供 Reflect 使用</a:t>
                       </a:r>
                     </a:p>
                   </a:txBody>
@@ -5356,7 +5356,7 @@
                           </a:solidFill>
                           <a:latin typeface="Microsoft JhengHei"/>
                         </a:rPr>
-                        <a:t>把 LLM 呼叫包裝成固定格式輸出,依訓練/測試模式產出結構化結果(引用的記憶編號＋推理摘要)</a:t>
+                        <a:t>全流程唯一呼叫 LLM 的地方:guardrails 包裝輸出格式,依訓練/測試模式產出結構化結果;引用幾筆記憶由 LLM 自行判斷,不固定</a:t>
                       </a:r>
                     </a:p>
                   </a:txBody>
@@ -5402,7 +5402,7 @@
                           </a:solidFill>
                           <a:latin typeface="Microsoft JhengHei"/>
                         </a:rPr>
-                        <a:t>結構化反思(引用記憶編號＋推理摘要)</a:t>
+                        <a:t>結構化反思(引用記憶編號＋推理摘要),摘要會回寫進反思層</a:t>
                       </a:r>
                     </a:p>
                   </a:txBody>
@@ -5485,7 +5485,7 @@
                           </a:solidFill>
                           <a:latin typeface="Microsoft JhengHei"/>
                         </a:rPr>
-                        <a:t>整合反思結果與目前持倉狀態,產出買賣持有決策、更新持倉,並讓被引用的記憶獲得加分</a:t>
+                        <a:t>4 個子步驟:①依決策(test)或實際隔日漲跌(train)決定買賣方向 ②寫進持倉紀錄(僅內部模擬,未連接真實券商) ③依最近 7 天實際損益,對本次引用的記憶加分或扣分 ④觸發整個記憶庫當天的衰退/清倉/升降層</a:t>
                       </a:r>
                     </a:p>
                   </a:txBody>
@@ -5508,7 +5508,7 @@
                           </a:solidFill>
                           <a:latin typeface="Microsoft JhengHei"/>
                         </a:rPr>
-                        <a:t>Reflect 的推理結果＋目前持倉</a:t>
+                        <a:t>Reflect 的推理結果＋目前持倉＋近期實際損益</a:t>
                       </a:r>
                     </a:p>
                   </a:txBody>
@@ -5531,7 +5531,7 @@
                           </a:solidFill>
                           <a:latin typeface="Microsoft JhengHei"/>
                         </a:rPr>
-                        <a:t>Buy / Sell / Hold 決策,更新後的持倉</a:t>
+                        <a:t>Buy / Sell / Hold 決策、更新後的持倉、記憶分數獎懲、記憶庫完成當天維護</a:t>
                       </a:r>
                     </a:p>
                   </a:txBody>
@@ -5554,7 +5554,7 @@
                           </a:solidFill>
                           <a:latin typeface="Microsoft JhengHei"/>
                         </a:rPr>
-                        <a:t>產出最終下單決策,同時讓證實有用的記憶被強化</a:t>
+                        <a:t>把推理轉成模擬倉位動作,並用實際績效回頭校正記憶的可信度</a:t>
                       </a:r>
                     </a:p>
                   </a:txBody>
@@ -5684,7 +5684,7 @@
         </p:nvGraphicFramePr>
         <p:xfrm>
           <a:off x="320040" y="1005840"/>
-          <a:ext cx="11247120" cy="4160516"/>
+          <a:ext cx="11247120" cy="4343397"/>
         </p:xfrm>
         <a:graphic>
           <a:graphicData uri="http://schemas.openxmlformats.org/drawingml/2006/table">
@@ -5744,7 +5744,7 @@
                   </a:tcPr>
                 </a:tc>
               </a:tr>
-              <a:tr h="384962">
+              <a:tr h="366591">
                 <a:tc>
                   <a:txBody>
                     <a:bodyPr wrap="square"/>
@@ -5752,13 +5752,13 @@
                     <a:p>
                       <a:pPr algn="l"/>
                       <a:r>
-                        <a:rPr sz="950" b="1">
+                        <a:rPr sz="900" b="1">
                           <a:solidFill>
                             <a:srgbClr val="000000"/>
                           </a:solidFill>
                           <a:latin typeface="Microsoft JhengHei"/>
                         </a:rPr>
-                        <a:t>Sorting / Decision-making</a:t>
+                        <a:t>Sorting</a:t>
                       </a:r>
                     </a:p>
                   </a:txBody>
@@ -5775,13 +5775,13 @@
                     <a:p>
                       <a:pPr algn="l"/>
                       <a:r>
-                        <a:rPr sz="950" b="0">
+                        <a:rPr sz="900" b="0">
                           <a:solidFill>
                             <a:srgbClr val="000000"/>
                           </a:solidFill>
                           <a:latin typeface="Microsoft JhengHei"/>
                         </a:rPr>
-                        <a:t>puppy/agent.py — LLMAgent.step()</a:t>
+                        <a:t>puppy/agent.py — LLMAgent.step() 開頭(官方註解 1~3)</a:t>
                       </a:r>
                     </a:p>
                   </a:txBody>
@@ -5792,7 +5792,7 @@
                   </a:tcPr>
                 </a:tc>
               </a:tr>
-              <a:tr h="384962">
+              <a:tr h="366591">
                 <a:tc>
                   <a:txBody>
                     <a:bodyPr wrap="square"/>
@@ -5800,7 +5800,7 @@
                     <a:p>
                       <a:pPr algn="l"/>
                       <a:r>
-                        <a:rPr sz="950" b="1">
+                        <a:rPr sz="900" b="1">
                           <a:solidFill>
                             <a:srgbClr val="000000"/>
                           </a:solidFill>
@@ -5823,13 +5823,13 @@
                     <a:p>
                       <a:pPr algn="l"/>
                       <a:r>
-                        <a:rPr sz="950" b="0">
+                        <a:rPr sz="900" b="0">
                           <a:solidFill>
                             <a:srgbClr val="000000"/>
                           </a:solidFill>
                           <a:latin typeface="Microsoft JhengHei"/>
                         </a:rPr>
-                        <a:t>puppy/agent.py(角色字串)＋ config/*.toml 的 character_string</a:t>
+                        <a:t>puppy/agent.py(character_string 屬性)＋ config/*.toml 的 character_string</a:t>
                       </a:r>
                     </a:p>
                   </a:txBody>
@@ -5840,7 +5840,7 @@
                   </a:tcPr>
                 </a:tc>
               </a:tr>
-              <a:tr h="384962">
+              <a:tr h="366591">
                 <a:tc>
                   <a:txBody>
                     <a:bodyPr wrap="square"/>
@@ -5848,7 +5848,7 @@
                     <a:p>
                       <a:pPr algn="l"/>
                       <a:r>
-                        <a:rPr sz="950" b="1">
+                        <a:rPr sz="900" b="1">
                           <a:solidFill>
                             <a:srgbClr val="000000"/>
                           </a:solidFill>
@@ -5871,7 +5871,7 @@
                     <a:p>
                       <a:pPr algn="l"/>
                       <a:r>
-                        <a:rPr sz="950" b="0">
+                        <a:rPr sz="900" b="0">
                           <a:solidFill>
                             <a:srgbClr val="000000"/>
                           </a:solidFill>
@@ -5888,7 +5888,7 @@
                   </a:tcPr>
                 </a:tc>
               </a:tr>
-              <a:tr h="384962">
+              <a:tr h="366591">
                 <a:tc>
                   <a:txBody>
                     <a:bodyPr wrap="square"/>
@@ -5896,13 +5896,13 @@
                     <a:p>
                       <a:pPr algn="l"/>
                       <a:r>
-                        <a:rPr sz="950" b="1">
+                        <a:rPr sz="900" b="1">
                           <a:solidFill>
                             <a:srgbClr val="000000"/>
                           </a:solidFill>
                           <a:latin typeface="Microsoft JhengHei"/>
                         </a:rPr>
-                        <a:t>情緒標註(離線)</a:t>
+                        <a:t>清理／情緒標註(離線)</a:t>
                       </a:r>
                     </a:p>
                   </a:txBody>
@@ -5919,13 +5919,13 @@
                     <a:p>
                       <a:pPr algn="l"/>
                       <a:r>
-                        <a:rPr sz="950" b="0">
+                        <a:rPr sz="900" b="0">
                           <a:solidFill>
                             <a:srgbClr val="000000"/>
                           </a:solidFill>
                           <a:latin typeface="Microsoft JhengHei"/>
                         </a:rPr>
-                        <a:t>data-pipeline/05-get_sentiment_by_ticker.py(VADER / FinBERT)</a:t>
+                        <a:t>data-pipeline/02-Raw_News_Data_Cleaning.py ＋ 05-get_sentiment_by_ticker.py(VADER / FinBERT)</a:t>
                       </a:r>
                     </a:p>
                   </a:txBody>
@@ -5936,7 +5936,7 @@
                   </a:tcPr>
                 </a:tc>
               </a:tr>
-              <a:tr h="384962">
+              <a:tr h="366591">
                 <a:tc>
                   <a:txBody>
                     <a:bodyPr wrap="square"/>
@@ -5944,7 +5944,7 @@
                     <a:p>
                       <a:pPr algn="l"/>
                       <a:r>
-                        <a:rPr sz="950" b="1">
+                        <a:rPr sz="900" b="1">
                           <a:solidFill>
                             <a:srgbClr val="000000"/>
                           </a:solidFill>
@@ -5967,13 +5967,13 @@
                     <a:p>
                       <a:pPr algn="l"/>
                       <a:r>
-                        <a:rPr sz="950" b="0">
+                        <a:rPr sz="900" b="0">
                           <a:solidFill>
                             <a:srgbClr val="000000"/>
                           </a:solidFill>
                           <a:latin typeface="Microsoft JhengHei"/>
                         </a:rPr>
-                        <a:t>puppy/agent.py ＋ puppy/portfolio.py</a:t>
+                        <a:t>puppy/portfolio.py — get_moment(moment_window=3)</a:t>
                       </a:r>
                     </a:p>
                   </a:txBody>
@@ -5984,7 +5984,7 @@
                   </a:tcPr>
                 </a:tc>
               </a:tr>
-              <a:tr h="384962">
+              <a:tr h="366591">
                 <a:tc>
                   <a:txBody>
                     <a:bodyPr wrap="square"/>
@@ -5992,7 +5992,7 @@
                     <a:p>
                       <a:pPr algn="l"/>
                       <a:r>
-                        <a:rPr sz="950" b="1">
+                        <a:rPr sz="900" b="1">
                           <a:solidFill>
                             <a:srgbClr val="000000"/>
                           </a:solidFill>
@@ -6015,7 +6015,7 @@
                     <a:p>
                       <a:pPr algn="l"/>
                       <a:r>
-                        <a:rPr sz="950" b="0">
+                        <a:rPr sz="900" b="0">
                           <a:solidFill>
                             <a:srgbClr val="000000"/>
                           </a:solidFill>
@@ -6032,7 +6032,7 @@
                   </a:tcPr>
                 </a:tc>
               </a:tr>
-              <a:tr h="384962">
+              <a:tr h="366591">
                 <a:tc>
                   <a:txBody>
                     <a:bodyPr wrap="square"/>
@@ -6040,7 +6040,7 @@
                     <a:p>
                       <a:pPr algn="l"/>
                       <a:r>
-                        <a:rPr sz="950" b="1">
+                        <a:rPr sz="900" b="1">
                           <a:solidFill>
                             <a:srgbClr val="000000"/>
                           </a:solidFill>
@@ -6063,7 +6063,7 @@
                     <a:p>
                       <a:pPr algn="l"/>
                       <a:r>
-                        <a:rPr sz="950" b="0">
+                        <a:rPr sz="900" b="0">
                           <a:solidFill>
                             <a:srgbClr val="000000"/>
                           </a:solidFill>
@@ -6080,7 +6080,7 @@
                   </a:tcPr>
                 </a:tc>
               </a:tr>
-              <a:tr h="384962">
+              <a:tr h="366591">
                 <a:tc>
                   <a:txBody>
                     <a:bodyPr wrap="square"/>
@@ -6088,7 +6088,7 @@
                     <a:p>
                       <a:pPr algn="l"/>
                       <a:r>
-                        <a:rPr sz="950" b="1">
+                        <a:rPr sz="900" b="1">
                           <a:solidFill>
                             <a:srgbClr val="000000"/>
                           </a:solidFill>
@@ -6111,7 +6111,7 @@
                     <a:p>
                       <a:pPr algn="l"/>
                       <a:r>
-                        <a:rPr sz="950" b="0">
+                        <a:rPr sz="900" b="0">
                           <a:solidFill>
                             <a:srgbClr val="000000"/>
                           </a:solidFill>
@@ -6128,7 +6128,7 @@
                   </a:tcPr>
                 </a:tc>
               </a:tr>
-              <a:tr h="384962">
+              <a:tr h="366591">
                 <a:tc>
                   <a:txBody>
                     <a:bodyPr wrap="square"/>
@@ -6136,13 +6136,13 @@
                     <a:p>
                       <a:pPr algn="l"/>
                       <a:r>
-                        <a:rPr sz="950" b="1">
+                        <a:rPr sz="900" b="1">
                           <a:solidFill>
                             <a:srgbClr val="000000"/>
                           </a:solidFill>
                           <a:latin typeface="Microsoft JhengHei"/>
                         </a:rPr>
-                        <a:t>資料下載與打包(離線)</a:t>
+                        <a:t>Decision-making</a:t>
                       </a:r>
                     </a:p>
                   </a:txBody>
@@ -6159,13 +6159,13 @@
                     <a:p>
                       <a:pPr algn="l"/>
                       <a:r>
-                        <a:rPr sz="950" b="0">
+                        <a:rPr sz="900" b="0">
                           <a:solidFill>
                             <a:srgbClr val="000000"/>
                           </a:solidFill>
                           <a:latin typeface="Microsoft JhengHei"/>
                         </a:rPr>
-                        <a:t>data-pipeline/01_*.py ～ 04-data_pipeline.py</a:t>
+                        <a:t>puppy/agent.py 的 _construct_train_actions／__process_test_action／_portfolio_step／_update_access_counter ＋ puppy/portfolio.py 的 get_feedback_response</a:t>
                       </a:r>
                     </a:p>
                   </a:txBody>
@@ -6176,7 +6176,7 @@
                   </a:tcPr>
                 </a:tc>
               </a:tr>
-              <a:tr h="384962">
+              <a:tr h="366591">
                 <a:tc>
                   <a:txBody>
                     <a:bodyPr wrap="square"/>
@@ -6184,13 +6184,13 @@
                     <a:p>
                       <a:pPr algn="l"/>
                       <a:r>
-                        <a:rPr sz="950" b="1">
+                        <a:rPr sz="900" b="1">
                           <a:solidFill>
                             <a:srgbClr val="000000"/>
                           </a:solidFill>
                           <a:latin typeface="Microsoft JhengHei"/>
                         </a:rPr>
-                        <a:t>進入點</a:t>
+                        <a:t>資料下載與打包(離線)</a:t>
                       </a:r>
                     </a:p>
                   </a:txBody>
@@ -6207,7 +6207,55 @@
                     <a:p>
                       <a:pPr algn="l"/>
                       <a:r>
-                        <a:rPr sz="950" b="0">
+                        <a:rPr sz="900" b="0">
+                          <a:solidFill>
+                            <a:srgbClr val="000000"/>
+                          </a:solidFill>
+                          <a:latin typeface="Microsoft JhengHei"/>
+                        </a:rPr>
+                        <a:t>data-pipeline/01_*.py ～ 04-data_pipeline.py</a:t>
+                      </a:r>
+                    </a:p>
+                  </a:txBody>
+                  <a:tcPr marL="40000" marR="40000" marT="10000" marB="10000" anchor="ctr">
+                    <a:solidFill>
+                      <a:srgbClr val="F4F6F8"/>
+                    </a:solidFill>
+                  </a:tcPr>
+                </a:tc>
+              </a:tr>
+              <a:tr h="366591">
+                <a:tc>
+                  <a:txBody>
+                    <a:bodyPr wrap="square"/>
+                    <a:lstStyle/>
+                    <a:p>
+                      <a:pPr algn="l"/>
+                      <a:r>
+                        <a:rPr sz="900" b="1">
+                          <a:solidFill>
+                            <a:srgbClr val="000000"/>
+                          </a:solidFill>
+                          <a:latin typeface="Microsoft JhengHei"/>
+                        </a:rPr>
+                        <a:t>進入點</a:t>
+                      </a:r>
+                    </a:p>
+                  </a:txBody>
+                  <a:tcPr marL="40000" marR="40000" marT="10000" marB="10000" anchor="ctr">
+                    <a:solidFill>
+                      <a:srgbClr val="FFFFFF"/>
+                    </a:solidFill>
+                  </a:tcPr>
+                </a:tc>
+                <a:tc>
+                  <a:txBody>
+                    <a:bodyPr wrap="square"/>
+                    <a:lstStyle/>
+                    <a:p>
+                      <a:pPr algn="l"/>
+                      <a:r>
+                        <a:rPr sz="900" b="0">
                           <a:solidFill>
                             <a:srgbClr val="000000"/>
                           </a:solidFill>
@@ -6219,7 +6267,7 @@
                   </a:txBody>
                   <a:tcPr marL="40000" marR="40000" marT="10000" marB="10000" anchor="ctr">
                     <a:solidFill>
-                      <a:srgbClr val="F4F6F8"/>
+                      <a:srgbClr val="FFFFFF"/>
                     </a:solidFill>
                   </a:tcPr>
                 </a:tc>
@@ -6236,8 +6284,8 @@
         </p:nvSpPr>
         <p:spPr>
           <a:xfrm>
-            <a:off x="320040" y="5440680"/>
-            <a:ext cx="7315200" cy="274320"/>
+            <a:off x="320040" y="5577840"/>
+            <a:ext cx="9144000" cy="274320"/>
           </a:xfrm>
           <a:prstGeom prst="rect">
             <a:avLst/>
@@ -6262,7 +6310,7 @@
                 </a:solidFill>
                 <a:latin typeface="Microsoft JhengHei"/>
               </a:rPr>
-              <a:t>範例:被引用的記憶怎麼加分(memory_functions/access_counter.py)</a:t>
+              <a:t>範例:記憶的加分/扣分,其實來自實際損益,不是單純被引用就加分(portfolio.py)</a:t>
             </a:r>
           </a:p>
         </p:txBody>
@@ -6275,8 +6323,8 @@
         </p:nvSpPr>
         <p:spPr>
           <a:xfrm>
-            <a:off x="320040" y="5760720"/>
-            <a:ext cx="6949440" cy="1417320"/>
+            <a:off x="320040" y="5897879"/>
+            <a:ext cx="7589520" cy="1600200"/>
           </a:xfrm>
           <a:prstGeom prst="rect">
             <a:avLst/>
@@ -6319,8 +6367,8 @@
         </p:nvSpPr>
         <p:spPr>
           <a:xfrm>
-            <a:off x="502920" y="5897880"/>
-            <a:ext cx="6583680" cy="1143000"/>
+            <a:off x="502920" y="6035040"/>
+            <a:ext cx="7223760" cy="1371600"/>
           </a:xfrm>
           <a:prstGeom prst="rect">
             <a:avLst/>
@@ -6339,13 +6387,13 @@
               </a:lnSpc>
             </a:pPr>
             <a:r>
-              <a:rPr sz="1000" b="0">
+              <a:rPr sz="950" b="0">
                 <a:solidFill>
                   <a:srgbClr val="D8DEE5"/>
                 </a:solidFill>
                 <a:latin typeface="Microsoft JhengHei"/>
               </a:rPr>
-              <a:t>class LinearImportanceScoreChange:</a:t>
+              <a:t>temp = cumsum((diff(price) * shares_held)[-lookback_window:])[-1]</a:t>
             </a:r>
           </a:p>
           <a:p>
@@ -6355,13 +6403,13 @@
               </a:lnSpc>
             </a:pPr>
             <a:r>
-              <a:rPr sz="1000" b="0">
+              <a:rPr sz="950" b="0">
                 <a:solidFill>
                   <a:srgbClr val="D8DEE5"/>
                 </a:solidFill>
                 <a:latin typeface="Microsoft JhengHei"/>
               </a:rPr>
-              <a:t>    def __call__(self, access_counter: int, importance_score: float) -&gt; float:</a:t>
+              <a:t>if temp &gt; 0:  feedback = 1    # 這段期間實際有賺錢</a:t>
             </a:r>
           </a:p>
           <a:p>
@@ -6371,13 +6419,13 @@
               </a:lnSpc>
             </a:pPr>
             <a:r>
-              <a:rPr sz="1000" b="0">
+              <a:rPr sz="950" b="0">
                 <a:solidFill>
                   <a:srgbClr val="D8DEE5"/>
                 </a:solidFill>
                 <a:latin typeface="Microsoft JhengHei"/>
               </a:rPr>
-              <a:t>        importance_score += access_counter * 5</a:t>
+              <a:t>elif temp &lt; 0: feedback = -1  # 這段期間實際賠錢</a:t>
             </a:r>
           </a:p>
           <a:p>
@@ -6387,13 +6435,61 @@
               </a:lnSpc>
             </a:pPr>
             <a:r>
-              <a:rPr sz="1000" b="0">
+              <a:rPr sz="950" b="0">
                 <a:solidFill>
                   <a:srgbClr val="D8DEE5"/>
                 </a:solidFill>
                 <a:latin typeface="Microsoft JhengHei"/>
               </a:rPr>
-              <a:t>        return importance_score</a:t>
+              <a:t>else:          feedback = 0</a:t>
+            </a:r>
+          </a:p>
+          <a:p>
+            <a:pPr algn="l">
+              <a:lnSpc>
+                <a:spcPct val="115000"/>
+              </a:lnSpc>
+            </a:pPr>
+            <a:r>
+              <a:rPr sz="950" b="0">
+                <a:solidFill>
+                  <a:srgbClr val="D8DEE5"/>
+                </a:solidFill>
+                <a:latin typeface="Microsoft JhengHei"/>
+              </a:rPr>
+              <a:t/>
+            </a:r>
+          </a:p>
+          <a:p>
+            <a:pPr algn="l">
+              <a:lnSpc>
+                <a:spcPct val="115000"/>
+              </a:lnSpc>
+            </a:pPr>
+            <a:r>
+              <a:rPr sz="950" b="0">
+                <a:solidFill>
+                  <a:srgbClr val="D8DEE5"/>
+                </a:solidFill>
+                <a:latin typeface="Microsoft JhengHei"/>
+              </a:rPr>
+              <a:t># access_counter += feedback  (可能是負的!)</a:t>
+            </a:r>
+          </a:p>
+          <a:p>
+            <a:pPr algn="l">
+              <a:lnSpc>
+                <a:spcPct val="115000"/>
+              </a:lnSpc>
+            </a:pPr>
+            <a:r>
+              <a:rPr sz="950" b="0">
+                <a:solidFill>
+                  <a:srgbClr val="D8DEE5"/>
+                </a:solidFill>
+                <a:latin typeface="Microsoft JhengHei"/>
+              </a:rPr>
+              <a:t># importance_score += access_counter * 5</a:t>
             </a:r>
           </a:p>
         </p:txBody>
@@ -6406,8 +6502,8 @@
         </p:nvSpPr>
         <p:spPr>
           <a:xfrm>
-            <a:off x="7452360" y="5760720"/>
-            <a:ext cx="4114800" cy="1463040"/>
+            <a:off x="8092440" y="5897879"/>
+            <a:ext cx="3474720" cy="1600200"/>
           </a:xfrm>
           <a:prstGeom prst="rect">
             <a:avLst/>
@@ -6432,7 +6528,7 @@
                 </a:solidFill>
                 <a:latin typeface="Microsoft JhengHei"/>
               </a:rPr>
-              <a:t>這則記憶每被 LLM 反思時引用一次,</a:t>
+              <a:t>回顧最近幾天(預設 7 天)投資組合</a:t>
             </a:r>
           </a:p>
           <a:p>
@@ -6448,7 +6544,7 @@
                 </a:solidFill>
                 <a:latin typeface="Microsoft JhengHei"/>
               </a:rPr>
-              <a:t>access_counter 就 +1,重要性分數</a:t>
+              <a:t>的實際損益,賺錢才加分、賠錢反而</a:t>
             </a:r>
           </a:p>
           <a:p>
@@ -6464,7 +6560,7 @@
                 </a:solidFill>
                 <a:latin typeface="Microsoft JhengHei"/>
               </a:rPr>
-              <a:t>就跟著墊高 5 分——分數夠高就會被</a:t>
+              <a:t>扣分——不是「被引用就一定加分」,</a:t>
             </a:r>
           </a:p>
           <a:p>
@@ -6480,7 +6576,7 @@
                 </a:solidFill>
                 <a:latin typeface="Microsoft JhengHei"/>
               </a:rPr>
-              <a:t>搬去更持久的記憶層,這是整個分層</a:t>
+              <a:t>是用事後的真實結果,回頭校正這些</a:t>
             </a:r>
           </a:p>
           <a:p>
@@ -6496,7 +6592,7 @@
                 </a:solidFill>
                 <a:latin typeface="Microsoft JhengHei"/>
               </a:rPr>
-              <a:t>記憶機制裡最核心的一段邏輯。</a:t>
+              <a:t>記憶到底值不值得信任。</a:t>
             </a:r>
           </a:p>
         </p:txBody>
@@ -7381,7 +7477,7 @@
         <p:spPr>
           <a:xfrm>
             <a:off x="320040" y="530352"/>
-            <a:ext cx="11247120" cy="365760"/>
+            <a:ext cx="11247120" cy="548640"/>
           </a:xfrm>
           <a:prstGeom prst="rect">
             <a:avLst/>
@@ -7409,6 +7505,31 @@
               <a:t>官方以 TSLA(特斯拉)為展示標的,個股可經 config 檔案更換,整套流程分成「離線準備資料」跟「每日模擬交易」兩段。</a:t>
             </a:r>
           </a:p>
+          <a:p>
+            <a:pPr algn="l">
+              <a:lnSpc>
+                <a:spcPct val="100000"/>
+              </a:lnSpc>
+            </a:pPr>
+            <a:r>
+              <a:rPr sz="1000" b="1">
+                <a:solidFill>
+                  <a:srgbClr val="C03030"/>
+                </a:solidFill>
+                <a:latin typeface="Microsoft JhengHei"/>
+              </a:rPr>
+              <a:t>這整套系統是研究用的回測框架,</a:t>
+            </a:r>
+            <a:r>
+              <a:rPr sz="1050" b="0">
+                <a:solidFill>
+                  <a:srgbClr val="202020"/>
+                </a:solidFill>
+                <a:latin typeface="Microsoft JhengHei"/>
+              </a:rPr>
+              <a:t>從頭到尾沒有連接任何真實券商或交易所,「交易決策」只會更新內部模擬的持倉紀錄,不會真的下單。</a:t>
+            </a:r>
+          </a:p>
         </p:txBody>
       </p:sp>
       <p:sp>
@@ -7419,7 +7540,7 @@
         </p:nvSpPr>
         <p:spPr>
           <a:xfrm>
-            <a:off x="320040" y="1051560"/>
+            <a:off x="320040" y="1325880"/>
             <a:ext cx="2084831" cy="777240"/>
           </a:xfrm>
           <a:prstGeom prst="roundRect">
@@ -7486,7 +7607,7 @@
         </p:nvSpPr>
         <p:spPr>
           <a:xfrm>
-            <a:off x="2423160" y="1307592"/>
+            <a:off x="2423160" y="1581912"/>
             <a:ext cx="128015" cy="256032"/>
           </a:xfrm>
           <a:prstGeom prst="rightArrow">
@@ -7530,7 +7651,7 @@
         </p:nvSpPr>
         <p:spPr>
           <a:xfrm>
-            <a:off x="2569464" y="1051560"/>
+            <a:off x="2569464" y="1325880"/>
             <a:ext cx="2084831" cy="777240"/>
           </a:xfrm>
           <a:prstGeom prst="roundRect">
@@ -7585,7 +7706,7 @@
         </p:nvSpPr>
         <p:spPr>
           <a:xfrm>
-            <a:off x="4672583" y="1307592"/>
+            <a:off x="4672583" y="1581912"/>
             <a:ext cx="128015" cy="256032"/>
           </a:xfrm>
           <a:prstGeom prst="rightArrow">
@@ -7629,7 +7750,7 @@
         </p:nvSpPr>
         <p:spPr>
           <a:xfrm>
-            <a:off x="4818888" y="1051560"/>
+            <a:off x="4818888" y="1325880"/>
             <a:ext cx="2084831" cy="777240"/>
           </a:xfrm>
           <a:prstGeom prst="roundRect">
@@ -7684,7 +7805,7 @@
         </p:nvSpPr>
         <p:spPr>
           <a:xfrm>
-            <a:off x="6922007" y="1307592"/>
+            <a:off x="6922007" y="1581912"/>
             <a:ext cx="128015" cy="256032"/>
           </a:xfrm>
           <a:prstGeom prst="rightArrow">
@@ -7728,7 +7849,7 @@
         </p:nvSpPr>
         <p:spPr>
           <a:xfrm>
-            <a:off x="7068312" y="1051560"/>
+            <a:off x="7068312" y="1325880"/>
             <a:ext cx="2084831" cy="777240"/>
           </a:xfrm>
           <a:prstGeom prst="roundRect">
@@ -7795,7 +7916,7 @@
         </p:nvSpPr>
         <p:spPr>
           <a:xfrm>
-            <a:off x="9171432" y="1307592"/>
+            <a:off x="9171432" y="1581912"/>
             <a:ext cx="128015" cy="256032"/>
           </a:xfrm>
           <a:prstGeom prst="rightArrow">
@@ -7839,7 +7960,7 @@
         </p:nvSpPr>
         <p:spPr>
           <a:xfrm>
-            <a:off x="9317736" y="1051560"/>
+            <a:off x="9317736" y="1325880"/>
             <a:ext cx="2084831" cy="777240"/>
           </a:xfrm>
           <a:prstGeom prst="roundRect">
@@ -7894,7 +8015,7 @@
         </p:nvSpPr>
         <p:spPr>
           <a:xfrm>
-            <a:off x="320040" y="1920239"/>
+            <a:off x="320040" y="2194560"/>
             <a:ext cx="5486400" cy="274320"/>
           </a:xfrm>
           <a:prstGeom prst="rect">
@@ -7933,7 +8054,7 @@
         </p:nvSpPr>
         <p:spPr>
           <a:xfrm>
-            <a:off x="320040" y="2377440"/>
+            <a:off x="320040" y="2651760"/>
             <a:ext cx="5440680" cy="868680"/>
           </a:xfrm>
           <a:prstGeom prst="roundRect">
@@ -8000,7 +8121,7 @@
         </p:nvSpPr>
         <p:spPr>
           <a:xfrm>
-            <a:off x="5943600" y="2377440"/>
+            <a:off x="5943600" y="2651760"/>
             <a:ext cx="5440680" cy="868680"/>
           </a:xfrm>
           <a:prstGeom prst="roundRect">
@@ -8067,7 +8188,7 @@
         </p:nvSpPr>
         <p:spPr>
           <a:xfrm>
-            <a:off x="320040" y="3520440"/>
+            <a:off x="320040" y="3794760"/>
             <a:ext cx="5486400" cy="274320"/>
           </a:xfrm>
           <a:prstGeom prst="rect">
@@ -8106,7 +8227,7 @@
         </p:nvSpPr>
         <p:spPr>
           <a:xfrm>
-            <a:off x="320040" y="3840480"/>
+            <a:off x="320040" y="4114800"/>
             <a:ext cx="11247120" cy="1417320"/>
           </a:xfrm>
           <a:prstGeom prst="roundRect">
@@ -8152,7 +8273,7 @@
         </p:nvSpPr>
         <p:spPr>
           <a:xfrm>
-            <a:off x="502920" y="3959352"/>
+            <a:off x="502920" y="4233672"/>
             <a:ext cx="10881360" cy="1188720"/>
           </a:xfrm>
           <a:prstGeom prst="rect">
@@ -8225,7 +8346,7 @@
         </p:nvSpPr>
         <p:spPr>
           <a:xfrm>
-            <a:off x="320040" y="5166360"/>
+            <a:off x="320040" y="5669280"/>
             <a:ext cx="5486400" cy="274320"/>
           </a:xfrm>
           <a:prstGeom prst="rect">
@@ -8264,7 +8385,7 @@
         </p:nvSpPr>
         <p:spPr>
           <a:xfrm>
-            <a:off x="320040" y="5486400"/>
+            <a:off x="320040" y="5989320"/>
             <a:ext cx="2212848" cy="868680"/>
           </a:xfrm>
           <a:prstGeom prst="roundRect">
@@ -8331,7 +8452,7 @@
         </p:nvSpPr>
         <p:spPr>
           <a:xfrm>
-            <a:off x="2578608" y="5486400"/>
+            <a:off x="2578608" y="5989320"/>
             <a:ext cx="2212848" cy="868680"/>
           </a:xfrm>
           <a:prstGeom prst="roundRect">
@@ -8398,7 +8519,7 @@
         </p:nvSpPr>
         <p:spPr>
           <a:xfrm>
-            <a:off x="4837175" y="5486400"/>
+            <a:off x="4837175" y="5989320"/>
             <a:ext cx="2212848" cy="868680"/>
           </a:xfrm>
           <a:prstGeom prst="roundRect">
@@ -8465,7 +8586,7 @@
         </p:nvSpPr>
         <p:spPr>
           <a:xfrm>
-            <a:off x="7095743" y="5486400"/>
+            <a:off x="7095743" y="5989320"/>
             <a:ext cx="2212848" cy="868680"/>
           </a:xfrm>
           <a:prstGeom prst="roundRect">
@@ -8532,7 +8653,7 @@
         </p:nvSpPr>
         <p:spPr>
           <a:xfrm>
-            <a:off x="9354311" y="5486400"/>
+            <a:off x="9354311" y="5989320"/>
             <a:ext cx="2212848" cy="868680"/>
           </a:xfrm>
           <a:prstGeom prst="roundRect">
@@ -8611,7 +8732,7 @@
         </p:nvSpPr>
         <p:spPr>
           <a:xfrm>
-            <a:off x="320040" y="6537960"/>
+            <a:off x="320040" y="7040880"/>
             <a:ext cx="11247120" cy="822960"/>
           </a:xfrm>
           <a:prstGeom prst="rect">

--- a/Andy/FinMem_PPT_完整版.pptx
+++ b/Andy/FinMem_PPT_完整版.pptx
@@ -3774,7 +3774,7 @@
           <a:p>
             <a:pPr algn="ctr"/>
             <a:r>
-              <a:rPr sz="869" b="1">
+              <a:rPr sz="780" b="1">
                 <a:solidFill>
                   <a:srgbClr val="202020"/>
                 </a:solidFill>
@@ -3786,13 +3786,25 @@
           <a:p>
             <a:pPr algn="ctr"/>
             <a:r>
-              <a:rPr sz="869" b="1">
+              <a:rPr sz="780" b="1">
                 <a:solidFill>
                   <a:srgbClr val="202020"/>
                 </a:solidFill>
                 <a:latin typeface="Microsoft JhengHei"/>
               </a:rPr>
               <a:t>分層長期記憶</a:t>
+            </a:r>
+          </a:p>
+          <a:p>
+            <a:pPr algn="ctr"/>
+            <a:r>
+              <a:rPr sz="780" b="1">
+                <a:solidFill>
+                  <a:srgbClr val="202020"/>
+                </a:solidFill>
+                <a:latin typeface="Microsoft JhengHei"/>
+              </a:rPr>
+              <a:t>(4 庫,依分數升降)</a:t>
             </a:r>
           </a:p>
         </p:txBody>
@@ -4282,7 +4294,62 @@
       </p:sp>
       <p:sp>
         <p:nvSpPr>
-          <p:cNvPr id="25" name="Right Arrow 24"/>
+          <p:cNvPr id="25" name="TextBox 24"/>
+          <p:cNvSpPr txBox="1"/>
+          <p:nvPr/>
+        </p:nvSpPr>
+        <p:spPr>
+          <a:xfrm>
+            <a:off x="9180576" y="3401568"/>
+            <a:ext cx="2103120" cy="502920"/>
+          </a:xfrm>
+          <a:prstGeom prst="rect">
+            <a:avLst/>
+          </a:prstGeom>
+          <a:noFill/>
+        </p:spPr>
+        <p:txBody>
+          <a:bodyPr wrap="square" anchor="t" lIns="0" rIns="0" tIns="0" bIns="0">
+            <a:spAutoFit/>
+          </a:bodyPr>
+          <a:lstStyle/>
+          <a:p>
+            <a:pPr algn="ctr">
+              <a:lnSpc>
+                <a:spcPct val="110000"/>
+              </a:lnSpc>
+            </a:pPr>
+            <a:r>
+              <a:rPr sz="750" b="1">
+                <a:solidFill>
+                  <a:srgbClr val="606060"/>
+                </a:solidFill>
+                <a:latin typeface="Microsoft JhengHei"/>
+              </a:rPr>
+              <a:t>4 個子步驟:</a:t>
+            </a:r>
+          </a:p>
+          <a:p>
+            <a:pPr algn="ctr">
+              <a:lnSpc>
+                <a:spcPct val="110000"/>
+              </a:lnSpc>
+            </a:pPr>
+            <a:r>
+              <a:rPr sz="750" b="1">
+                <a:solidFill>
+                  <a:srgbClr val="606060"/>
+                </a:solidFill>
+                <a:latin typeface="Microsoft JhengHei"/>
+              </a:rPr>
+              <a:t>①方向 ②記帳 ③回饋記憶 ④記憶維運</a:t>
+            </a:r>
+          </a:p>
+        </p:txBody>
+      </p:sp>
+      <p:sp>
+        <p:nvSpPr>
+          <p:cNvPr id="26" name="Right Arrow 25"/>
           <p:cNvSpPr/>
           <p:nvPr/>
         </p:nvSpPr>
@@ -4326,7 +4393,7 @@
       </p:sp>
       <p:sp>
         <p:nvSpPr>
-          <p:cNvPr id="26" name="Rounded Rectangle 25"/>
+          <p:cNvPr id="27" name="Rounded Rectangle 26"/>
           <p:cNvSpPr/>
           <p:nvPr/>
         </p:nvSpPr>
@@ -4391,9 +4458,48 @@
           </a:p>
         </p:txBody>
       </p:sp>
+      <p:sp>
+        <p:nvSpPr>
+          <p:cNvPr id="28" name="TextBox 27"/>
+          <p:cNvSpPr txBox="1"/>
+          <p:nvPr/>
+        </p:nvSpPr>
+        <p:spPr>
+          <a:xfrm>
+            <a:off x="10936224" y="3401568"/>
+            <a:ext cx="2103120" cy="274320"/>
+          </a:xfrm>
+          <a:prstGeom prst="rect">
+            <a:avLst/>
+          </a:prstGeom>
+          <a:noFill/>
+        </p:spPr>
+        <p:txBody>
+          <a:bodyPr wrap="square" anchor="t" lIns="0" rIns="0" tIns="0" bIns="0">
+            <a:spAutoFit/>
+          </a:bodyPr>
+          <a:lstStyle/>
+          <a:p>
+            <a:pPr algn="ctr">
+              <a:lnSpc>
+                <a:spcPct val="100000"/>
+              </a:lnSpc>
+            </a:pPr>
+            <a:r>
+              <a:rPr sz="750" b="1">
+                <a:solidFill>
+                  <a:srgbClr val="C03030"/>
+                </a:solidFill>
+                <a:latin typeface="Microsoft JhengHei"/>
+              </a:rPr>
+              <a:t>模擬持倉,未連接真實券商</a:t>
+            </a:r>
+          </a:p>
+        </p:txBody>
+      </p:sp>
       <p:graphicFrame>
         <p:nvGraphicFramePr>
-          <p:cNvPr id="27" name="Table 26"/>
+          <p:cNvPr id="29" name="Table 28"/>
           <p:cNvGraphicFramePr>
             <a:graphicFrameLocks noGrp="1"/>
           </p:cNvGraphicFramePr>
@@ -5684,7 +5790,7 @@
         </p:nvGraphicFramePr>
         <p:xfrm>
           <a:off x="320040" y="1005840"/>
-          <a:ext cx="11247120" cy="4343397"/>
+          <a:ext cx="13258799" cy="5029192"/>
         </p:xfrm>
         <a:graphic>
           <a:graphicData uri="http://schemas.openxmlformats.org/drawingml/2006/table">
@@ -5693,8 +5799,9 @@
                 <a:tableStyleId>{5C22544A-7EE6-4342-B048-85BDC9FD1C3A}</a:tableStyleId>
               </a:tblPr>
               <a:tblGrid>
-                <a:gridCol w="3108960"/>
-                <a:gridCol w="8138160"/>
+                <a:gridCol w="1988819"/>
+                <a:gridCol w="4507992"/>
+                <a:gridCol w="6761988"/>
               </a:tblGrid>
               <a:tr h="310896">
                 <a:tc>
@@ -5743,16 +5850,39 @@
                     </a:solidFill>
                   </a:tcPr>
                 </a:tc>
-              </a:tr>
-              <a:tr h="366591">
                 <a:tc>
                   <a:txBody>
                     <a:bodyPr wrap="square"/>
                     <a:lstStyle/>
                     <a:p>
+                      <a:pPr algn="ctr"/>
+                      <a:r>
+                        <a:rPr sz="1000" b="1">
+                          <a:solidFill>
+                            <a:srgbClr val="FFFFFF"/>
+                          </a:solidFill>
+                          <a:latin typeface="Microsoft JhengHei"/>
+                        </a:rPr>
+                        <a:t>這裡實際在做什麼</a:t>
+                      </a:r>
+                    </a:p>
+                  </a:txBody>
+                  <a:tcPr marL="40000" marR="40000" marT="10000" marB="10000" anchor="ctr">
+                    <a:solidFill>
+                      <a:srgbClr val="2E3B4E"/>
+                    </a:solidFill>
+                  </a:tcPr>
+                </a:tc>
+              </a:tr>
+              <a:tr h="428936">
+                <a:tc>
+                  <a:txBody>
+                    <a:bodyPr wrap="square"/>
+                    <a:lstStyle/>
+                    <a:p>
                       <a:pPr algn="l"/>
                       <a:r>
-                        <a:rPr sz="900" b="1">
+                        <a:rPr sz="880" b="1">
                           <a:solidFill>
                             <a:srgbClr val="000000"/>
                           </a:solidFill>
@@ -5775,13 +5905,36 @@
                     <a:p>
                       <a:pPr algn="l"/>
                       <a:r>
-                        <a:rPr sz="900" b="0">
+                        <a:rPr sz="830" b="0">
                           <a:solidFill>
                             <a:srgbClr val="000000"/>
                           </a:solidFill>
                           <a:latin typeface="Microsoft JhengHei"/>
                         </a:rPr>
                         <a:t>puppy/agent.py — LLMAgent.step() 開頭(官方註解 1~3)</a:t>
+                      </a:r>
+                    </a:p>
+                  </a:txBody>
+                  <a:tcPr marL="40000" marR="40000" marT="10000" marB="10000" anchor="ctr">
+                    <a:solidFill>
+                      <a:srgbClr val="FFFFFF"/>
+                    </a:solidFill>
+                  </a:tcPr>
+                </a:tc>
+                <a:tc>
+                  <a:txBody>
+                    <a:bodyPr wrap="square"/>
+                    <a:lstStyle/>
+                    <a:p>
+                      <a:pPr algn="l"/>
+                      <a:r>
+                        <a:rPr sz="830" b="0">
+                          <a:solidFill>
+                            <a:srgbClr val="000000"/>
+                          </a:solidFill>
+                          <a:latin typeface="Microsoft JhengHei"/>
+                        </a:rPr>
+                        <a:t>依資料型態把股價、新聞、財報拆開:文字送進記憶路徑,股價送去 Observe</a:t>
                       </a:r>
                     </a:p>
                   </a:txBody>
@@ -5792,7 +5945,7 @@
                   </a:tcPr>
                 </a:tc>
               </a:tr>
-              <a:tr h="366591">
+              <a:tr h="428936">
                 <a:tc>
                   <a:txBody>
                     <a:bodyPr wrap="square"/>
@@ -5800,7 +5953,7 @@
                     <a:p>
                       <a:pPr algn="l"/>
                       <a:r>
-                        <a:rPr sz="900" b="1">
+                        <a:rPr sz="880" b="1">
                           <a:solidFill>
                             <a:srgbClr val="000000"/>
                           </a:solidFill>
@@ -5823,13 +5976,36 @@
                     <a:p>
                       <a:pPr algn="l"/>
                       <a:r>
-                        <a:rPr sz="900" b="0">
+                        <a:rPr sz="830" b="0">
                           <a:solidFill>
                             <a:srgbClr val="000000"/>
                           </a:solidFill>
                           <a:latin typeface="Microsoft JhengHei"/>
                         </a:rPr>
                         <a:t>puppy/agent.py(character_string 屬性)＋ config/*.toml 的 character_string</a:t>
+                      </a:r>
+                    </a:p>
+                  </a:txBody>
+                  <a:tcPr marL="40000" marR="40000" marT="10000" marB="10000" anchor="ctr">
+                    <a:solidFill>
+                      <a:srgbClr val="F4F6F8"/>
+                    </a:solidFill>
+                  </a:tcPr>
+                </a:tc>
+                <a:tc>
+                  <a:txBody>
+                    <a:bodyPr wrap="square"/>
+                    <a:lstStyle/>
+                    <a:p>
+                      <a:pPr algn="l"/>
+                      <a:r>
+                        <a:rPr sz="830" b="0">
+                          <a:solidFill>
+                            <a:srgbClr val="000000"/>
+                          </a:solidFill>
+                          <a:latin typeface="Microsoft JhengHei"/>
+                        </a:rPr>
+                        <a:t>Agent 一建立就把設定檔這段文字讀進來存成屬性,全程不變;只給 Retrieve 當查詢字串用,不會出現在 Reflect 的提示詞裡</a:t>
                       </a:r>
                     </a:p>
                   </a:txBody>
@@ -5840,7 +6016,7 @@
                   </a:tcPr>
                 </a:tc>
               </a:tr>
-              <a:tr h="366591">
+              <a:tr h="428936">
                 <a:tc>
                   <a:txBody>
                     <a:bodyPr wrap="square"/>
@@ -5848,7 +6024,7 @@
                     <a:p>
                       <a:pPr algn="l"/>
                       <a:r>
-                        <a:rPr sz="900" b="1">
+                        <a:rPr sz="880" b="1">
                           <a:solidFill>
                             <a:srgbClr val="000000"/>
                           </a:solidFill>
@@ -5871,13 +6047,36 @@
                     <a:p>
                       <a:pPr algn="l"/>
                       <a:r>
-                        <a:rPr sz="900" b="0">
+                        <a:rPr sz="830" b="0">
                           <a:solidFill>
                             <a:srgbClr val="000000"/>
                           </a:solidFill>
                           <a:latin typeface="Microsoft JhengHei"/>
                         </a:rPr>
                         <a:t>data-pipeline/03-summary.py ＋ 03-model_wrapper.py</a:t>
+                      </a:r>
+                    </a:p>
+                  </a:txBody>
+                  <a:tcPr marL="40000" marR="40000" marT="10000" marB="10000" anchor="ctr">
+                    <a:solidFill>
+                      <a:srgbClr val="FFFFFF"/>
+                    </a:solidFill>
+                  </a:tcPr>
+                </a:tc>
+                <a:tc>
+                  <a:txBody>
+                    <a:bodyPr wrap="square"/>
+                    <a:lstStyle/>
+                    <a:p>
+                      <a:pPr algn="l"/>
+                      <a:r>
+                        <a:rPr sz="830" b="0">
+                          <a:solidFill>
+                            <a:srgbClr val="000000"/>
+                          </a:solidFill>
+                          <a:latin typeface="Microsoft JhengHei"/>
+                        </a:rPr>
+                        <a:t>把整篇新聞/財報丟給 LLM,請它壓縮成約 200 tokens 的摘要,存回 CSV</a:t>
                       </a:r>
                     </a:p>
                   </a:txBody>
@@ -5888,7 +6087,7 @@
                   </a:tcPr>
                 </a:tc>
               </a:tr>
-              <a:tr h="366591">
+              <a:tr h="428936">
                 <a:tc>
                   <a:txBody>
                     <a:bodyPr wrap="square"/>
@@ -5896,7 +6095,7 @@
                     <a:p>
                       <a:pPr algn="l"/>
                       <a:r>
-                        <a:rPr sz="900" b="1">
+                        <a:rPr sz="880" b="1">
                           <a:solidFill>
                             <a:srgbClr val="000000"/>
                           </a:solidFill>
@@ -5919,13 +6118,36 @@
                     <a:p>
                       <a:pPr algn="l"/>
                       <a:r>
-                        <a:rPr sz="900" b="0">
+                        <a:rPr sz="830" b="0">
                           <a:solidFill>
                             <a:srgbClr val="000000"/>
                           </a:solidFill>
                           <a:latin typeface="Microsoft JhengHei"/>
                         </a:rPr>
-                        <a:t>data-pipeline/02-Raw_News_Data_Cleaning.py ＋ 05-get_sentiment_by_ticker.py(VADER / FinBERT)</a:t>
+                        <a:t>data-pipeline/02-Raw_News_Data_Cleaning.py ＋ 05-get_sentiment_by_ticker.py</a:t>
+                      </a:r>
+                    </a:p>
+                  </a:txBody>
+                  <a:tcPr marL="40000" marR="40000" marT="10000" marB="10000" anchor="ctr">
+                    <a:solidFill>
+                      <a:srgbClr val="F4F6F8"/>
+                    </a:solidFill>
+                  </a:tcPr>
+                </a:tc>
+                <a:tc>
+                  <a:txBody>
+                    <a:bodyPr wrap="square"/>
+                    <a:lstStyle/>
+                    <a:p>
+                      <a:pPr algn="l"/>
+                      <a:r>
+                        <a:rPr sz="830" b="0">
+                          <a:solidFill>
+                            <a:srgbClr val="000000"/>
+                          </a:solidFill>
+                          <a:latin typeface="Microsoft JhengHei"/>
+                        </a:rPr>
+                        <a:t>02 先清掉重複報導、制式前綴等雜訊;05 用 VADER(規則詞典)或 FinBERT(金融專用模型)幫每則新聞標正負中立傾向</a:t>
                       </a:r>
                     </a:p>
                   </a:txBody>
@@ -5936,7 +6158,7 @@
                   </a:tcPr>
                 </a:tc>
               </a:tr>
-              <a:tr h="366591">
+              <a:tr h="428936">
                 <a:tc>
                   <a:txBody>
                     <a:bodyPr wrap="square"/>
@@ -5944,7 +6166,7 @@
                     <a:p>
                       <a:pPr algn="l"/>
                       <a:r>
-                        <a:rPr sz="900" b="1">
+                        <a:rPr sz="880" b="1">
                           <a:solidFill>
                             <a:srgbClr val="000000"/>
                           </a:solidFill>
@@ -5967,13 +6189,36 @@
                     <a:p>
                       <a:pPr algn="l"/>
                       <a:r>
-                        <a:rPr sz="900" b="0">
+                        <a:rPr sz="830" b="0">
                           <a:solidFill>
                             <a:srgbClr val="000000"/>
                           </a:solidFill>
                           <a:latin typeface="Microsoft JhengHei"/>
                         </a:rPr>
                         <a:t>puppy/portfolio.py — get_moment(moment_window=3)</a:t>
+                      </a:r>
+                    </a:p>
+                  </a:txBody>
+                  <a:tcPr marL="40000" marR="40000" marT="10000" marB="10000" anchor="ctr">
+                    <a:solidFill>
+                      <a:srgbClr val="FFFFFF"/>
+                    </a:solidFill>
+                  </a:tcPr>
+                </a:tc>
+                <a:tc>
+                  <a:txBody>
+                    <a:bodyPr wrap="square"/>
+                    <a:lstStyle/>
+                    <a:p>
+                      <a:pPr algn="l"/>
+                      <a:r>
+                        <a:rPr sz="830" b="0">
+                          <a:solidFill>
+                            <a:srgbClr val="000000"/>
+                          </a:solidFill>
+                          <a:latin typeface="Microsoft JhengHei"/>
+                        </a:rPr>
+                        <a:t>把最近 3 天每天的收盤價差加總,大於零記漲、小於零記跌,轉成一句英文敘述</a:t>
                       </a:r>
                     </a:p>
                   </a:txBody>
@@ -5984,7 +6229,7 @@
                   </a:tcPr>
                 </a:tc>
               </a:tr>
-              <a:tr h="366591">
+              <a:tr h="428936">
                 <a:tc>
                   <a:txBody>
                     <a:bodyPr wrap="square"/>
@@ -5992,13 +6237,25 @@
                     <a:p>
                       <a:pPr algn="l"/>
                       <a:r>
-                        <a:rPr sz="900" b="1">
+                        <a:rPr sz="880" b="1">
                           <a:solidFill>
                             <a:srgbClr val="000000"/>
                           </a:solidFill>
                           <a:latin typeface="Microsoft JhengHei"/>
                         </a:rPr>
-                        <a:t>Layered Memory / Retrieve</a:t>
+                        <a:t>Layered Memory /</a:t>
+                      </a:r>
+                    </a:p>
+                    <a:p>
+                      <a:pPr algn="l"/>
+                      <a:r>
+                        <a:rPr sz="880" b="1">
+                          <a:solidFill>
+                            <a:srgbClr val="000000"/>
+                          </a:solidFill>
+                          <a:latin typeface="Microsoft JhengHei"/>
+                        </a:rPr>
+                        <a:t>Retrieve</a:t>
                       </a:r>
                     </a:p>
                   </a:txBody>
@@ -6015,13 +6272,36 @@
                     <a:p>
                       <a:pPr algn="l"/>
                       <a:r>
-                        <a:rPr sz="900" b="0">
+                        <a:rPr sz="830" b="0">
                           <a:solidFill>
                             <a:srgbClr val="000000"/>
                           </a:solidFill>
                           <a:latin typeface="Microsoft JhengHei"/>
                         </a:rPr>
                         <a:t>puppy/memorydb.py(MemoryDB、BrainDB)</a:t>
+                      </a:r>
+                    </a:p>
+                  </a:txBody>
+                  <a:tcPr marL="40000" marR="40000" marT="10000" marB="10000" anchor="ctr">
+                    <a:solidFill>
+                      <a:srgbClr val="F4F6F8"/>
+                    </a:solidFill>
+                  </a:tcPr>
+                </a:tc>
+                <a:tc>
+                  <a:txBody>
+                    <a:bodyPr wrap="square"/>
+                    <a:lstStyle/>
+                    <a:p>
+                      <a:pPr algn="l"/>
+                      <a:r>
+                        <a:rPr sz="830" b="0">
+                          <a:solidFill>
+                            <a:srgbClr val="000000"/>
+                          </a:solidFill>
+                          <a:latin typeface="Microsoft JhengHei"/>
+                        </a:rPr>
+                        <a:t>MemoryDB 管理單一層的存取與分數;BrainDB 把淺/中/深/反思 4 個 MemoryDB 包在一起,對外統一查詢跟寫入</a:t>
                       </a:r>
                     </a:p>
                   </a:txBody>
@@ -6032,7 +6312,7 @@
                   </a:tcPr>
                 </a:tc>
               </a:tr>
-              <a:tr h="366591">
+              <a:tr h="428936">
                 <a:tc>
                   <a:txBody>
                     <a:bodyPr wrap="square"/>
@@ -6040,7 +6320,7 @@
                     <a:p>
                       <a:pPr algn="l"/>
                       <a:r>
-                        <a:rPr sz="900" b="1">
+                        <a:rPr sz="880" b="1">
                           <a:solidFill>
                             <a:srgbClr val="000000"/>
                           </a:solidFill>
@@ -6063,13 +6343,36 @@
                     <a:p>
                       <a:pPr algn="l"/>
                       <a:r>
-                        <a:rPr sz="900" b="0">
+                        <a:rPr sz="830" b="0">
                           <a:solidFill>
                             <a:srgbClr val="000000"/>
                           </a:solidFill>
                           <a:latin typeface="Microsoft JhengHei"/>
                         </a:rPr>
                         <a:t>puppy/memory_functions/(decay.py、importance_score.py、recency.py、compound_score.py、access_counter.py)</a:t>
+                      </a:r>
+                    </a:p>
+                  </a:txBody>
+                  <a:tcPr marL="40000" marR="40000" marT="10000" marB="10000" anchor="ctr">
+                    <a:solidFill>
+                      <a:srgbClr val="FFFFFF"/>
+                    </a:solidFill>
+                  </a:tcPr>
+                </a:tc>
+                <a:tc>
+                  <a:txBody>
+                    <a:bodyPr wrap="square"/>
+                    <a:lstStyle/>
+                    <a:p>
+                      <a:pPr algn="l"/>
+                      <a:r>
+                        <a:rPr sz="830" b="0">
+                          <a:solidFill>
+                            <a:srgbClr val="000000"/>
+                          </a:solidFill>
+                          <a:latin typeface="Microsoft JhengHei"/>
+                        </a:rPr>
+                        <a:t>importance_score.py 決定新記憶誕生時的抽籤機率;decay.py 算每天的指數衰退;access_counter.py 算加減分;compound_score.py 把兩個分數合成排序用的分數</a:t>
                       </a:r>
                     </a:p>
                   </a:txBody>
@@ -6080,7 +6383,7 @@
                   </a:tcPr>
                 </a:tc>
               </a:tr>
-              <a:tr h="366591">
+              <a:tr h="428936">
                 <a:tc>
                   <a:txBody>
                     <a:bodyPr wrap="square"/>
@@ -6088,7 +6391,7 @@
                     <a:p>
                       <a:pPr algn="l"/>
                       <a:r>
-                        <a:rPr sz="900" b="1">
+                        <a:rPr sz="880" b="1">
                           <a:solidFill>
                             <a:srgbClr val="000000"/>
                           </a:solidFill>
@@ -6111,13 +6414,36 @@
                     <a:p>
                       <a:pPr algn="l"/>
                       <a:r>
-                        <a:rPr sz="900" b="0">
+                        <a:rPr sz="830" b="0">
                           <a:solidFill>
                             <a:srgbClr val="000000"/>
                           </a:solidFill>
                           <a:latin typeface="Microsoft JhengHei"/>
                         </a:rPr>
                         <a:t>puppy/reflection.py ＋ puppy/chat.py(LLM 呼叫)＋ puppy/prompts.py(提示詞模板)</a:t>
+                      </a:r>
+                    </a:p>
+                  </a:txBody>
+                  <a:tcPr marL="40000" marR="40000" marT="10000" marB="10000" anchor="ctr">
+                    <a:solidFill>
+                      <a:srgbClr val="F4F6F8"/>
+                    </a:solidFill>
+                  </a:tcPr>
+                </a:tc>
+                <a:tc>
+                  <a:txBody>
+                    <a:bodyPr wrap="square"/>
+                    <a:lstStyle/>
+                    <a:p>
+                      <a:pPr algn="l"/>
+                      <a:r>
+                        <a:rPr sz="830" b="0">
+                          <a:solidFill>
+                            <a:srgbClr val="000000"/>
+                          </a:solidFill>
+                          <a:latin typeface="Microsoft JhengHei"/>
+                        </a:rPr>
+                        <a:t>組合提示詞(記憶內容＋動能敘述),呼叫 LLM,guardrails 驗證回傳格式,LLM 自己決定引用了哪些記憶編號</a:t>
                       </a:r>
                     </a:p>
                   </a:txBody>
@@ -6128,7 +6454,7 @@
                   </a:tcPr>
                 </a:tc>
               </a:tr>
-              <a:tr h="366591">
+              <a:tr h="428936">
                 <a:tc>
                   <a:txBody>
                     <a:bodyPr wrap="square"/>
@@ -6136,7 +6462,7 @@
                     <a:p>
                       <a:pPr algn="l"/>
                       <a:r>
-                        <a:rPr sz="900" b="1">
+                        <a:rPr sz="880" b="1">
                           <a:solidFill>
                             <a:srgbClr val="000000"/>
                           </a:solidFill>
@@ -6159,13 +6485,36 @@
                     <a:p>
                       <a:pPr algn="l"/>
                       <a:r>
-                        <a:rPr sz="900" b="0">
+                        <a:rPr sz="830" b="0">
                           <a:solidFill>
                             <a:srgbClr val="000000"/>
                           </a:solidFill>
                           <a:latin typeface="Microsoft JhengHei"/>
                         </a:rPr>
                         <a:t>puppy/agent.py 的 _construct_train_actions／__process_test_action／_portfolio_step／_update_access_counter ＋ puppy/portfolio.py 的 get_feedback_response</a:t>
+                      </a:r>
+                    </a:p>
+                  </a:txBody>
+                  <a:tcPr marL="40000" marR="40000" marT="10000" marB="10000" anchor="ctr">
+                    <a:solidFill>
+                      <a:srgbClr val="FFFFFF"/>
+                    </a:solidFill>
+                  </a:tcPr>
+                </a:tc>
+                <a:tc>
+                  <a:txBody>
+                    <a:bodyPr wrap="square"/>
+                    <a:lstStyle/>
+                    <a:p>
+                      <a:pPr algn="l"/>
+                      <a:r>
+                        <a:rPr sz="830" b="0">
+                          <a:solidFill>
+                            <a:srgbClr val="000000"/>
+                          </a:solidFill>
+                          <a:latin typeface="Microsoft JhengHei"/>
+                        </a:rPr>
+                        <a:t>四個函式接力:先決定買賣方向 → 寫入持倉 → 依最近實際損益回饋剛引用的記憶 → 呼叫 brain.step() 讓記憶系統過完這一天</a:t>
                       </a:r>
                     </a:p>
                   </a:txBody>
@@ -6176,7 +6525,7 @@
                   </a:tcPr>
                 </a:tc>
               </a:tr>
-              <a:tr h="366591">
+              <a:tr h="428936">
                 <a:tc>
                   <a:txBody>
                     <a:bodyPr wrap="square"/>
@@ -6184,7 +6533,7 @@
                     <a:p>
                       <a:pPr algn="l"/>
                       <a:r>
-                        <a:rPr sz="900" b="1">
+                        <a:rPr sz="880" b="1">
                           <a:solidFill>
                             <a:srgbClr val="000000"/>
                           </a:solidFill>
@@ -6207,13 +6556,36 @@
                     <a:p>
                       <a:pPr algn="l"/>
                       <a:r>
-                        <a:rPr sz="900" b="0">
+                        <a:rPr sz="830" b="0">
                           <a:solidFill>
                             <a:srgbClr val="000000"/>
                           </a:solidFill>
                           <a:latin typeface="Microsoft JhengHei"/>
                         </a:rPr>
                         <a:t>data-pipeline/01_*.py ～ 04-data_pipeline.py</a:t>
+                      </a:r>
+                    </a:p>
+                  </a:txBody>
+                  <a:tcPr marL="40000" marR="40000" marT="10000" marB="10000" anchor="ctr">
+                    <a:solidFill>
+                      <a:srgbClr val="F4F6F8"/>
+                    </a:solidFill>
+                  </a:tcPr>
+                </a:tc>
+                <a:tc>
+                  <a:txBody>
+                    <a:bodyPr wrap="square"/>
+                    <a:lstStyle/>
+                    <a:p>
+                      <a:pPr algn="l"/>
+                      <a:r>
+                        <a:rPr sz="830" b="0">
+                          <a:solidFill>
+                            <a:srgbClr val="000000"/>
+                          </a:solidFill>
+                          <a:latin typeface="Microsoft JhengHei"/>
+                        </a:rPr>
+                        <a:t>01 系列分別向 SEC API、Alpaca News API 抓原始資料;04 再用 yfinance 補股價,全部合併打包成 env_data.pkl</a:t>
                       </a:r>
                     </a:p>
                   </a:txBody>
@@ -6224,7 +6596,7 @@
                   </a:tcPr>
                 </a:tc>
               </a:tr>
-              <a:tr h="366591">
+              <a:tr h="428936">
                 <a:tc>
                   <a:txBody>
                     <a:bodyPr wrap="square"/>
@@ -6232,7 +6604,7 @@
                     <a:p>
                       <a:pPr algn="l"/>
                       <a:r>
-                        <a:rPr sz="900" b="1">
+                        <a:rPr sz="880" b="1">
                           <a:solidFill>
                             <a:srgbClr val="000000"/>
                           </a:solidFill>
@@ -6255,13 +6627,36 @@
                     <a:p>
                       <a:pPr algn="l"/>
                       <a:r>
-                        <a:rPr sz="900" b="0">
+                        <a:rPr sz="830" b="0">
                           <a:solidFill>
                             <a:srgbClr val="000000"/>
                           </a:solidFill>
                           <a:latin typeface="Microsoft JhengHei"/>
                         </a:rPr>
                         <a:t>run.py — 建立 MarketEnvironment 與 LLMAgent,逐日呼叫 step()</a:t>
+                      </a:r>
+                    </a:p>
+                  </a:txBody>
+                  <a:tcPr marL="40000" marR="40000" marT="10000" marB="10000" anchor="ctr">
+                    <a:solidFill>
+                      <a:srgbClr val="FFFFFF"/>
+                    </a:solidFill>
+                  </a:tcPr>
+                </a:tc>
+                <a:tc>
+                  <a:txBody>
+                    <a:bodyPr wrap="square"/>
+                    <a:lstStyle/>
+                    <a:p>
+                      <a:pPr algn="l"/>
+                      <a:r>
+                        <a:rPr sz="830" b="0">
+                          <a:solidFill>
+                            <a:srgbClr val="000000"/>
+                          </a:solidFill>
+                          <a:latin typeface="Microsoft JhengHei"/>
+                        </a:rPr>
+                        <a:t>讀 config.toml,建立環境與 Agent;while 迴圈裡逐日拿資料、跑完整套模組,每天存一次檔避免 API 中斷要重跑</a:t>
                       </a:r>
                     </a:p>
                   </a:txBody>
@@ -6284,7 +6679,7 @@
         </p:nvSpPr>
         <p:spPr>
           <a:xfrm>
-            <a:off x="320040" y="5577840"/>
+            <a:off x="320040" y="6263640"/>
             <a:ext cx="9144000" cy="274320"/>
           </a:xfrm>
           <a:prstGeom prst="rect">
@@ -6323,7 +6718,7 @@
         </p:nvSpPr>
         <p:spPr>
           <a:xfrm>
-            <a:off x="320040" y="5897879"/>
+            <a:off x="320040" y="6583679"/>
             <a:ext cx="7589520" cy="1600200"/>
           </a:xfrm>
           <a:prstGeom prst="rect">
@@ -6367,7 +6762,7 @@
         </p:nvSpPr>
         <p:spPr>
           <a:xfrm>
-            <a:off x="502920" y="6035040"/>
+            <a:off x="502920" y="6720840"/>
             <a:ext cx="7223760" cy="1371600"/>
           </a:xfrm>
           <a:prstGeom prst="rect">
@@ -6502,7 +6897,7 @@
         </p:nvSpPr>
         <p:spPr>
           <a:xfrm>
-            <a:off x="8092440" y="5897879"/>
+            <a:off x="8092440" y="6583679"/>
             <a:ext cx="3474720" cy="1600200"/>
           </a:xfrm>
           <a:prstGeom prst="rect">

--- a/Andy/FinMem_PPT_完整版.pptx
+++ b/Andy/FinMem_PPT_完整版.pptx
@@ -4,13 +4,16 @@
   <p:sldMasterIdLst>
     <p:sldMasterId id="2147483648" r:id="rId1"/>
   </p:sldMasterIdLst>
+  <p:notesMasterIdLst>
+    <p:notesMasterId r:id="rId6"/>
+  </p:notesMasterIdLst>
   <p:sldIdLst>
-    <p:sldId id="256" r:id="rId7"/>
-    <p:sldId id="257" r:id="rId8"/>
-    <p:sldId id="258" r:id="rId9"/>
-    <p:sldId id="259" r:id="rId10"/>
+    <p:sldId id="256" r:id="rId2"/>
+    <p:sldId id="257" r:id="rId3"/>
+    <p:sldId id="258" r:id="rId4"/>
+    <p:sldId id="259" r:id="rId5"/>
   </p:sldIdLst>
-  <p:sldSz cx="13898880" cy="9509760" type="screen4x3"/>
+  <p:sldSz cx="13898563" cy="9509125"/>
   <p:notesSz cx="6858000" cy="9144000"/>
   <p:defaultTextStyle>
     <a:defPPr>
@@ -107,7 +110,456 @@
       </a:defRPr>
     </a:lvl9pPr>
   </p:defaultTextStyle>
+  <p:extLst>
+    <p:ext uri="{EFAFB233-063F-42B5-8137-9DF3F51BA10A}">
+      <p15:sldGuideLst xmlns:p15="http://schemas.microsoft.com/office/powerpoint/2012/main">
+        <p15:guide id="1" orient="horz" pos="2160">
+          <p15:clr>
+            <a:srgbClr val="A4A3A4"/>
+          </p15:clr>
+        </p15:guide>
+        <p15:guide id="2" pos="2880">
+          <p15:clr>
+            <a:srgbClr val="A4A3A4"/>
+          </p15:clr>
+        </p15:guide>
+      </p15:sldGuideLst>
+    </p:ext>
+  </p:extLst>
 </p:presentation>
+</file>
+
+<file path=ppt/notesMasters/notesMaster1.xml><?xml version="1.0" encoding="utf-8"?>
+<p:notesMaster xmlns:a="http://schemas.openxmlformats.org/drawingml/2006/main" xmlns:r="http://schemas.openxmlformats.org/officeDocument/2006/relationships" xmlns:p="http://schemas.openxmlformats.org/presentationml/2006/main">
+  <p:cSld>
+    <p:bg>
+      <p:bgRef idx="1001">
+        <a:schemeClr val="bg1"/>
+      </p:bgRef>
+    </p:bg>
+    <p:spTree>
+      <p:nvGrpSpPr>
+        <p:cNvPr id="1" name=""/>
+        <p:cNvGrpSpPr/>
+        <p:nvPr/>
+      </p:nvGrpSpPr>
+      <p:grpSpPr>
+        <a:xfrm>
+          <a:off x="0" y="0"/>
+          <a:ext cx="0" cy="0"/>
+          <a:chOff x="0" y="0"/>
+          <a:chExt cx="0" cy="0"/>
+        </a:xfrm>
+      </p:grpSpPr>
+      <p:sp>
+        <p:nvSpPr>
+          <p:cNvPr id="2" name="頁首版面配置區 1"/>
+          <p:cNvSpPr>
+            <a:spLocks noGrp="1"/>
+          </p:cNvSpPr>
+          <p:nvPr>
+            <p:ph type="hdr" sz="quarter"/>
+          </p:nvPr>
+        </p:nvSpPr>
+        <p:spPr>
+          <a:xfrm>
+            <a:off x="0" y="0"/>
+            <a:ext cx="2971800" cy="458788"/>
+          </a:xfrm>
+          <a:prstGeom prst="rect">
+            <a:avLst/>
+          </a:prstGeom>
+        </p:spPr>
+        <p:txBody>
+          <a:bodyPr vert="horz" lIns="91440" tIns="45720" rIns="91440" bIns="45720" rtlCol="0"/>
+          <a:lstStyle>
+            <a:lvl1pPr algn="l">
+              <a:defRPr sz="1200"/>
+            </a:lvl1pPr>
+          </a:lstStyle>
+          <a:p>
+            <a:endParaRPr lang="zh-TW" altLang="en-US"/>
+          </a:p>
+        </p:txBody>
+      </p:sp>
+      <p:sp>
+        <p:nvSpPr>
+          <p:cNvPr id="3" name="日期版面配置區 2"/>
+          <p:cNvSpPr>
+            <a:spLocks noGrp="1"/>
+          </p:cNvSpPr>
+          <p:nvPr>
+            <p:ph type="dt" idx="1"/>
+          </p:nvPr>
+        </p:nvSpPr>
+        <p:spPr>
+          <a:xfrm>
+            <a:off x="3884613" y="0"/>
+            <a:ext cx="2971800" cy="458788"/>
+          </a:xfrm>
+          <a:prstGeom prst="rect">
+            <a:avLst/>
+          </a:prstGeom>
+        </p:spPr>
+        <p:txBody>
+          <a:bodyPr vert="horz" lIns="91440" tIns="45720" rIns="91440" bIns="45720" rtlCol="0"/>
+          <a:lstStyle>
+            <a:lvl1pPr algn="r">
+              <a:defRPr sz="1200"/>
+            </a:lvl1pPr>
+          </a:lstStyle>
+          <a:p>
+            <a:fld id="{A94DE051-268A-4C2D-85B4-6FC84FDD893A}" type="datetimeFigureOut">
+              <a:rPr lang="zh-TW" altLang="en-US" smtClean="0"/>
+              <a:t>2026/8/18</a:t>
+            </a:fld>
+            <a:endParaRPr lang="zh-TW" altLang="en-US"/>
+          </a:p>
+        </p:txBody>
+      </p:sp>
+      <p:sp>
+        <p:nvSpPr>
+          <p:cNvPr id="4" name="投影片影像版面配置區 3"/>
+          <p:cNvSpPr>
+            <a:spLocks noGrp="1" noRot="1" noChangeAspect="1"/>
+          </p:cNvSpPr>
+          <p:nvPr>
+            <p:ph type="sldImg" idx="2"/>
+          </p:nvPr>
+        </p:nvSpPr>
+        <p:spPr>
+          <a:xfrm>
+            <a:off x="1173163" y="1143000"/>
+            <a:ext cx="4511675" cy="3086100"/>
+          </a:xfrm>
+          <a:prstGeom prst="rect">
+            <a:avLst/>
+          </a:prstGeom>
+          <a:noFill/>
+          <a:ln w="12700">
+            <a:solidFill>
+              <a:prstClr val="black"/>
+            </a:solidFill>
+          </a:ln>
+        </p:spPr>
+        <p:txBody>
+          <a:bodyPr vert="horz" lIns="91440" tIns="45720" rIns="91440" bIns="45720" rtlCol="0" anchor="ctr"/>
+          <a:lstStyle/>
+          <a:p>
+            <a:endParaRPr lang="zh-TW" altLang="en-US"/>
+          </a:p>
+        </p:txBody>
+      </p:sp>
+      <p:sp>
+        <p:nvSpPr>
+          <p:cNvPr id="5" name="備忘稿版面配置區 4"/>
+          <p:cNvSpPr>
+            <a:spLocks noGrp="1"/>
+          </p:cNvSpPr>
+          <p:nvPr>
+            <p:ph type="body" sz="quarter" idx="3"/>
+          </p:nvPr>
+        </p:nvSpPr>
+        <p:spPr>
+          <a:xfrm>
+            <a:off x="685800" y="4400550"/>
+            <a:ext cx="5486400" cy="3600450"/>
+          </a:xfrm>
+          <a:prstGeom prst="rect">
+            <a:avLst/>
+          </a:prstGeom>
+        </p:spPr>
+        <p:txBody>
+          <a:bodyPr vert="horz" lIns="91440" tIns="45720" rIns="91440" bIns="45720" rtlCol="0"/>
+          <a:lstStyle/>
+          <a:p>
+            <a:pPr lvl="0"/>
+            <a:r>
+              <a:rPr lang="zh-TW" altLang="en-US"/>
+              <a:t>按一下以編輯母片文字樣式</a:t>
+            </a:r>
+          </a:p>
+          <a:p>
+            <a:pPr lvl="1"/>
+            <a:r>
+              <a:rPr lang="zh-TW" altLang="en-US"/>
+              <a:t>第二層</a:t>
+            </a:r>
+          </a:p>
+          <a:p>
+            <a:pPr lvl="2"/>
+            <a:r>
+              <a:rPr lang="zh-TW" altLang="en-US"/>
+              <a:t>第三層</a:t>
+            </a:r>
+          </a:p>
+          <a:p>
+            <a:pPr lvl="3"/>
+            <a:r>
+              <a:rPr lang="zh-TW" altLang="en-US"/>
+              <a:t>第四層</a:t>
+            </a:r>
+          </a:p>
+          <a:p>
+            <a:pPr lvl="4"/>
+            <a:r>
+              <a:rPr lang="zh-TW" altLang="en-US"/>
+              <a:t>第五層</a:t>
+            </a:r>
+          </a:p>
+        </p:txBody>
+      </p:sp>
+      <p:sp>
+        <p:nvSpPr>
+          <p:cNvPr id="6" name="頁尾版面配置區 5"/>
+          <p:cNvSpPr>
+            <a:spLocks noGrp="1"/>
+          </p:cNvSpPr>
+          <p:nvPr>
+            <p:ph type="ftr" sz="quarter" idx="4"/>
+          </p:nvPr>
+        </p:nvSpPr>
+        <p:spPr>
+          <a:xfrm>
+            <a:off x="0" y="8685213"/>
+            <a:ext cx="2971800" cy="458787"/>
+          </a:xfrm>
+          <a:prstGeom prst="rect">
+            <a:avLst/>
+          </a:prstGeom>
+        </p:spPr>
+        <p:txBody>
+          <a:bodyPr vert="horz" lIns="91440" tIns="45720" rIns="91440" bIns="45720" rtlCol="0" anchor="b"/>
+          <a:lstStyle>
+            <a:lvl1pPr algn="l">
+              <a:defRPr sz="1200"/>
+            </a:lvl1pPr>
+          </a:lstStyle>
+          <a:p>
+            <a:endParaRPr lang="zh-TW" altLang="en-US"/>
+          </a:p>
+        </p:txBody>
+      </p:sp>
+      <p:sp>
+        <p:nvSpPr>
+          <p:cNvPr id="7" name="投影片編號版面配置區 6"/>
+          <p:cNvSpPr>
+            <a:spLocks noGrp="1"/>
+          </p:cNvSpPr>
+          <p:nvPr>
+            <p:ph type="sldNum" sz="quarter" idx="5"/>
+          </p:nvPr>
+        </p:nvSpPr>
+        <p:spPr>
+          <a:xfrm>
+            <a:off x="3884613" y="8685213"/>
+            <a:ext cx="2971800" cy="458787"/>
+          </a:xfrm>
+          <a:prstGeom prst="rect">
+            <a:avLst/>
+          </a:prstGeom>
+        </p:spPr>
+        <p:txBody>
+          <a:bodyPr vert="horz" lIns="91440" tIns="45720" rIns="91440" bIns="45720" rtlCol="0" anchor="b"/>
+          <a:lstStyle>
+            <a:lvl1pPr algn="r">
+              <a:defRPr sz="1200"/>
+            </a:lvl1pPr>
+          </a:lstStyle>
+          <a:p>
+            <a:fld id="{F9AE28B3-6C78-4CAF-9CED-E950F9A23C0F}" type="slidenum">
+              <a:rPr lang="zh-TW" altLang="en-US" smtClean="0"/>
+              <a:t>‹#›</a:t>
+            </a:fld>
+            <a:endParaRPr lang="zh-TW" altLang="en-US"/>
+          </a:p>
+        </p:txBody>
+      </p:sp>
+    </p:spTree>
+    <p:extLst>
+      <p:ext uri="{BB962C8B-B14F-4D97-AF65-F5344CB8AC3E}">
+        <p14:creationId xmlns:p14="http://schemas.microsoft.com/office/powerpoint/2010/main" val="4163736497"/>
+      </p:ext>
+    </p:extLst>
+  </p:cSld>
+  <p:clrMap bg1="lt1" tx1="dk1" bg2="lt2" tx2="dk2" accent1="accent1" accent2="accent2" accent3="accent3" accent4="accent4" accent5="accent5" accent6="accent6" hlink="hlink" folHlink="folHlink"/>
+  <p:notesStyle>
+    <a:lvl1pPr marL="0" algn="l" defTabSz="914400" rtl="0" eaLnBrk="1" latinLnBrk="0" hangingPunct="1">
+      <a:defRPr sz="1200" kern="1200">
+        <a:solidFill>
+          <a:schemeClr val="tx1"/>
+        </a:solidFill>
+        <a:latin typeface="+mn-lt"/>
+        <a:ea typeface="+mn-ea"/>
+        <a:cs typeface="+mn-cs"/>
+      </a:defRPr>
+    </a:lvl1pPr>
+    <a:lvl2pPr marL="457200" algn="l" defTabSz="914400" rtl="0" eaLnBrk="1" latinLnBrk="0" hangingPunct="1">
+      <a:defRPr sz="1200" kern="1200">
+        <a:solidFill>
+          <a:schemeClr val="tx1"/>
+        </a:solidFill>
+        <a:latin typeface="+mn-lt"/>
+        <a:ea typeface="+mn-ea"/>
+        <a:cs typeface="+mn-cs"/>
+      </a:defRPr>
+    </a:lvl2pPr>
+    <a:lvl3pPr marL="914400" algn="l" defTabSz="914400" rtl="0" eaLnBrk="1" latinLnBrk="0" hangingPunct="1">
+      <a:defRPr sz="1200" kern="1200">
+        <a:solidFill>
+          <a:schemeClr val="tx1"/>
+        </a:solidFill>
+        <a:latin typeface="+mn-lt"/>
+        <a:ea typeface="+mn-ea"/>
+        <a:cs typeface="+mn-cs"/>
+      </a:defRPr>
+    </a:lvl3pPr>
+    <a:lvl4pPr marL="1371600" algn="l" defTabSz="914400" rtl="0" eaLnBrk="1" latinLnBrk="0" hangingPunct="1">
+      <a:defRPr sz="1200" kern="1200">
+        <a:solidFill>
+          <a:schemeClr val="tx1"/>
+        </a:solidFill>
+        <a:latin typeface="+mn-lt"/>
+        <a:ea typeface="+mn-ea"/>
+        <a:cs typeface="+mn-cs"/>
+      </a:defRPr>
+    </a:lvl4pPr>
+    <a:lvl5pPr marL="1828800" algn="l" defTabSz="914400" rtl="0" eaLnBrk="1" latinLnBrk="0" hangingPunct="1">
+      <a:defRPr sz="1200" kern="1200">
+        <a:solidFill>
+          <a:schemeClr val="tx1"/>
+        </a:solidFill>
+        <a:latin typeface="+mn-lt"/>
+        <a:ea typeface="+mn-ea"/>
+        <a:cs typeface="+mn-cs"/>
+      </a:defRPr>
+    </a:lvl5pPr>
+    <a:lvl6pPr marL="2286000" algn="l" defTabSz="914400" rtl="0" eaLnBrk="1" latinLnBrk="0" hangingPunct="1">
+      <a:defRPr sz="1200" kern="1200">
+        <a:solidFill>
+          <a:schemeClr val="tx1"/>
+        </a:solidFill>
+        <a:latin typeface="+mn-lt"/>
+        <a:ea typeface="+mn-ea"/>
+        <a:cs typeface="+mn-cs"/>
+      </a:defRPr>
+    </a:lvl6pPr>
+    <a:lvl7pPr marL="2743200" algn="l" defTabSz="914400" rtl="0" eaLnBrk="1" latinLnBrk="0" hangingPunct="1">
+      <a:defRPr sz="1200" kern="1200">
+        <a:solidFill>
+          <a:schemeClr val="tx1"/>
+        </a:solidFill>
+        <a:latin typeface="+mn-lt"/>
+        <a:ea typeface="+mn-ea"/>
+        <a:cs typeface="+mn-cs"/>
+      </a:defRPr>
+    </a:lvl7pPr>
+    <a:lvl8pPr marL="3200400" algn="l" defTabSz="914400" rtl="0" eaLnBrk="1" latinLnBrk="0" hangingPunct="1">
+      <a:defRPr sz="1200" kern="1200">
+        <a:solidFill>
+          <a:schemeClr val="tx1"/>
+        </a:solidFill>
+        <a:latin typeface="+mn-lt"/>
+        <a:ea typeface="+mn-ea"/>
+        <a:cs typeface="+mn-cs"/>
+      </a:defRPr>
+    </a:lvl8pPr>
+    <a:lvl9pPr marL="3657600" algn="l" defTabSz="914400" rtl="0" eaLnBrk="1" latinLnBrk="0" hangingPunct="1">
+      <a:defRPr sz="1200" kern="1200">
+        <a:solidFill>
+          <a:schemeClr val="tx1"/>
+        </a:solidFill>
+        <a:latin typeface="+mn-lt"/>
+        <a:ea typeface="+mn-ea"/>
+        <a:cs typeface="+mn-cs"/>
+      </a:defRPr>
+    </a:lvl9pPr>
+  </p:notesStyle>
+</p:notesMaster>
+</file>
+
+<file path=ppt/notesSlides/notesSlide1.xml><?xml version="1.0" encoding="utf-8"?>
+<p:notes xmlns:a="http://schemas.openxmlformats.org/drawingml/2006/main" xmlns:r="http://schemas.openxmlformats.org/officeDocument/2006/relationships" xmlns:p="http://schemas.openxmlformats.org/presentationml/2006/main">
+  <p:cSld>
+    <p:spTree>
+      <p:nvGrpSpPr>
+        <p:cNvPr id="1" name=""/>
+        <p:cNvGrpSpPr/>
+        <p:nvPr/>
+      </p:nvGrpSpPr>
+      <p:grpSpPr>
+        <a:xfrm>
+          <a:off x="0" y="0"/>
+          <a:ext cx="0" cy="0"/>
+          <a:chOff x="0" y="0"/>
+          <a:chExt cx="0" cy="0"/>
+        </a:xfrm>
+      </p:grpSpPr>
+      <p:sp>
+        <p:nvSpPr>
+          <p:cNvPr id="2" name="投影片影像版面配置區 1"/>
+          <p:cNvSpPr>
+            <a:spLocks noGrp="1" noRot="1" noChangeAspect="1"/>
+          </p:cNvSpPr>
+          <p:nvPr>
+            <p:ph type="sldImg"/>
+          </p:nvPr>
+        </p:nvSpPr>
+        <p:spPr/>
+      </p:sp>
+      <p:sp>
+        <p:nvSpPr>
+          <p:cNvPr id="3" name="備忘稿版面配置區 2"/>
+          <p:cNvSpPr>
+            <a:spLocks noGrp="1"/>
+          </p:cNvSpPr>
+          <p:nvPr>
+            <p:ph type="body" idx="1"/>
+          </p:nvPr>
+        </p:nvSpPr>
+        <p:spPr/>
+        <p:txBody>
+          <a:bodyPr/>
+          <a:lstStyle/>
+          <a:p>
+            <a:endParaRPr lang="zh-TW" altLang="en-US" dirty="0"/>
+          </a:p>
+        </p:txBody>
+      </p:sp>
+      <p:sp>
+        <p:nvSpPr>
+          <p:cNvPr id="4" name="投影片編號版面配置區 3"/>
+          <p:cNvSpPr>
+            <a:spLocks noGrp="1"/>
+          </p:cNvSpPr>
+          <p:nvPr>
+            <p:ph type="sldNum" sz="quarter" idx="5"/>
+          </p:nvPr>
+        </p:nvSpPr>
+        <p:spPr/>
+        <p:txBody>
+          <a:bodyPr/>
+          <a:lstStyle/>
+          <a:p>
+            <a:fld id="{F9AE28B3-6C78-4CAF-9CED-E950F9A23C0F}" type="slidenum">
+              <a:rPr lang="zh-TW" altLang="en-US" smtClean="0"/>
+              <a:t>1</a:t>
+            </a:fld>
+            <a:endParaRPr lang="zh-TW" altLang="en-US"/>
+          </a:p>
+        </p:txBody>
+      </p:sp>
+    </p:spTree>
+    <p:extLst>
+      <p:ext uri="{BB962C8B-B14F-4D97-AF65-F5344CB8AC3E}">
+        <p14:creationId xmlns:p14="http://schemas.microsoft.com/office/powerpoint/2010/main" val="3880354638"/>
+      </p:ext>
+    </p:extLst>
+  </p:cSld>
+  <p:clrMapOvr>
+    <a:masterClrMapping/>
+  </p:clrMapOvr>
+</p:notes>
 </file>
 
 <file path=ppt/slideLayouts/slideLayout1.xml><?xml version="1.0" encoding="utf-8"?>
@@ -148,10 +600,9 @@
           <a:lstStyle/>
           <a:p>
             <a:r>
-              <a:rPr lang="en-US" smtClean="0"/>
+              <a:rPr lang="en-US"/>
               <a:t>Click to edit Master title style</a:t>
             </a:r>
-            <a:endParaRPr lang="en-US"/>
           </a:p>
         </p:txBody>
       </p:sp>
@@ -267,10 +718,9 @@
           </a:lstStyle>
           <a:p>
             <a:r>
-              <a:rPr lang="en-US" smtClean="0"/>
+              <a:rPr lang="en-US"/>
               <a:t>Click to edit Master subtitle style</a:t>
             </a:r>
-            <a:endParaRPr lang="en-US"/>
           </a:p>
         </p:txBody>
       </p:sp>
@@ -291,7 +741,7 @@
           <a:p>
             <a:fld id="{5BCAD085-E8A6-8845-BD4E-CB4CCA059FC4}" type="datetimeFigureOut">
               <a:rPr lang="en-US" smtClean="0"/>
-              <a:t>1/27/13</a:t>
+              <a:t>8/18/2026</a:t>
             </a:fld>
             <a:endParaRPr lang="en-US"/>
           </a:p>
@@ -385,10 +835,9 @@
           <a:lstStyle/>
           <a:p>
             <a:r>
-              <a:rPr lang="en-US" smtClean="0"/>
+              <a:rPr lang="en-US"/>
               <a:t>Click to edit Master title style</a:t>
             </a:r>
-            <a:endParaRPr lang="en-US"/>
           </a:p>
         </p:txBody>
       </p:sp>
@@ -409,38 +858,37 @@
           <a:p>
             <a:pPr lvl="0"/>
             <a:r>
-              <a:rPr lang="en-US" smtClean="0"/>
+              <a:rPr lang="en-US"/>
               <a:t>Click to edit Master text styles</a:t>
             </a:r>
           </a:p>
           <a:p>
             <a:pPr lvl="1"/>
             <a:r>
-              <a:rPr lang="en-US" smtClean="0"/>
+              <a:rPr lang="en-US"/>
               <a:t>Second level</a:t>
             </a:r>
           </a:p>
           <a:p>
             <a:pPr lvl="2"/>
             <a:r>
-              <a:rPr lang="en-US" smtClean="0"/>
+              <a:rPr lang="en-US"/>
               <a:t>Third level</a:t>
             </a:r>
           </a:p>
           <a:p>
             <a:pPr lvl="3"/>
             <a:r>
-              <a:rPr lang="en-US" smtClean="0"/>
+              <a:rPr lang="en-US"/>
               <a:t>Fourth level</a:t>
             </a:r>
           </a:p>
           <a:p>
             <a:pPr lvl="4"/>
             <a:r>
-              <a:rPr lang="en-US" smtClean="0"/>
+              <a:rPr lang="en-US"/>
               <a:t>Fifth level</a:t>
             </a:r>
-            <a:endParaRPr lang="en-US"/>
           </a:p>
         </p:txBody>
       </p:sp>
@@ -461,7 +909,7 @@
           <a:p>
             <a:fld id="{5BCAD085-E8A6-8845-BD4E-CB4CCA059FC4}" type="datetimeFigureOut">
               <a:rPr lang="en-US" smtClean="0"/>
-              <a:t>1/27/13</a:t>
+              <a:t>8/18/2026</a:t>
             </a:fld>
             <a:endParaRPr lang="en-US"/>
           </a:p>
@@ -560,10 +1008,9 @@
           <a:lstStyle/>
           <a:p>
             <a:r>
-              <a:rPr lang="en-US" smtClean="0"/>
+              <a:rPr lang="en-US"/>
               <a:t>Click to edit Master title style</a:t>
             </a:r>
-            <a:endParaRPr lang="en-US"/>
           </a:p>
         </p:txBody>
       </p:sp>
@@ -589,38 +1036,37 @@
           <a:p>
             <a:pPr lvl="0"/>
             <a:r>
-              <a:rPr lang="en-US" smtClean="0"/>
+              <a:rPr lang="en-US"/>
               <a:t>Click to edit Master text styles</a:t>
             </a:r>
           </a:p>
           <a:p>
             <a:pPr lvl="1"/>
             <a:r>
-              <a:rPr lang="en-US" smtClean="0"/>
+              <a:rPr lang="en-US"/>
               <a:t>Second level</a:t>
             </a:r>
           </a:p>
           <a:p>
             <a:pPr lvl="2"/>
             <a:r>
-              <a:rPr lang="en-US" smtClean="0"/>
+              <a:rPr lang="en-US"/>
               <a:t>Third level</a:t>
             </a:r>
           </a:p>
           <a:p>
             <a:pPr lvl="3"/>
             <a:r>
-              <a:rPr lang="en-US" smtClean="0"/>
+              <a:rPr lang="en-US"/>
               <a:t>Fourth level</a:t>
             </a:r>
           </a:p>
           <a:p>
             <a:pPr lvl="4"/>
             <a:r>
-              <a:rPr lang="en-US" smtClean="0"/>
+              <a:rPr lang="en-US"/>
               <a:t>Fifth level</a:t>
             </a:r>
-            <a:endParaRPr lang="en-US"/>
           </a:p>
         </p:txBody>
       </p:sp>
@@ -641,7 +1087,7 @@
           <a:p>
             <a:fld id="{5BCAD085-E8A6-8845-BD4E-CB4CCA059FC4}" type="datetimeFigureOut">
               <a:rPr lang="en-US" smtClean="0"/>
-              <a:t>1/27/13</a:t>
+              <a:t>8/18/2026</a:t>
             </a:fld>
             <a:endParaRPr lang="en-US"/>
           </a:p>
@@ -735,10 +1181,9 @@
           <a:lstStyle/>
           <a:p>
             <a:r>
-              <a:rPr lang="en-US" smtClean="0"/>
+              <a:rPr lang="en-US"/>
               <a:t>Click to edit Master title style</a:t>
             </a:r>
-            <a:endParaRPr lang="en-US"/>
           </a:p>
         </p:txBody>
       </p:sp>
@@ -759,38 +1204,37 @@
           <a:p>
             <a:pPr lvl="0"/>
             <a:r>
-              <a:rPr lang="en-US" smtClean="0"/>
+              <a:rPr lang="en-US"/>
               <a:t>Click to edit Master text styles</a:t>
             </a:r>
           </a:p>
           <a:p>
             <a:pPr lvl="1"/>
             <a:r>
-              <a:rPr lang="en-US" smtClean="0"/>
+              <a:rPr lang="en-US"/>
               <a:t>Second level</a:t>
             </a:r>
           </a:p>
           <a:p>
             <a:pPr lvl="2"/>
             <a:r>
-              <a:rPr lang="en-US" smtClean="0"/>
+              <a:rPr lang="en-US"/>
               <a:t>Third level</a:t>
             </a:r>
           </a:p>
           <a:p>
             <a:pPr lvl="3"/>
             <a:r>
-              <a:rPr lang="en-US" smtClean="0"/>
+              <a:rPr lang="en-US"/>
               <a:t>Fourth level</a:t>
             </a:r>
           </a:p>
           <a:p>
             <a:pPr lvl="4"/>
             <a:r>
-              <a:rPr lang="en-US" smtClean="0"/>
+              <a:rPr lang="en-US"/>
               <a:t>Fifth level</a:t>
             </a:r>
-            <a:endParaRPr lang="en-US"/>
           </a:p>
         </p:txBody>
       </p:sp>
@@ -811,7 +1255,7 @@
           <a:p>
             <a:fld id="{5BCAD085-E8A6-8845-BD4E-CB4CCA059FC4}" type="datetimeFigureOut">
               <a:rPr lang="en-US" smtClean="0"/>
-              <a:t>1/27/13</a:t>
+              <a:t>8/18/2026</a:t>
             </a:fld>
             <a:endParaRPr lang="en-US"/>
           </a:p>
@@ -914,10 +1358,9 @@
           </a:lstStyle>
           <a:p>
             <a:r>
-              <a:rPr lang="en-US" smtClean="0"/>
+              <a:rPr lang="en-US"/>
               <a:t>Click to edit Master title style</a:t>
             </a:r>
-            <a:endParaRPr lang="en-US"/>
           </a:p>
         </p:txBody>
       </p:sp>
@@ -1034,7 +1477,7 @@
           <a:p>
             <a:pPr lvl="0"/>
             <a:r>
-              <a:rPr lang="en-US" smtClean="0"/>
+              <a:rPr lang="en-US"/>
               <a:t>Click to edit Master text styles</a:t>
             </a:r>
           </a:p>
@@ -1057,7 +1500,7 @@
           <a:p>
             <a:fld id="{5BCAD085-E8A6-8845-BD4E-CB4CCA059FC4}" type="datetimeFigureOut">
               <a:rPr lang="en-US" smtClean="0"/>
-              <a:t>1/27/13</a:t>
+              <a:t>8/18/2026</a:t>
             </a:fld>
             <a:endParaRPr lang="en-US"/>
           </a:p>
@@ -1151,10 +1594,9 @@
           <a:lstStyle/>
           <a:p>
             <a:r>
-              <a:rPr lang="en-US" smtClean="0"/>
+              <a:rPr lang="en-US"/>
               <a:t>Click to edit Master title style</a:t>
             </a:r>
-            <a:endParaRPr lang="en-US"/>
           </a:p>
         </p:txBody>
       </p:sp>
@@ -1208,38 +1650,37 @@
           <a:p>
             <a:pPr lvl="0"/>
             <a:r>
-              <a:rPr lang="en-US" smtClean="0"/>
+              <a:rPr lang="en-US"/>
               <a:t>Click to edit Master text styles</a:t>
             </a:r>
           </a:p>
           <a:p>
             <a:pPr lvl="1"/>
             <a:r>
-              <a:rPr lang="en-US" smtClean="0"/>
+              <a:rPr lang="en-US"/>
               <a:t>Second level</a:t>
             </a:r>
           </a:p>
           <a:p>
             <a:pPr lvl="2"/>
             <a:r>
-              <a:rPr lang="en-US" smtClean="0"/>
+              <a:rPr lang="en-US"/>
               <a:t>Third level</a:t>
             </a:r>
           </a:p>
           <a:p>
             <a:pPr lvl="3"/>
             <a:r>
-              <a:rPr lang="en-US" smtClean="0"/>
+              <a:rPr lang="en-US"/>
               <a:t>Fourth level</a:t>
             </a:r>
           </a:p>
           <a:p>
             <a:pPr lvl="4"/>
             <a:r>
-              <a:rPr lang="en-US" smtClean="0"/>
+              <a:rPr lang="en-US"/>
               <a:t>Fifth level</a:t>
             </a:r>
-            <a:endParaRPr lang="en-US"/>
           </a:p>
         </p:txBody>
       </p:sp>
@@ -1293,38 +1734,37 @@
           <a:p>
             <a:pPr lvl="0"/>
             <a:r>
-              <a:rPr lang="en-US" smtClean="0"/>
+              <a:rPr lang="en-US"/>
               <a:t>Click to edit Master text styles</a:t>
             </a:r>
           </a:p>
           <a:p>
             <a:pPr lvl="1"/>
             <a:r>
-              <a:rPr lang="en-US" smtClean="0"/>
+              <a:rPr lang="en-US"/>
               <a:t>Second level</a:t>
             </a:r>
           </a:p>
           <a:p>
             <a:pPr lvl="2"/>
             <a:r>
-              <a:rPr lang="en-US" smtClean="0"/>
+              <a:rPr lang="en-US"/>
               <a:t>Third level</a:t>
             </a:r>
           </a:p>
           <a:p>
             <a:pPr lvl="3"/>
             <a:r>
-              <a:rPr lang="en-US" smtClean="0"/>
+              <a:rPr lang="en-US"/>
               <a:t>Fourth level</a:t>
             </a:r>
           </a:p>
           <a:p>
             <a:pPr lvl="4"/>
             <a:r>
-              <a:rPr lang="en-US" smtClean="0"/>
+              <a:rPr lang="en-US"/>
               <a:t>Fifth level</a:t>
             </a:r>
-            <a:endParaRPr lang="en-US"/>
           </a:p>
         </p:txBody>
       </p:sp>
@@ -1345,7 +1785,7 @@
           <a:p>
             <a:fld id="{5BCAD085-E8A6-8845-BD4E-CB4CCA059FC4}" type="datetimeFigureOut">
               <a:rPr lang="en-US" smtClean="0"/>
-              <a:t>1/27/13</a:t>
+              <a:t>8/18/2026</a:t>
             </a:fld>
             <a:endParaRPr lang="en-US"/>
           </a:p>
@@ -1443,10 +1883,9 @@
           </a:lstStyle>
           <a:p>
             <a:r>
-              <a:rPr lang="en-US" smtClean="0"/>
+              <a:rPr lang="en-US"/>
               <a:t>Click to edit Master title style</a:t>
             </a:r>
-            <a:endParaRPr lang="en-US"/>
           </a:p>
         </p:txBody>
       </p:sp>
@@ -1509,7 +1948,7 @@
           <a:p>
             <a:pPr lvl="0"/>
             <a:r>
-              <a:rPr lang="en-US" smtClean="0"/>
+              <a:rPr lang="en-US"/>
               <a:t>Click to edit Master text styles</a:t>
             </a:r>
           </a:p>
@@ -1565,38 +2004,37 @@
           <a:p>
             <a:pPr lvl="0"/>
             <a:r>
-              <a:rPr lang="en-US" smtClean="0"/>
+              <a:rPr lang="en-US"/>
               <a:t>Click to edit Master text styles</a:t>
             </a:r>
           </a:p>
           <a:p>
             <a:pPr lvl="1"/>
             <a:r>
-              <a:rPr lang="en-US" smtClean="0"/>
+              <a:rPr lang="en-US"/>
               <a:t>Second level</a:t>
             </a:r>
           </a:p>
           <a:p>
             <a:pPr lvl="2"/>
             <a:r>
-              <a:rPr lang="en-US" smtClean="0"/>
+              <a:rPr lang="en-US"/>
               <a:t>Third level</a:t>
             </a:r>
           </a:p>
           <a:p>
             <a:pPr lvl="3"/>
             <a:r>
-              <a:rPr lang="en-US" smtClean="0"/>
+              <a:rPr lang="en-US"/>
               <a:t>Fourth level</a:t>
             </a:r>
           </a:p>
           <a:p>
             <a:pPr lvl="4"/>
             <a:r>
-              <a:rPr lang="en-US" smtClean="0"/>
+              <a:rPr lang="en-US"/>
               <a:t>Fifth level</a:t>
             </a:r>
-            <a:endParaRPr lang="en-US"/>
           </a:p>
         </p:txBody>
       </p:sp>
@@ -1659,7 +2097,7 @@
           <a:p>
             <a:pPr lvl="0"/>
             <a:r>
-              <a:rPr lang="en-US" smtClean="0"/>
+              <a:rPr lang="en-US"/>
               <a:t>Click to edit Master text styles</a:t>
             </a:r>
           </a:p>
@@ -1715,38 +2153,37 @@
           <a:p>
             <a:pPr lvl="0"/>
             <a:r>
-              <a:rPr lang="en-US" smtClean="0"/>
+              <a:rPr lang="en-US"/>
               <a:t>Click to edit Master text styles</a:t>
             </a:r>
           </a:p>
           <a:p>
             <a:pPr lvl="1"/>
             <a:r>
-              <a:rPr lang="en-US" smtClean="0"/>
+              <a:rPr lang="en-US"/>
               <a:t>Second level</a:t>
             </a:r>
           </a:p>
           <a:p>
             <a:pPr lvl="2"/>
             <a:r>
-              <a:rPr lang="en-US" smtClean="0"/>
+              <a:rPr lang="en-US"/>
               <a:t>Third level</a:t>
             </a:r>
           </a:p>
           <a:p>
             <a:pPr lvl="3"/>
             <a:r>
-              <a:rPr lang="en-US" smtClean="0"/>
+              <a:rPr lang="en-US"/>
               <a:t>Fourth level</a:t>
             </a:r>
           </a:p>
           <a:p>
             <a:pPr lvl="4"/>
             <a:r>
-              <a:rPr lang="en-US" smtClean="0"/>
+              <a:rPr lang="en-US"/>
               <a:t>Fifth level</a:t>
             </a:r>
-            <a:endParaRPr lang="en-US"/>
           </a:p>
         </p:txBody>
       </p:sp>
@@ -1767,7 +2204,7 @@
           <a:p>
             <a:fld id="{5BCAD085-E8A6-8845-BD4E-CB4CCA059FC4}" type="datetimeFigureOut">
               <a:rPr lang="en-US" smtClean="0"/>
-              <a:t>1/27/13</a:t>
+              <a:t>8/18/2026</a:t>
             </a:fld>
             <a:endParaRPr lang="en-US"/>
           </a:p>
@@ -1861,10 +2298,9 @@
           <a:lstStyle/>
           <a:p>
             <a:r>
-              <a:rPr lang="en-US" smtClean="0"/>
+              <a:rPr lang="en-US"/>
               <a:t>Click to edit Master title style</a:t>
             </a:r>
-            <a:endParaRPr lang="en-US"/>
           </a:p>
         </p:txBody>
       </p:sp>
@@ -1885,7 +2321,7 @@
           <a:p>
             <a:fld id="{5BCAD085-E8A6-8845-BD4E-CB4CCA059FC4}" type="datetimeFigureOut">
               <a:rPr lang="en-US" smtClean="0"/>
-              <a:t>1/27/13</a:t>
+              <a:t>8/18/2026</a:t>
             </a:fld>
             <a:endParaRPr lang="en-US"/>
           </a:p>
@@ -1980,7 +2416,7 @@
           <a:p>
             <a:fld id="{5BCAD085-E8A6-8845-BD4E-CB4CCA059FC4}" type="datetimeFigureOut">
               <a:rPr lang="en-US" smtClean="0"/>
-              <a:t>1/27/13</a:t>
+              <a:t>8/18/2026</a:t>
             </a:fld>
             <a:endParaRPr lang="en-US"/>
           </a:p>
@@ -2083,10 +2519,9 @@
           </a:lstStyle>
           <a:p>
             <a:r>
-              <a:rPr lang="en-US" smtClean="0"/>
+              <a:rPr lang="en-US"/>
               <a:t>Click to edit Master title style</a:t>
             </a:r>
-            <a:endParaRPr lang="en-US"/>
           </a:p>
         </p:txBody>
       </p:sp>
@@ -2140,38 +2575,37 @@
           <a:p>
             <a:pPr lvl="0"/>
             <a:r>
-              <a:rPr lang="en-US" smtClean="0"/>
+              <a:rPr lang="en-US"/>
               <a:t>Click to edit Master text styles</a:t>
             </a:r>
           </a:p>
           <a:p>
             <a:pPr lvl="1"/>
             <a:r>
-              <a:rPr lang="en-US" smtClean="0"/>
+              <a:rPr lang="en-US"/>
               <a:t>Second level</a:t>
             </a:r>
           </a:p>
           <a:p>
             <a:pPr lvl="2"/>
             <a:r>
-              <a:rPr lang="en-US" smtClean="0"/>
+              <a:rPr lang="en-US"/>
               <a:t>Third level</a:t>
             </a:r>
           </a:p>
           <a:p>
             <a:pPr lvl="3"/>
             <a:r>
-              <a:rPr lang="en-US" smtClean="0"/>
+              <a:rPr lang="en-US"/>
               <a:t>Fourth level</a:t>
             </a:r>
           </a:p>
           <a:p>
             <a:pPr lvl="4"/>
             <a:r>
-              <a:rPr lang="en-US" smtClean="0"/>
+              <a:rPr lang="en-US"/>
               <a:t>Fifth level</a:t>
             </a:r>
-            <a:endParaRPr lang="en-US"/>
           </a:p>
         </p:txBody>
       </p:sp>
@@ -2234,7 +2668,7 @@
           <a:p>
             <a:pPr lvl="0"/>
             <a:r>
-              <a:rPr lang="en-US" smtClean="0"/>
+              <a:rPr lang="en-US"/>
               <a:t>Click to edit Master text styles</a:t>
             </a:r>
           </a:p>
@@ -2257,7 +2691,7 @@
           <a:p>
             <a:fld id="{5BCAD085-E8A6-8845-BD4E-CB4CCA059FC4}" type="datetimeFigureOut">
               <a:rPr lang="en-US" smtClean="0"/>
-              <a:t>1/27/13</a:t>
+              <a:t>8/18/2026</a:t>
             </a:fld>
             <a:endParaRPr lang="en-US"/>
           </a:p>
@@ -2360,10 +2794,9 @@
           </a:lstStyle>
           <a:p>
             <a:r>
-              <a:rPr lang="en-US" smtClean="0"/>
+              <a:rPr lang="en-US"/>
               <a:t>Click to edit Master title style</a:t>
             </a:r>
-            <a:endParaRPr lang="en-US"/>
           </a:p>
         </p:txBody>
       </p:sp>
@@ -2487,7 +2920,7 @@
           <a:p>
             <a:pPr lvl="0"/>
             <a:r>
-              <a:rPr lang="en-US" smtClean="0"/>
+              <a:rPr lang="en-US"/>
               <a:t>Click to edit Master text styles</a:t>
             </a:r>
           </a:p>
@@ -2510,7 +2943,7 @@
           <a:p>
             <a:fld id="{5BCAD085-E8A6-8845-BD4E-CB4CCA059FC4}" type="datetimeFigureOut">
               <a:rPr lang="en-US" smtClean="0"/>
-              <a:t>1/27/13</a:t>
+              <a:t>8/18/2026</a:t>
             </a:fld>
             <a:endParaRPr lang="en-US"/>
           </a:p>
@@ -2619,10 +3052,9 @@
           <a:lstStyle/>
           <a:p>
             <a:r>
-              <a:rPr lang="en-US" smtClean="0"/>
+              <a:rPr lang="en-US"/>
               <a:t>Click to edit Master title style</a:t>
             </a:r>
-            <a:endParaRPr lang="en-US"/>
           </a:p>
         </p:txBody>
       </p:sp>
@@ -2653,38 +3085,37 @@
           <a:p>
             <a:pPr lvl="0"/>
             <a:r>
-              <a:rPr lang="en-US" smtClean="0"/>
+              <a:rPr lang="en-US"/>
               <a:t>Click to edit Master text styles</a:t>
             </a:r>
           </a:p>
           <a:p>
             <a:pPr lvl="1"/>
             <a:r>
-              <a:rPr lang="en-US" smtClean="0"/>
+              <a:rPr lang="en-US"/>
               <a:t>Second level</a:t>
             </a:r>
           </a:p>
           <a:p>
             <a:pPr lvl="2"/>
             <a:r>
-              <a:rPr lang="en-US" smtClean="0"/>
+              <a:rPr lang="en-US"/>
               <a:t>Third level</a:t>
             </a:r>
           </a:p>
           <a:p>
             <a:pPr lvl="3"/>
             <a:r>
-              <a:rPr lang="en-US" smtClean="0"/>
+              <a:rPr lang="en-US"/>
               <a:t>Fourth level</a:t>
             </a:r>
           </a:p>
           <a:p>
             <a:pPr lvl="4"/>
             <a:r>
-              <a:rPr lang="en-US" smtClean="0"/>
+              <a:rPr lang="en-US"/>
               <a:t>Fifth level</a:t>
             </a:r>
-            <a:endParaRPr lang="en-US"/>
           </a:p>
         </p:txBody>
       </p:sp>
@@ -2723,7 +3154,7 @@
           <a:p>
             <a:fld id="{5BCAD085-E8A6-8845-BD4E-CB4CCA059FC4}" type="datetimeFigureOut">
               <a:rPr lang="en-US" smtClean="0"/>
-              <a:t>1/27/13</a:t>
+              <a:t>8/18/2026</a:t>
             </a:fld>
             <a:endParaRPr lang="en-US"/>
           </a:p>
@@ -3082,7 +3513,7 @@
 </file>
 
 <file path=ppt/slides/slide1.xml><?xml version="1.0" encoding="utf-8"?>
-<p:sld xmlns:a="http://schemas.openxmlformats.org/drawingml/2006/main" xmlns:p="http://schemas.openxmlformats.org/presentationml/2006/main" xmlns:r="http://schemas.openxmlformats.org/officeDocument/2006/relationships">
+<p:sld xmlns:a="http://schemas.openxmlformats.org/drawingml/2006/main" xmlns:r="http://schemas.openxmlformats.org/officeDocument/2006/relationships" xmlns:p="http://schemas.openxmlformats.org/presentationml/2006/main">
   <p:cSld>
     <p:spTree>
       <p:nvGrpSpPr>
@@ -3090,7 +3521,14 @@
         <p:cNvGrpSpPr/>
         <p:nvPr/>
       </p:nvGrpSpPr>
-      <p:grpSpPr/>
+      <p:grpSpPr>
+        <a:xfrm>
+          <a:off x="0" y="0"/>
+          <a:ext cx="0" cy="0"/>
+          <a:chOff x="0" y="0"/>
+          <a:chExt cx="0" cy="0"/>
+        </a:xfrm>
+      </p:grpSpPr>
       <p:sp>
         <p:nvSpPr>
           <p:cNvPr id="2" name="TextBox 1"/>
@@ -3108,7 +3546,7 @@
           <a:noFill/>
         </p:spPr>
         <p:txBody>
-          <a:bodyPr wrap="square" anchor="t" lIns="0" rIns="0" tIns="0" bIns="0">
+          <a:bodyPr wrap="square" lIns="0" tIns="0" rIns="0" bIns="0" anchor="t">
             <a:spAutoFit/>
           </a:bodyPr>
           <a:lstStyle/>
@@ -3147,7 +3585,7 @@
           <a:noFill/>
         </p:spPr>
         <p:txBody>
-          <a:bodyPr wrap="square" anchor="t" lIns="0" rIns="0" tIns="0" bIns="0">
+          <a:bodyPr wrap="square" lIns="0" tIns="0" rIns="0" bIns="0" anchor="t">
             <a:spAutoFit/>
           </a:bodyPr>
           <a:lstStyle/>
@@ -3217,31 +3655,34 @@
           </a:fontRef>
         </p:style>
         <p:txBody>
-          <a:bodyPr rtlCol="0" anchor="ctr" wrap="square" lIns="30000" rIns="30000"/>
+          <a:bodyPr wrap="square" lIns="30000" rIns="30000" rtlCol="0" anchor="ctr"/>
           <a:lstStyle/>
           <a:p>
             <a:pPr algn="ctr"/>
             <a:r>
-              <a:rPr sz="900" b="1">
+              <a:rPr sz="900" b="1" dirty="0">
                 <a:solidFill>
                   <a:srgbClr val="202020"/>
                 </a:solidFill>
                 <a:latin typeface="Microsoft JhengHei"/>
               </a:rPr>
-              <a:t>Summarize 摘要</a:t>
-            </a:r>
-          </a:p>
-          <a:p>
-            <a:pPr algn="ctr"/>
-            <a:r>
-              <a:rPr sz="900" b="1">
+              <a:t>Summarize </a:t>
+            </a:r>
+            <a:r>
+              <a:rPr sz="900" b="1" dirty="0" err="1">
                 <a:solidFill>
                   <a:srgbClr val="202020"/>
                 </a:solidFill>
                 <a:latin typeface="Microsoft JhengHei"/>
               </a:rPr>
-              <a:t>(離線前處理)</a:t>
-            </a:r>
+              <a:t>摘要</a:t>
+            </a:r>
+            <a:endParaRPr sz="900" b="1" dirty="0">
+              <a:solidFill>
+                <a:srgbClr val="202020"/>
+              </a:solidFill>
+              <a:latin typeface="Microsoft JhengHei"/>
+            </a:endParaRPr>
           </a:p>
         </p:txBody>
       </p:sp>
@@ -3290,8 +3731,8 @@
         </p:nvSpPr>
         <p:spPr>
           <a:xfrm>
-            <a:off x="-146303" y="1801368"/>
-            <a:ext cx="4297680" cy="274320"/>
+            <a:off x="113286" y="1071118"/>
+            <a:ext cx="3778500" cy="123111"/>
           </a:xfrm>
           <a:prstGeom prst="rect">
             <a:avLst/>
@@ -3299,7 +3740,7 @@
           <a:noFill/>
         </p:spPr>
         <p:txBody>
-          <a:bodyPr wrap="square" anchor="t" lIns="0" rIns="0" tIns="0" bIns="0">
+          <a:bodyPr wrap="square" lIns="0" tIns="0" rIns="0" bIns="0" anchor="t">
             <a:spAutoFit/>
           </a:bodyPr>
           <a:lstStyle/>
@@ -3310,14 +3751,38 @@
               </a:lnSpc>
             </a:pPr>
             <a:r>
-              <a:rPr sz="800" b="1">
+              <a:rPr sz="800" b="1" dirty="0" err="1">
                 <a:solidFill>
                   <a:srgbClr val="808080"/>
                 </a:solidFill>
                 <a:latin typeface="Microsoft JhengHei"/>
               </a:rPr>
-              <a:t>模擬開始前先把原始新聞/財報壓縮成摘要</a:t>
-            </a:r>
+              <a:t>模擬開始前先把原始新聞</a:t>
+            </a:r>
+            <a:r>
+              <a:rPr sz="800" b="1" dirty="0">
+                <a:solidFill>
+                  <a:srgbClr val="808080"/>
+                </a:solidFill>
+                <a:latin typeface="Microsoft JhengHei"/>
+              </a:rPr>
+              <a:t>/</a:t>
+            </a:r>
+            <a:r>
+              <a:rPr sz="800" b="1" dirty="0" err="1">
+                <a:solidFill>
+                  <a:srgbClr val="808080"/>
+                </a:solidFill>
+                <a:latin typeface="Microsoft JhengHei"/>
+              </a:rPr>
+              <a:t>財報壓縮成摘要</a:t>
+            </a:r>
+            <a:endParaRPr sz="800" b="1" dirty="0">
+              <a:solidFill>
+                <a:srgbClr val="808080"/>
+              </a:solidFill>
+              <a:latin typeface="Microsoft JhengHei"/>
+            </a:endParaRPr>
           </a:p>
         </p:txBody>
       </p:sp>
@@ -3360,31 +3825,34 @@
           </a:fontRef>
         </p:style>
         <p:txBody>
-          <a:bodyPr rtlCol="0" anchor="ctr" wrap="square" lIns="30000" rIns="30000"/>
+          <a:bodyPr wrap="square" lIns="30000" rIns="30000" rtlCol="0" anchor="ctr"/>
           <a:lstStyle/>
           <a:p>
             <a:pPr algn="ctr"/>
             <a:r>
-              <a:rPr sz="900" b="1">
+              <a:rPr sz="900" b="1" dirty="0">
                 <a:solidFill>
                   <a:srgbClr val="2E6DA4"/>
                 </a:solidFill>
                 <a:latin typeface="Microsoft JhengHei"/>
               </a:rPr>
-              <a:t>Profiling 角色設定</a:t>
-            </a:r>
-          </a:p>
-          <a:p>
-            <a:pPr algn="ctr"/>
-            <a:r>
-              <a:rPr sz="900" b="1">
+              <a:t>Profiling </a:t>
+            </a:r>
+            <a:r>
+              <a:rPr sz="900" b="1" dirty="0" err="1">
                 <a:solidFill>
                   <a:srgbClr val="2E6DA4"/>
                 </a:solidFill>
                 <a:latin typeface="Microsoft JhengHei"/>
               </a:rPr>
-              <a:t>(一次性)</a:t>
-            </a:r>
+              <a:t>角色設定</a:t>
+            </a:r>
+            <a:endParaRPr sz="900" b="1" dirty="0">
+              <a:solidFill>
+                <a:srgbClr val="2E6DA4"/>
+              </a:solidFill>
+              <a:latin typeface="Microsoft JhengHei"/>
+            </a:endParaRPr>
           </a:p>
         </p:txBody>
       </p:sp>
@@ -3433,8 +3901,8 @@
         </p:nvSpPr>
         <p:spPr>
           <a:xfrm>
-            <a:off x="5166360" y="1801368"/>
-            <a:ext cx="3657600" cy="274320"/>
+            <a:off x="5351780" y="1071118"/>
+            <a:ext cx="3286760" cy="123111"/>
           </a:xfrm>
           <a:prstGeom prst="rect">
             <a:avLst/>
@@ -3442,7 +3910,7 @@
           <a:noFill/>
         </p:spPr>
         <p:txBody>
-          <a:bodyPr wrap="square" anchor="t" lIns="0" rIns="0" tIns="0" bIns="0">
+          <a:bodyPr wrap="square" lIns="0" tIns="0" rIns="0" bIns="0" anchor="t">
             <a:spAutoFit/>
           </a:bodyPr>
           <a:lstStyle/>
@@ -3453,14 +3921,38 @@
               </a:lnSpc>
             </a:pPr>
             <a:r>
-              <a:rPr sz="800" b="1">
+              <a:rPr sz="800" b="1" dirty="0" err="1">
                 <a:solidFill>
                   <a:srgbClr val="2E6DA4"/>
                 </a:solidFill>
                 <a:latin typeface="Microsoft JhengHei"/>
               </a:rPr>
-              <a:t>建立 Agent 時設定一次,當作檢索記憶的查詢依據</a:t>
-            </a:r>
+              <a:t>建立</a:t>
+            </a:r>
+            <a:r>
+              <a:rPr sz="800" b="1" dirty="0">
+                <a:solidFill>
+                  <a:srgbClr val="2E6DA4"/>
+                </a:solidFill>
+                <a:latin typeface="Microsoft JhengHei"/>
+              </a:rPr>
+              <a:t> Agent </a:t>
+            </a:r>
+            <a:r>
+              <a:rPr sz="800" b="1" dirty="0" err="1">
+                <a:solidFill>
+                  <a:srgbClr val="2E6DA4"/>
+                </a:solidFill>
+                <a:latin typeface="Microsoft JhengHei"/>
+              </a:rPr>
+              <a:t>時設定一次,當作檢索記憶的查詢依據</a:t>
+            </a:r>
+            <a:endParaRPr sz="800" b="1" dirty="0">
+              <a:solidFill>
+                <a:srgbClr val="2E6DA4"/>
+              </a:solidFill>
+              <a:latin typeface="Microsoft JhengHei"/>
+            </a:endParaRPr>
           </a:p>
         </p:txBody>
       </p:sp>
@@ -3503,7 +3995,7 @@
           </a:fontRef>
         </p:style>
         <p:txBody>
-          <a:bodyPr rtlCol="0" anchor="ctr" wrap="square" lIns="30000" rIns="30000"/>
+          <a:bodyPr wrap="square" lIns="30000" rIns="30000" rtlCol="0" anchor="ctr"/>
           <a:lstStyle/>
           <a:p>
             <a:pPr algn="ctr"/>
@@ -3572,6 +4064,7 @@
           <a:lstStyle/>
           <a:p>
             <a:pPr algn="ctr"/>
+            <a:endParaRPr/>
           </a:p>
         </p:txBody>
       </p:sp>
@@ -3614,7 +4107,7 @@
           </a:fontRef>
         </p:style>
         <p:txBody>
-          <a:bodyPr rtlCol="0" anchor="ctr" wrap="square" lIns="30000" rIns="30000"/>
+          <a:bodyPr wrap="square" lIns="30000" rIns="30000" rtlCol="0" anchor="ctr"/>
           <a:lstStyle/>
           <a:p>
             <a:pPr algn="ctr"/>
@@ -3683,6 +4176,7 @@
           <a:lstStyle/>
           <a:p>
             <a:pPr algn="ctr"/>
+            <a:endParaRPr/>
           </a:p>
         </p:txBody>
       </p:sp>
@@ -3727,6 +4221,7 @@
           <a:lstStyle/>
           <a:p>
             <a:pPr algn="ctr"/>
+            <a:endParaRPr/>
           </a:p>
         </p:txBody>
       </p:sp>
@@ -3769,7 +4264,7 @@
           </a:fontRef>
         </p:style>
         <p:txBody>
-          <a:bodyPr rtlCol="0" anchor="ctr" wrap="square" lIns="30000" rIns="30000"/>
+          <a:bodyPr wrap="square" lIns="30000" rIns="30000" rtlCol="0" anchor="ctr"/>
           <a:lstStyle/>
           <a:p>
             <a:pPr algn="ctr"/>
@@ -3780,7 +4275,7 @@
                 </a:solidFill>
                 <a:latin typeface="Microsoft JhengHei"/>
               </a:rPr>
-              <a:t>Layered Memory</a:t>
+              <a:t>Layered Long-term Memory</a:t>
             </a:r>
           </a:p>
           <a:p>
@@ -3793,18 +4288,6 @@
                 <a:latin typeface="Microsoft JhengHei"/>
               </a:rPr>
               <a:t>分層長期記憶</a:t>
-            </a:r>
-          </a:p>
-          <a:p>
-            <a:pPr algn="ctr"/>
-            <a:r>
-              <a:rPr sz="780" b="1">
-                <a:solidFill>
-                  <a:srgbClr val="202020"/>
-                </a:solidFill>
-                <a:latin typeface="Microsoft JhengHei"/>
-              </a:rPr>
-              <a:t>(4 庫,依分數升降)</a:t>
             </a:r>
           </a:p>
         </p:txBody>
@@ -3850,6 +4333,7 @@
           <a:lstStyle/>
           <a:p>
             <a:pPr algn="ctr"/>
+            <a:endParaRPr/>
           </a:p>
         </p:txBody>
       </p:sp>
@@ -3892,12 +4376,12 @@
           </a:fontRef>
         </p:style>
         <p:txBody>
-          <a:bodyPr rtlCol="0" anchor="ctr" wrap="square" lIns="30000" rIns="30000"/>
+          <a:bodyPr wrap="square" lIns="30000" rIns="30000" rtlCol="0" anchor="ctr"/>
           <a:lstStyle/>
           <a:p>
             <a:pPr algn="ctr"/>
             <a:r>
-              <a:rPr sz="950" b="1">
+              <a:rPr sz="950" b="1" dirty="0">
                 <a:solidFill>
                   <a:srgbClr val="202020"/>
                 </a:solidFill>
@@ -3909,7 +4393,7 @@
           <a:p>
             <a:pPr algn="ctr"/>
             <a:r>
-              <a:rPr sz="950" b="1">
+              <a:rPr sz="950" b="1" dirty="0" err="1">
                 <a:solidFill>
                   <a:srgbClr val="202020"/>
                 </a:solidFill>
@@ -3917,6 +4401,12 @@
               </a:rPr>
               <a:t>記憶檢索</a:t>
             </a:r>
+            <a:endParaRPr sz="950" b="1" dirty="0">
+              <a:solidFill>
+                <a:srgbClr val="202020"/>
+              </a:solidFill>
+              <a:latin typeface="Microsoft JhengHei"/>
+            </a:endParaRPr>
           </a:p>
         </p:txBody>
       </p:sp>
@@ -3961,6 +4451,7 @@
           <a:lstStyle/>
           <a:p>
             <a:pPr algn="ctr"/>
+            <a:endParaRPr/>
           </a:p>
         </p:txBody>
       </p:sp>
@@ -4003,7 +4494,7 @@
           </a:fontRef>
         </p:style>
         <p:txBody>
-          <a:bodyPr rtlCol="0" anchor="ctr" wrap="square" lIns="30000" rIns="30000"/>
+          <a:bodyPr wrap="square" lIns="30000" rIns="30000" rtlCol="0" anchor="ctr"/>
           <a:lstStyle/>
           <a:p>
             <a:pPr algn="ctr"/>
@@ -4072,6 +4563,7 @@
           <a:lstStyle/>
           <a:p>
             <a:pPr algn="ctr"/>
+            <a:endParaRPr/>
           </a:p>
         </p:txBody>
       </p:sp>
@@ -4084,7 +4576,7 @@
         <p:spPr>
           <a:xfrm>
             <a:off x="6135624" y="3584448"/>
-            <a:ext cx="1719072" cy="228600"/>
+            <a:ext cx="1719072" cy="115416"/>
           </a:xfrm>
           <a:prstGeom prst="rect">
             <a:avLst/>
@@ -4092,7 +4584,7 @@
           <a:noFill/>
         </p:spPr>
         <p:txBody>
-          <a:bodyPr wrap="square" anchor="t" lIns="0" rIns="0" tIns="0" bIns="0">
+          <a:bodyPr wrap="square" lIns="0" tIns="0" rIns="0" bIns="0" anchor="t">
             <a:spAutoFit/>
           </a:bodyPr>
           <a:lstStyle/>
@@ -4103,14 +4595,29 @@
               </a:lnSpc>
             </a:pPr>
             <a:r>
-              <a:rPr sz="750" b="1">
+              <a:rPr sz="750" b="1" dirty="0" err="1">
                 <a:solidFill>
                   <a:srgbClr val="D98A3A"/>
                 </a:solidFill>
                 <a:latin typeface="Microsoft JhengHei"/>
               </a:rPr>
-              <a:t>不經記憶層,直接提供市場事實</a:t>
-            </a:r>
+              <a:t>直接提供市場</a:t>
+            </a:r>
+            <a:r>
+              <a:rPr lang="zh-TW" altLang="en-US" sz="750" b="1" dirty="0">
+                <a:solidFill>
+                  <a:srgbClr val="D98A3A"/>
+                </a:solidFill>
+                <a:latin typeface="Microsoft JhengHei"/>
+              </a:rPr>
+              <a:t>數據</a:t>
+            </a:r>
+            <a:endParaRPr sz="750" b="1" dirty="0">
+              <a:solidFill>
+                <a:srgbClr val="D98A3A"/>
+              </a:solidFill>
+              <a:latin typeface="Microsoft JhengHei"/>
+            </a:endParaRPr>
           </a:p>
         </p:txBody>
       </p:sp>
@@ -4153,7 +4660,7 @@
           </a:fontRef>
         </p:style>
         <p:txBody>
-          <a:bodyPr rtlCol="0" anchor="ctr" wrap="square" lIns="30000" rIns="30000"/>
+          <a:bodyPr wrap="square" lIns="30000" rIns="30000" rtlCol="0" anchor="ctr"/>
           <a:lstStyle/>
           <a:p>
             <a:pPr algn="ctr"/>
@@ -4222,6 +4729,7 @@
           <a:lstStyle/>
           <a:p>
             <a:pPr algn="ctr"/>
+            <a:endParaRPr/>
           </a:p>
         </p:txBody>
       </p:sp>
@@ -4264,86 +4772,43 @@
           </a:fontRef>
         </p:style>
         <p:txBody>
-          <a:bodyPr rtlCol="0" anchor="ctr" wrap="square" lIns="30000" rIns="30000"/>
+          <a:bodyPr wrap="square" lIns="30000" rIns="30000" rtlCol="0" anchor="ctr"/>
           <a:lstStyle/>
           <a:p>
             <a:pPr algn="ctr"/>
             <a:r>
-              <a:rPr sz="950" b="1">
+              <a:rPr lang="en-US" sz="950" b="1" dirty="0">
                 <a:solidFill>
                   <a:srgbClr val="202020"/>
                 </a:solidFill>
                 <a:latin typeface="Microsoft JhengHei"/>
               </a:rPr>
-              <a:t>Decision-making</a:t>
-            </a:r>
+              <a:t>Investment decisions and reflecting outcomes</a:t>
+            </a:r>
+            <a:endParaRPr lang="en-US" altLang="zh-TW" sz="950" b="1" dirty="0">
+              <a:solidFill>
+                <a:srgbClr val="202020"/>
+              </a:solidFill>
+              <a:latin typeface="Microsoft JhengHei"/>
+            </a:endParaRPr>
           </a:p>
           <a:p>
             <a:pPr algn="ctr"/>
             <a:r>
-              <a:rPr sz="950" b="1">
+              <a:rPr lang="zh-TW" altLang="en-US" sz="950" b="1" dirty="0">
                 <a:solidFill>
                   <a:srgbClr val="202020"/>
                 </a:solidFill>
                 <a:latin typeface="Microsoft JhengHei"/>
               </a:rPr>
-              <a:t>決策輸出</a:t>
-            </a:r>
-          </a:p>
-        </p:txBody>
-      </p:sp>
-      <p:sp>
-        <p:nvSpPr>
-          <p:cNvPr id="25" name="TextBox 24"/>
-          <p:cNvSpPr txBox="1"/>
-          <p:nvPr/>
-        </p:nvSpPr>
-        <p:spPr>
-          <a:xfrm>
-            <a:off x="9180576" y="3401568"/>
-            <a:ext cx="2103120" cy="502920"/>
-          </a:xfrm>
-          <a:prstGeom prst="rect">
-            <a:avLst/>
-          </a:prstGeom>
-          <a:noFill/>
-        </p:spPr>
-        <p:txBody>
-          <a:bodyPr wrap="square" anchor="t" lIns="0" rIns="0" tIns="0" bIns="0">
-            <a:spAutoFit/>
-          </a:bodyPr>
-          <a:lstStyle/>
-          <a:p>
-            <a:pPr algn="ctr">
-              <a:lnSpc>
-                <a:spcPct val="110000"/>
-              </a:lnSpc>
-            </a:pPr>
-            <a:r>
-              <a:rPr sz="750" b="1">
-                <a:solidFill>
-                  <a:srgbClr val="606060"/>
-                </a:solidFill>
-                <a:latin typeface="Microsoft JhengHei"/>
-              </a:rPr>
-              <a:t>4 個子步驟:</a:t>
-            </a:r>
-          </a:p>
-          <a:p>
-            <a:pPr algn="ctr">
-              <a:lnSpc>
-                <a:spcPct val="110000"/>
-              </a:lnSpc>
-            </a:pPr>
-            <a:r>
-              <a:rPr sz="750" b="1">
-                <a:solidFill>
-                  <a:srgbClr val="606060"/>
-                </a:solidFill>
-                <a:latin typeface="Microsoft JhengHei"/>
-              </a:rPr>
-              <a:t>①方向 ②記帳 ③回饋記憶 ④記憶維運</a:t>
-            </a:r>
+              <a:t>投資決策及結果反映</a:t>
+            </a:r>
+            <a:endParaRPr sz="950" b="1" dirty="0">
+              <a:solidFill>
+                <a:srgbClr val="202020"/>
+              </a:solidFill>
+              <a:latin typeface="Microsoft JhengHei"/>
+            </a:endParaRPr>
           </a:p>
         </p:txBody>
       </p:sp>
@@ -4388,6 +4853,7 @@
           <a:lstStyle/>
           <a:p>
             <a:pPr algn="ctr"/>
+            <a:endParaRPr/>
           </a:p>
         </p:txBody>
       </p:sp>
@@ -4430,12 +4896,12 @@
           </a:fontRef>
         </p:style>
         <p:txBody>
-          <a:bodyPr rtlCol="0" anchor="ctr" wrap="square" lIns="30000" rIns="30000"/>
+          <a:bodyPr wrap="square" lIns="30000" rIns="30000" rtlCol="0" anchor="ctr"/>
           <a:lstStyle/>
           <a:p>
             <a:pPr algn="ctr"/>
             <a:r>
-              <a:rPr sz="950" b="1">
+              <a:rPr sz="950" b="1" dirty="0" err="1">
                 <a:solidFill>
                   <a:srgbClr val="202020"/>
                 </a:solidFill>
@@ -4443,57 +4909,66 @@
               </a:rPr>
               <a:t>交易決策</a:t>
             </a:r>
+            <a:endParaRPr sz="950" b="1" dirty="0">
+              <a:solidFill>
+                <a:srgbClr val="202020"/>
+              </a:solidFill>
+              <a:latin typeface="Microsoft JhengHei"/>
+            </a:endParaRPr>
           </a:p>
           <a:p>
             <a:pPr algn="ctr"/>
             <a:r>
-              <a:rPr sz="950" b="1">
+              <a:rPr lang="zh-TW" altLang="en-US" sz="950" b="1" dirty="0">
                 <a:solidFill>
                   <a:srgbClr val="202020"/>
                 </a:solidFill>
                 <a:latin typeface="Microsoft JhengHei"/>
               </a:rPr>
-              <a:t>Buy / Sell / Hold</a:t>
-            </a:r>
-          </a:p>
-        </p:txBody>
-      </p:sp>
-      <p:sp>
-        <p:nvSpPr>
-          <p:cNvPr id="28" name="TextBox 27"/>
-          <p:cNvSpPr txBox="1"/>
-          <p:nvPr/>
-        </p:nvSpPr>
-        <p:spPr>
-          <a:xfrm>
-            <a:off x="10936224" y="3401568"/>
-            <a:ext cx="2103120" cy="274320"/>
-          </a:xfrm>
-          <a:prstGeom prst="rect">
-            <a:avLst/>
-          </a:prstGeom>
-          <a:noFill/>
-        </p:spPr>
-        <p:txBody>
-          <a:bodyPr wrap="square" anchor="t" lIns="0" rIns="0" tIns="0" bIns="0">
-            <a:spAutoFit/>
-          </a:bodyPr>
-          <a:lstStyle/>
-          <a:p>
-            <a:pPr algn="ctr">
-              <a:lnSpc>
-                <a:spcPct val="100000"/>
-              </a:lnSpc>
-            </a:pPr>
-            <a:r>
-              <a:rPr sz="750" b="1">
-                <a:solidFill>
-                  <a:srgbClr val="C03030"/>
+              <a:t>買進</a:t>
+            </a:r>
+            <a:r>
+              <a:rPr sz="950" b="1" dirty="0">
+                <a:solidFill>
+                  <a:srgbClr val="202020"/>
                 </a:solidFill>
                 <a:latin typeface="Microsoft JhengHei"/>
               </a:rPr>
-              <a:t>模擬持倉,未連接真實券商</a:t>
-            </a:r>
+              <a:t> / </a:t>
+            </a:r>
+            <a:r>
+              <a:rPr lang="zh-TW" altLang="en-US" sz="950" b="1" dirty="0">
+                <a:solidFill>
+                  <a:srgbClr val="202020"/>
+                </a:solidFill>
+                <a:latin typeface="Microsoft JhengHei"/>
+              </a:rPr>
+              <a:t>賣出</a:t>
+            </a:r>
+            <a:r>
+              <a:rPr sz="950" b="1" dirty="0">
+                <a:solidFill>
+                  <a:srgbClr val="202020"/>
+                </a:solidFill>
+                <a:latin typeface="Microsoft JhengHei"/>
+              </a:rPr>
+              <a:t> / </a:t>
+            </a:r>
+            <a:r>
+              <a:rPr lang="zh-TW" altLang="en-US" sz="950" b="1" dirty="0">
+                <a:solidFill>
+                  <a:srgbClr val="202020"/>
+                </a:solidFill>
+                <a:latin typeface="Microsoft JhengHei"/>
+              </a:rPr>
+              <a:t>持有</a:t>
+            </a:r>
+            <a:endParaRPr sz="950" b="1" dirty="0">
+              <a:solidFill>
+                <a:srgbClr val="202020"/>
+              </a:solidFill>
+              <a:latin typeface="Microsoft JhengHei"/>
+            </a:endParaRPr>
           </a:p>
         </p:txBody>
       </p:sp>
@@ -4503,11 +4978,17 @@
           <p:cNvGraphicFramePr>
             <a:graphicFrameLocks noGrp="1"/>
           </p:cNvGraphicFramePr>
-          <p:nvPr/>
+          <p:nvPr>
+            <p:extLst>
+              <p:ext uri="{D42A27DB-BD31-4B8C-83A1-F6EECF244321}">
+                <p14:modId xmlns:p14="http://schemas.microsoft.com/office/powerpoint/2010/main" val="4078986442"/>
+              </p:ext>
+            </p:extLst>
+          </p:nvPr>
         </p:nvGraphicFramePr>
         <p:xfrm>
           <a:off x="1133856" y="4270248"/>
-          <a:ext cx="11631164" cy="5102352"/>
+          <a:ext cx="11631164" cy="5209220"/>
         </p:xfrm>
         <a:graphic>
           <a:graphicData uri="http://schemas.openxmlformats.org/drawingml/2006/table">
@@ -4516,21 +4997,51 @@
                 <a:tableStyleId>{5C22544A-7EE6-4342-B048-85BDC9FD1C3A}</a:tableStyleId>
               </a:tblPr>
               <a:tblGrid>
-                <a:gridCol w="1163116"/>
-                <a:gridCol w="3721973"/>
-                <a:gridCol w="2326233"/>
-                <a:gridCol w="2209921"/>
-                <a:gridCol w="2209921"/>
+                <a:gridCol w="1163116">
+                  <a:extLst>
+                    <a:ext uri="{9D8B030D-6E8A-4147-A177-3AD203B41FA5}">
+                      <a16:colId xmlns:a16="http://schemas.microsoft.com/office/drawing/2014/main" val="20000"/>
+                    </a:ext>
+                  </a:extLst>
+                </a:gridCol>
+                <a:gridCol w="3721973">
+                  <a:extLst>
+                    <a:ext uri="{9D8B030D-6E8A-4147-A177-3AD203B41FA5}">
+                      <a16:colId xmlns:a16="http://schemas.microsoft.com/office/drawing/2014/main" val="20001"/>
+                    </a:ext>
+                  </a:extLst>
+                </a:gridCol>
+                <a:gridCol w="2326233">
+                  <a:extLst>
+                    <a:ext uri="{9D8B030D-6E8A-4147-A177-3AD203B41FA5}">
+                      <a16:colId xmlns:a16="http://schemas.microsoft.com/office/drawing/2014/main" val="20002"/>
+                    </a:ext>
+                  </a:extLst>
+                </a:gridCol>
+                <a:gridCol w="2209921">
+                  <a:extLst>
+                    <a:ext uri="{9D8B030D-6E8A-4147-A177-3AD203B41FA5}">
+                      <a16:colId xmlns:a16="http://schemas.microsoft.com/office/drawing/2014/main" val="20003"/>
+                    </a:ext>
+                  </a:extLst>
+                </a:gridCol>
+                <a:gridCol w="2209921">
+                  <a:extLst>
+                    <a:ext uri="{9D8B030D-6E8A-4147-A177-3AD203B41FA5}">
+                      <a16:colId xmlns:a16="http://schemas.microsoft.com/office/drawing/2014/main" val="20004"/>
+                    </a:ext>
+                  </a:extLst>
+                </a:gridCol>
               </a:tblGrid>
               <a:tr h="310896">
                 <a:tc>
                   <a:txBody>
-                    <a:bodyPr wrap="square"/>
+                    <a:bodyPr/>
                     <a:lstStyle/>
                     <a:p>
                       <a:pPr algn="ctr"/>
                       <a:r>
-                        <a:rPr sz="1000" b="1">
+                        <a:rPr sz="1000" b="1" dirty="0" err="1">
                           <a:solidFill>
                             <a:srgbClr val="FFFFFF"/>
                           </a:solidFill>
@@ -4538,6 +5049,12 @@
                         </a:rPr>
                         <a:t>模組</a:t>
                       </a:r>
+                      <a:endParaRPr sz="1000" b="1" dirty="0">
+                        <a:solidFill>
+                          <a:srgbClr val="FFFFFF"/>
+                        </a:solidFill>
+                        <a:latin typeface="Microsoft JhengHei"/>
+                      </a:endParaRPr>
                     </a:p>
                   </a:txBody>
                   <a:tcPr marL="40000" marR="40000" marT="10000" marB="10000" anchor="ctr">
@@ -4548,7 +5065,7 @@
                 </a:tc>
                 <a:tc>
                   <a:txBody>
-                    <a:bodyPr wrap="square"/>
+                    <a:bodyPr/>
                     <a:lstStyle/>
                     <a:p>
                       <a:pPr algn="ctr"/>
@@ -4571,7 +5088,7 @@
                 </a:tc>
                 <a:tc>
                   <a:txBody>
-                    <a:bodyPr wrap="square"/>
+                    <a:bodyPr/>
                     <a:lstStyle/>
                     <a:p>
                       <a:pPr algn="ctr"/>
@@ -4594,7 +5111,7 @@
                 </a:tc>
                 <a:tc>
                   <a:txBody>
-                    <a:bodyPr wrap="square"/>
+                    <a:bodyPr/>
                     <a:lstStyle/>
                     <a:p>
                       <a:pPr algn="ctr"/>
@@ -4617,7 +5134,7 @@
                 </a:tc>
                 <a:tc>
                   <a:txBody>
-                    <a:bodyPr wrap="square"/>
+                    <a:bodyPr/>
                     <a:lstStyle/>
                     <a:p>
                       <a:pPr algn="ctr"/>
@@ -4638,16 +5155,21 @@
                     </a:solidFill>
                   </a:tcPr>
                 </a:tc>
+                <a:extLst>
+                  <a:ext uri="{0D108BD9-81ED-4DB2-BD59-A6C34878D82A}">
+                    <a16:rowId xmlns:a16="http://schemas.microsoft.com/office/drawing/2014/main" val="10000"/>
+                  </a:ext>
+                </a:extLst>
               </a:tr>
               <a:tr h="598932">
                 <a:tc>
                   <a:txBody>
-                    <a:bodyPr wrap="square"/>
+                    <a:bodyPr/>
                     <a:lstStyle/>
                     <a:p>
                       <a:pPr algn="ctr"/>
                       <a:r>
-                        <a:rPr sz="860" b="1">
+                        <a:rPr sz="860" b="1" dirty="0">
                           <a:solidFill>
                             <a:srgbClr val="000000"/>
                           </a:solidFill>
@@ -4659,7 +5181,7 @@
                     <a:p>
                       <a:pPr algn="ctr"/>
                       <a:r>
-                        <a:rPr sz="860" b="1">
+                        <a:rPr sz="860" b="1" dirty="0" err="1">
                           <a:solidFill>
                             <a:srgbClr val="000000"/>
                           </a:solidFill>
@@ -4667,6 +5189,12 @@
                         </a:rPr>
                         <a:t>摘要</a:t>
                       </a:r>
+                      <a:endParaRPr sz="860" b="1" dirty="0">
+                        <a:solidFill>
+                          <a:srgbClr val="000000"/>
+                        </a:solidFill>
+                        <a:latin typeface="Microsoft JhengHei"/>
+                      </a:endParaRPr>
                     </a:p>
                   </a:txBody>
                   <a:tcPr marL="40000" marR="40000" marT="10000" marB="10000" anchor="ctr">
@@ -4677,19 +5205,25 @@
                 </a:tc>
                 <a:tc>
                   <a:txBody>
-                    <a:bodyPr wrap="square"/>
+                    <a:bodyPr/>
                     <a:lstStyle/>
                     <a:p>
                       <a:pPr algn="l"/>
                       <a:r>
-                        <a:rPr sz="780" b="0">
-                          <a:solidFill>
-                            <a:srgbClr val="000000"/>
-                          </a:solidFill>
-                          <a:latin typeface="Microsoft JhengHei"/>
-                        </a:rPr>
-                        <a:t>不在每日流程裡,是模擬開始前的離線腳本,呼叫 LLM 把原文壓成約 200 tokens 摘要,另用 VADER/FinBERT 幫新聞標情緒分數</a:t>
-                      </a:r>
+                        <a:rPr sz="830" b="0">
+                          <a:solidFill>
+                            <a:srgbClr val="202020"/>
+                          </a:solidFill>
+                          <a:latin typeface="Microsoft JhengHei"/>
+                        </a:rPr>
+                        <a:t>模擬開始前的腳本,呼叫 LLM 把原文壓成約 200 tokens 摘要;新聞另外還會被標上情緒分數(正負中立傾向)</a:t>
+                      </a:r>
+                      <a:endParaRPr sz="780" b="0" dirty="0">
+                        <a:solidFill>
+                          <a:srgbClr val="000000"/>
+                        </a:solidFill>
+                        <a:latin typeface="Microsoft JhengHei"/>
+                      </a:endParaRPr>
                     </a:p>
                   </a:txBody>
                   <a:tcPr marL="40000" marR="40000" marT="10000" marB="10000" anchor="ctr">
@@ -4700,19 +5234,101 @@
                 </a:tc>
                 <a:tc>
                   <a:txBody>
-                    <a:bodyPr wrap="square"/>
+                    <a:bodyPr/>
                     <a:lstStyle/>
                     <a:p>
                       <a:pPr algn="l"/>
                       <a:r>
-                        <a:rPr sz="780" b="0">
-                          <a:solidFill>
-                            <a:srgbClr val="000000"/>
-                          </a:solidFill>
-                          <a:latin typeface="Microsoft JhengHei"/>
-                        </a:rPr>
-                        <a:t>清理過的原始新聞、10-K、10-Q 全文</a:t>
-                      </a:r>
+                        <a:rPr sz="780" b="0" dirty="0">
+                          <a:solidFill>
+                            <a:srgbClr val="000000"/>
+                          </a:solidFill>
+                          <a:latin typeface="Microsoft JhengHei"/>
+                        </a:rPr>
+                        <a:t>原始新聞、10-</a:t>
+                      </a:r>
+                      <a:r>
+                        <a:rPr lang="en-US" altLang="zh-TW" sz="780" b="0" dirty="0">
+                          <a:solidFill>
+                            <a:srgbClr val="000000"/>
+                          </a:solidFill>
+                          <a:latin typeface="Microsoft JhengHei"/>
+                        </a:rPr>
+                        <a:t>Q(</a:t>
+                      </a:r>
+                      <a:r>
+                        <a:rPr lang="zh-TW" altLang="zh-TW" sz="800" dirty="0"/>
+                        <a:t>季度</a:t>
+                      </a:r>
+                      <a:r>
+                        <a:rPr lang="en-US" altLang="zh-TW" sz="780" b="0" dirty="0">
+                          <a:solidFill>
+                            <a:srgbClr val="000000"/>
+                          </a:solidFill>
+                          <a:latin typeface="Microsoft JhengHei"/>
+                        </a:rPr>
+                        <a:t>)</a:t>
+                      </a:r>
+                      <a:r>
+                        <a:rPr sz="780" b="0" dirty="0">
+                          <a:solidFill>
+                            <a:srgbClr val="000000"/>
+                          </a:solidFill>
+                          <a:latin typeface="Microsoft JhengHei"/>
+                        </a:rPr>
+                        <a:t>、10-</a:t>
+                      </a:r>
+                      <a:r>
+                        <a:rPr lang="en-US" altLang="zh-TW" sz="780" b="0" dirty="0">
+                          <a:solidFill>
+                            <a:srgbClr val="000000"/>
+                          </a:solidFill>
+                          <a:latin typeface="Microsoft JhengHei"/>
+                        </a:rPr>
+                        <a:t>K(</a:t>
+                      </a:r>
+                      <a:r>
+                        <a:rPr lang="zh-TW" altLang="en-US" sz="780" b="0" dirty="0">
+                          <a:solidFill>
+                            <a:srgbClr val="000000"/>
+                          </a:solidFill>
+                          <a:latin typeface="Microsoft JhengHei"/>
+                        </a:rPr>
+                        <a:t>年度</a:t>
+                      </a:r>
+                      <a:r>
+                        <a:rPr lang="en-US" altLang="zh-TW" sz="780" b="0" dirty="0">
+                          <a:solidFill>
+                            <a:srgbClr val="000000"/>
+                          </a:solidFill>
+                          <a:latin typeface="Microsoft JhengHei"/>
+                        </a:rPr>
+                        <a:t>)</a:t>
+                      </a:r>
+                      <a:r>
+                        <a:rPr sz="780" b="0" dirty="0">
+                          <a:solidFill>
+                            <a:srgbClr val="000000"/>
+                          </a:solidFill>
+                          <a:latin typeface="Microsoft JhengHei"/>
+                        </a:rPr>
+                        <a:t> </a:t>
+                      </a:r>
+                      <a:r>
+                        <a:rPr lang="zh-TW" altLang="en-US" sz="780" b="0" dirty="0">
+                          <a:solidFill>
+                            <a:srgbClr val="000000"/>
+                          </a:solidFill>
+                          <a:latin typeface="Microsoft JhengHei"/>
+                        </a:rPr>
+                        <a:t>報告</a:t>
+                      </a:r>
+                      <a:endParaRPr sz="780" b="0" dirty="0">
+                        <a:solidFill>
+                          <a:srgbClr val="000000"/>
+                        </a:solidFill>
+                        <a:latin typeface="Microsoft JhengHei"/>
+                      </a:endParaRPr>
                     </a:p>
                   </a:txBody>
                   <a:tcPr marL="40000" marR="40000" marT="10000" marB="10000" anchor="ctr">
@@ -4723,19 +5339,25 @@
                 </a:tc>
                 <a:tc>
                   <a:txBody>
-                    <a:bodyPr wrap="square"/>
+                    <a:bodyPr/>
                     <a:lstStyle/>
                     <a:p>
                       <a:pPr algn="l"/>
                       <a:r>
-                        <a:rPr sz="780" b="0">
-                          <a:solidFill>
-                            <a:srgbClr val="000000"/>
-                          </a:solidFill>
-                          <a:latin typeface="Microsoft JhengHei"/>
-                        </a:rPr>
-                        <a:t>壓縮後的摘要文字(和情緒標註),供每日流程使用</a:t>
-                      </a:r>
+                        <a:rPr lang="zh-TW" altLang="en-US" sz="780" b="0" dirty="0">
+                          <a:solidFill>
+                            <a:srgbClr val="000000"/>
+                          </a:solidFill>
+                          <a:latin typeface="Microsoft JhengHei"/>
+                        </a:rPr>
+                        <a:t>壓縮後的摘要文字和標註情緒</a:t>
+                      </a:r>
+                      <a:endParaRPr sz="780" b="0" dirty="0">
+                        <a:solidFill>
+                          <a:srgbClr val="000000"/>
+                        </a:solidFill>
+                        <a:latin typeface="Microsoft JhengHei"/>
+                      </a:endParaRPr>
                     </a:p>
                   </a:txBody>
                   <a:tcPr marL="40000" marR="40000" marT="10000" marB="10000" anchor="ctr">
@@ -4746,19 +5368,43 @@
                 </a:tc>
                 <a:tc>
                   <a:txBody>
-                    <a:bodyPr wrap="square"/>
+                    <a:bodyPr/>
                     <a:lstStyle/>
                     <a:p>
                       <a:pPr algn="l"/>
                       <a:r>
-                        <a:rPr sz="780" b="0">
-                          <a:solidFill>
-                            <a:srgbClr val="000000"/>
-                          </a:solidFill>
-                          <a:latin typeface="Microsoft JhengHei"/>
-                        </a:rPr>
-                        <a:t>先把落落長的文件濃縮,減少之後存記憶與送 prompt 的負擔</a:t>
-                      </a:r>
+                        <a:rPr lang="zh-TW" altLang="en-US" sz="780" b="0" dirty="0">
+                          <a:solidFill>
+                            <a:srgbClr val="000000"/>
+                          </a:solidFill>
+                          <a:latin typeface="Microsoft JhengHei"/>
+                        </a:rPr>
+                        <a:t>先把冗長的文件濃縮</a:t>
+                      </a:r>
+                      <a:r>
+                        <a:rPr lang="en-US" altLang="zh-TW" sz="780" b="0" dirty="0">
+                          <a:solidFill>
+                            <a:srgbClr val="000000"/>
+                          </a:solidFill>
+                          <a:latin typeface="Microsoft JhengHei"/>
+                        </a:rPr>
+                        <a:t>,</a:t>
+                      </a:r>
+                      <a:r>
+                        <a:rPr lang="zh-TW" altLang="en-US" sz="780" b="0" dirty="0">
+                          <a:solidFill>
+                            <a:srgbClr val="000000"/>
+                          </a:solidFill>
+                          <a:latin typeface="Microsoft JhengHei"/>
+                        </a:rPr>
+                        <a:t>減少之後再存入記憶庫</a:t>
+                      </a:r>
+                      <a:endParaRPr sz="780" b="0" dirty="0">
+                        <a:solidFill>
+                          <a:srgbClr val="000000"/>
+                        </a:solidFill>
+                        <a:latin typeface="Microsoft JhengHei"/>
+                      </a:endParaRPr>
                     </a:p>
                   </a:txBody>
                   <a:tcPr marL="40000" marR="40000" marT="10000" marB="10000" anchor="ctr">
@@ -4767,11 +5413,16 @@
                     </a:solidFill>
                   </a:tcPr>
                 </a:tc>
+                <a:extLst>
+                  <a:ext uri="{0D108BD9-81ED-4DB2-BD59-A6C34878D82A}">
+                    <a16:rowId xmlns:a16="http://schemas.microsoft.com/office/drawing/2014/main" val="10001"/>
+                  </a:ext>
+                </a:extLst>
               </a:tr>
               <a:tr h="598932">
                 <a:tc>
                   <a:txBody>
-                    <a:bodyPr wrap="square"/>
+                    <a:bodyPr/>
                     <a:lstStyle/>
                     <a:p>
                       <a:pPr algn="ctr"/>
@@ -4806,19 +5457,115 @@
                 </a:tc>
                 <a:tc>
                   <a:txBody>
-                    <a:bodyPr wrap="square"/>
+                    <a:bodyPr/>
                     <a:lstStyle/>
                     <a:p>
                       <a:pPr algn="l"/>
                       <a:r>
-                        <a:rPr sz="780" b="0">
-                          <a:solidFill>
-                            <a:srgbClr val="000000"/>
-                          </a:solidFill>
-                          <a:latin typeface="Microsoft JhengHei"/>
-                        </a:rPr>
-                        <a:t>建立 Agent 時,由設定檔裡固定的一段文字模板決定,描述交易專長與風險傾向,模擬過程中不再改變</a:t>
-                      </a:r>
+                        <a:rPr lang="zh-TW" altLang="en-US" sz="780" b="0" dirty="0">
+                          <a:solidFill>
+                            <a:srgbClr val="000000"/>
+                          </a:solidFill>
+                          <a:latin typeface="Microsoft JhengHei"/>
+                        </a:rPr>
+                        <a:t>建立 </a:t>
+                      </a:r>
+                      <a:r>
+                        <a:rPr lang="en-US" altLang="zh-TW" sz="780" b="0" dirty="0">
+                          <a:solidFill>
+                            <a:srgbClr val="000000"/>
+                          </a:solidFill>
+                          <a:latin typeface="Microsoft JhengHei"/>
+                        </a:rPr>
+                        <a:t>Agent </a:t>
+                      </a:r>
+                      <a:r>
+                        <a:rPr lang="zh-TW" altLang="en-US" sz="780" b="0" dirty="0">
+                          <a:solidFill>
+                            <a:srgbClr val="000000"/>
+                          </a:solidFill>
+                          <a:latin typeface="Microsoft JhengHei"/>
+                        </a:rPr>
+                        <a:t>時</a:t>
+                      </a:r>
+                      <a:r>
+                        <a:rPr lang="en-US" altLang="zh-TW" sz="780" b="0" dirty="0">
+                          <a:solidFill>
+                            <a:srgbClr val="000000"/>
+                          </a:solidFill>
+                          <a:latin typeface="Microsoft JhengHei"/>
+                        </a:rPr>
+                        <a:t>,</a:t>
+                      </a:r>
+                      <a:r>
+                        <a:rPr lang="zh-TW" altLang="en-US" sz="780" b="0" dirty="0">
+                          <a:solidFill>
+                            <a:srgbClr val="000000"/>
+                          </a:solidFill>
+                          <a:latin typeface="Microsoft JhengHei"/>
+                        </a:rPr>
+                        <a:t>由設定檔裡的一段文字決定 </a:t>
+                      </a:r>
+                      <a:r>
+                        <a:rPr lang="en-US" altLang="zh-TW" sz="780" b="0" dirty="0">
+                          <a:solidFill>
+                            <a:srgbClr val="000000"/>
+                          </a:solidFill>
+                          <a:latin typeface="Microsoft JhengHei"/>
+                        </a:rPr>
+                        <a:t>Agent </a:t>
+                      </a:r>
+                      <a:r>
+                        <a:rPr lang="zh-TW" altLang="en-US" sz="780" b="0" dirty="0">
+                          <a:solidFill>
+                            <a:srgbClr val="000000"/>
+                          </a:solidFill>
+                          <a:latin typeface="Microsoft JhengHei"/>
+                        </a:rPr>
+                        <a:t>的人設</a:t>
+                      </a:r>
+                      <a:r>
+                        <a:rPr lang="en-US" altLang="zh-TW" sz="780" b="0" dirty="0">
+                          <a:solidFill>
+                            <a:srgbClr val="000000"/>
+                          </a:solidFill>
+                          <a:latin typeface="Microsoft JhengHei"/>
+                        </a:rPr>
+                        <a:t>,</a:t>
+                      </a:r>
+                      <a:r>
+                        <a:rPr lang="zh-TW" altLang="en-US" sz="780" b="0" dirty="0">
+                          <a:solidFill>
+                            <a:srgbClr val="000000"/>
+                          </a:solidFill>
+                          <a:latin typeface="Microsoft JhengHei"/>
+                        </a:rPr>
+                        <a:t>如交易專長與風險傾向</a:t>
+                      </a:r>
+                      <a:r>
+                        <a:rPr lang="en-US" altLang="zh-TW" sz="780" b="0" dirty="0">
+                          <a:solidFill>
+                            <a:srgbClr val="000000"/>
+                          </a:solidFill>
+                          <a:latin typeface="Microsoft JhengHei"/>
+                        </a:rPr>
+                        <a:t>,</a:t>
+                      </a:r>
+                      <a:r>
+                        <a:rPr lang="zh-TW" altLang="en-US" sz="780" b="0" dirty="0">
+                          <a:solidFill>
+                            <a:srgbClr val="000000"/>
+                          </a:solidFill>
+                          <a:latin typeface="Microsoft JhengHei"/>
+                        </a:rPr>
+                        <a:t>模擬過程中不再改變</a:t>
+                      </a:r>
+                      <a:endParaRPr sz="780" b="0" dirty="0">
+                        <a:solidFill>
+                          <a:srgbClr val="000000"/>
+                        </a:solidFill>
+                        <a:latin typeface="Microsoft JhengHei"/>
+                      </a:endParaRPr>
                     </a:p>
                   </a:txBody>
                   <a:tcPr marL="40000" marR="40000" marT="10000" marB="10000" anchor="ctr">
@@ -4829,18 +5576,18 @@
                 </a:tc>
                 <a:tc>
                   <a:txBody>
-                    <a:bodyPr wrap="square"/>
+                    <a:bodyPr/>
                     <a:lstStyle/>
                     <a:p>
                       <a:pPr algn="l"/>
                       <a:r>
-                        <a:rPr sz="780" b="0">
-                          <a:solidFill>
-                            <a:srgbClr val="000000"/>
-                          </a:solidFill>
-                          <a:latin typeface="Microsoft JhengHei"/>
-                        </a:rPr>
-                        <a:t>設定檔裡寫好的產業背景與人設文字</a:t>
+                        <a:rPr lang="zh-TW" altLang="en-US" sz="780" b="0" dirty="0">
+                          <a:solidFill>
+                            <a:srgbClr val="000000"/>
+                          </a:solidFill>
+                          <a:latin typeface="Microsoft JhengHei"/>
+                        </a:rPr>
+                        <a:t>設定檔裡寫好的產業背景與人設字串</a:t>
                       </a:r>
                     </a:p>
                   </a:txBody>
@@ -4852,19 +5599,61 @@
                 </a:tc>
                 <a:tc>
                   <a:txBody>
-                    <a:bodyPr wrap="square"/>
+                    <a:bodyPr/>
                     <a:lstStyle/>
                     <a:p>
                       <a:pPr algn="l"/>
                       <a:r>
-                        <a:rPr sz="780" b="0">
-                          <a:solidFill>
-                            <a:srgbClr val="000000"/>
-                          </a:solidFill>
-                          <a:latin typeface="Microsoft JhengHei"/>
-                        </a:rPr>
-                        <a:t>貫穿模擬過程使用的角色人設字串,做為 Retrieve 檢索記憶的查詢依據</a:t>
-                      </a:r>
+                        <a:rPr lang="zh-TW" altLang="en-US" sz="780" b="0" dirty="0">
+                          <a:solidFill>
+                            <a:srgbClr val="000000"/>
+                          </a:solidFill>
+                          <a:latin typeface="Microsoft JhengHei"/>
+                        </a:rPr>
+                        <a:t>模擬過程使用的角色人設字串</a:t>
+                      </a:r>
+                      <a:r>
+                        <a:rPr lang="en-US" altLang="zh-TW" sz="780" b="0" dirty="0">
+                          <a:solidFill>
+                            <a:srgbClr val="000000"/>
+                          </a:solidFill>
+                          <a:latin typeface="Microsoft JhengHei"/>
+                        </a:rPr>
+                        <a:t>,</a:t>
+                      </a:r>
+                      <a:r>
+                        <a:rPr lang="zh-TW" altLang="en-US" sz="780" b="0" dirty="0">
+                          <a:solidFill>
+                            <a:srgbClr val="000000"/>
+                          </a:solidFill>
+                          <a:latin typeface="Microsoft JhengHei"/>
+                        </a:rPr>
+                        <a:t>且會做為 </a:t>
+                      </a:r>
+                      <a:r>
+                        <a:rPr lang="en-US" altLang="zh-TW" sz="780" b="0" dirty="0">
+                          <a:solidFill>
+                            <a:srgbClr val="000000"/>
+                          </a:solidFill>
+                          <a:latin typeface="Microsoft JhengHei"/>
+                        </a:rPr>
+                        <a:t>Retrieve </a:t>
+                      </a:r>
+                      <a:r>
+                        <a:rPr lang="zh-TW" altLang="en-US" sz="780" b="0" dirty="0">
+                          <a:solidFill>
+                            <a:srgbClr val="000000"/>
+                          </a:solidFill>
+                          <a:latin typeface="Microsoft JhengHei"/>
+                        </a:rPr>
+                        <a:t>檢索記憶的查詢依據</a:t>
+                      </a:r>
+                      <a:endParaRPr sz="780" b="0" dirty="0">
+                        <a:solidFill>
+                          <a:srgbClr val="000000"/>
+                        </a:solidFill>
+                        <a:latin typeface="Microsoft JhengHei"/>
+                      </a:endParaRPr>
                     </a:p>
                   </a:txBody>
                   <a:tcPr marL="40000" marR="40000" marT="10000" marB="10000" anchor="ctr">
@@ -4875,19 +5664,25 @@
                 </a:tc>
                 <a:tc>
                   <a:txBody>
-                    <a:bodyPr wrap="square"/>
+                    <a:bodyPr/>
                     <a:lstStyle/>
                     <a:p>
                       <a:pPr algn="l"/>
                       <a:r>
-                        <a:rPr sz="780" b="0">
-                          <a:solidFill>
-                            <a:srgbClr val="000000"/>
-                          </a:solidFill>
-                          <a:latin typeface="Microsoft JhengHei"/>
-                        </a:rPr>
-                        <a:t>決定檢索時撈出哪些記憶,間接影響反思與決策,不隨每日資料變動</a:t>
-                      </a:r>
+                        <a:rPr sz="780" b="0" dirty="0" err="1">
+                          <a:solidFill>
+                            <a:srgbClr val="000000"/>
+                          </a:solidFill>
+                          <a:latin typeface="Microsoft JhengHei"/>
+                        </a:rPr>
+                        <a:t>決定檢索時撈出哪些記憶,間接影響反思與決策</a:t>
+                      </a:r>
+                      <a:endParaRPr sz="780" b="0" dirty="0">
+                        <a:solidFill>
+                          <a:srgbClr val="000000"/>
+                        </a:solidFill>
+                        <a:latin typeface="Microsoft JhengHei"/>
+                      </a:endParaRPr>
                     </a:p>
                   </a:txBody>
                   <a:tcPr marL="40000" marR="40000" marT="10000" marB="10000" anchor="ctr">
@@ -4896,16 +5691,21 @@
                     </a:solidFill>
                   </a:tcPr>
                 </a:tc>
+                <a:extLst>
+                  <a:ext uri="{0D108BD9-81ED-4DB2-BD59-A6C34878D82A}">
+                    <a16:rowId xmlns:a16="http://schemas.microsoft.com/office/drawing/2014/main" val="10002"/>
+                  </a:ext>
+                </a:extLst>
               </a:tr>
               <a:tr h="598932">
                 <a:tc>
                   <a:txBody>
-                    <a:bodyPr wrap="square"/>
+                    <a:bodyPr/>
                     <a:lstStyle/>
                     <a:p>
                       <a:pPr algn="ctr"/>
                       <a:r>
-                        <a:rPr sz="860" b="1">
+                        <a:rPr sz="860" b="1" dirty="0">
                           <a:solidFill>
                             <a:srgbClr val="000000"/>
                           </a:solidFill>
@@ -4917,7 +5717,7 @@
                     <a:p>
                       <a:pPr algn="ctr"/>
                       <a:r>
-                        <a:rPr sz="860" b="1">
+                        <a:rPr sz="860" b="1" dirty="0" err="1">
                           <a:solidFill>
                             <a:srgbClr val="000000"/>
                           </a:solidFill>
@@ -4925,6 +5725,12 @@
                         </a:rPr>
                         <a:t>分類</a:t>
                       </a:r>
+                      <a:endParaRPr sz="860" b="1" dirty="0">
+                        <a:solidFill>
+                          <a:srgbClr val="000000"/>
+                        </a:solidFill>
+                        <a:latin typeface="Microsoft JhengHei"/>
+                      </a:endParaRPr>
                     </a:p>
                   </a:txBody>
                   <a:tcPr marL="40000" marR="40000" marT="10000" marB="10000" anchor="ctr">
@@ -4935,19 +5741,88 @@
                 </a:tc>
                 <a:tc>
                   <a:txBody>
-                    <a:bodyPr wrap="square"/>
+                    <a:bodyPr/>
                     <a:lstStyle/>
                     <a:p>
                       <a:pPr algn="l"/>
                       <a:r>
-                        <a:rPr sz="780" b="0">
-                          <a:solidFill>
-                            <a:srgbClr val="000000"/>
-                          </a:solidFill>
-                          <a:latin typeface="Microsoft JhengHei"/>
-                        </a:rPr>
-                        <a:t>沒有獨立程式檔,寫在 agent.py 的 step() 開頭,依資料型態呼叫三個處理函式(檔案/新聞/股價各一個)</a:t>
-                      </a:r>
+                        <a:rPr lang="zh-TW" altLang="en-US" sz="780" b="0" dirty="0">
+                          <a:solidFill>
+                            <a:srgbClr val="000000"/>
+                          </a:solidFill>
+                          <a:latin typeface="Microsoft JhengHei"/>
+                        </a:rPr>
+                        <a:t>依資料型態呼叫三個處理函式</a:t>
+                      </a:r>
+                      <a:r>
+                        <a:rPr lang="en-US" altLang="zh-TW" sz="780" b="0" dirty="0">
+                          <a:solidFill>
+                            <a:srgbClr val="000000"/>
+                          </a:solidFill>
+                          <a:latin typeface="Microsoft JhengHei"/>
+                        </a:rPr>
+                        <a:t>(</a:t>
+                      </a:r>
+                      <a:r>
+                        <a:rPr lang="zh-TW" altLang="en-US" sz="780" b="0" dirty="0">
+                          <a:solidFill>
+                            <a:srgbClr val="000000"/>
+                          </a:solidFill>
+                          <a:latin typeface="Microsoft JhengHei"/>
+                        </a:rPr>
+                        <a:t>新聞</a:t>
+                      </a:r>
+                      <a:r>
+                        <a:rPr lang="en-US" altLang="zh-TW" sz="780" b="0" dirty="0">
+                          <a:solidFill>
+                            <a:srgbClr val="000000"/>
+                          </a:solidFill>
+                          <a:latin typeface="Microsoft JhengHei"/>
+                        </a:rPr>
+                        <a:t>/</a:t>
+                      </a:r>
+                      <a:r>
+                        <a:rPr lang="zh-TW" altLang="en-US" sz="780" b="0" dirty="0">
+                          <a:solidFill>
+                            <a:srgbClr val="000000"/>
+                          </a:solidFill>
+                          <a:latin typeface="Microsoft JhengHei"/>
+                        </a:rPr>
+                        <a:t>財報</a:t>
+                      </a:r>
+                      <a:r>
+                        <a:rPr lang="en-US" altLang="zh-TW" sz="780" b="0" dirty="0">
+                          <a:solidFill>
+                            <a:srgbClr val="000000"/>
+                          </a:solidFill>
+                          <a:latin typeface="Microsoft JhengHei"/>
+                        </a:rPr>
+                        <a:t>/</a:t>
+                      </a:r>
+                      <a:r>
+                        <a:rPr lang="zh-TW" altLang="en-US" sz="780" b="0" dirty="0">
+                          <a:solidFill>
+                            <a:srgbClr val="000000"/>
+                          </a:solidFill>
+                          <a:latin typeface="Microsoft JhengHei"/>
+                        </a:rPr>
+                        <a:t>股價</a:t>
+                      </a:r>
+                      <a:r>
+                        <a:rPr lang="en-US" altLang="zh-TW" sz="780" b="0" dirty="0">
+                          <a:solidFill>
+                            <a:srgbClr val="000000"/>
+                          </a:solidFill>
+                          <a:latin typeface="Microsoft JhengHei"/>
+                        </a:rPr>
+                        <a:t>)</a:t>
+                      </a:r>
+                      <a:endParaRPr sz="780" b="0" dirty="0">
+                        <a:solidFill>
+                          <a:srgbClr val="000000"/>
+                        </a:solidFill>
+                        <a:latin typeface="Microsoft JhengHei"/>
+                      </a:endParaRPr>
                     </a:p>
                   </a:txBody>
                   <a:tcPr marL="40000" marR="40000" marT="10000" marB="10000" anchor="ctr">
@@ -4958,19 +5833,34 @@
                 </a:tc>
                 <a:tc>
                   <a:txBody>
-                    <a:bodyPr wrap="square"/>
+                    <a:bodyPr/>
                     <a:lstStyle/>
                     <a:p>
                       <a:pPr algn="l"/>
                       <a:r>
-                        <a:rPr sz="780" b="0">
-                          <a:solidFill>
-                            <a:srgbClr val="000000"/>
-                          </a:solidFill>
-                          <a:latin typeface="Microsoft JhengHei"/>
-                        </a:rPr>
-                        <a:t>當天打包好的市場資料(股價＋10-K＋10-Q＋新聞)</a:t>
-                      </a:r>
+                        <a:rPr lang="en-US" altLang="zh-TW" sz="780" b="0" dirty="0">
+                          <a:solidFill>
+                            <a:srgbClr val="000000"/>
+                          </a:solidFill>
+                          <a:latin typeface="Microsoft JhengHei"/>
+                        </a:rPr>
+                        <a:t>Summarize</a:t>
+                      </a:r>
+                      <a:r>
+                        <a:rPr lang="zh-TW" altLang="en-US" sz="780" b="0" dirty="0">
+                          <a:solidFill>
+                            <a:srgbClr val="000000"/>
+                          </a:solidFill>
+                          <a:latin typeface="Microsoft JhengHei"/>
+                        </a:rPr>
+                        <a:t>壓縮後的摘要文字與即時股價</a:t>
+                      </a:r>
+                      <a:endParaRPr sz="780" b="0" dirty="0">
+                        <a:solidFill>
+                          <a:srgbClr val="000000"/>
+                        </a:solidFill>
+                        <a:latin typeface="Microsoft JhengHei"/>
+                      </a:endParaRPr>
                     </a:p>
                   </a:txBody>
                   <a:tcPr marL="40000" marR="40000" marT="10000" marB="10000" anchor="ctr">
@@ -4981,19 +5871,79 @@
                 </a:tc>
                 <a:tc>
                   <a:txBody>
-                    <a:bodyPr wrap="square"/>
+                    <a:bodyPr/>
                     <a:lstStyle/>
                     <a:p>
                       <a:pPr algn="l"/>
                       <a:r>
-                        <a:rPr sz="780" b="0">
-                          <a:solidFill>
-                            <a:srgbClr val="000000"/>
-                          </a:solidFill>
-                          <a:latin typeface="Microsoft JhengHei"/>
-                        </a:rPr>
-                        <a:t>依型態分流:文字送記憶路徑,股價送 Observe 路徑</a:t>
-                      </a:r>
+                        <a:rPr lang="zh-TW" altLang="en-US" sz="780" b="0" dirty="0">
+                          <a:solidFill>
+                            <a:srgbClr val="000000"/>
+                          </a:solidFill>
+                          <a:latin typeface="Microsoft JhengHei"/>
+                        </a:rPr>
+                        <a:t>依型態分流</a:t>
+                      </a:r>
+                      <a:r>
+                        <a:rPr lang="en-US" altLang="zh-TW" sz="780" b="0" dirty="0">
+                          <a:solidFill>
+                            <a:srgbClr val="000000"/>
+                          </a:solidFill>
+                          <a:latin typeface="Microsoft JhengHei"/>
+                        </a:rPr>
+                        <a:t>:</a:t>
+                      </a:r>
+                      <a:r>
+                        <a:rPr lang="zh-TW" altLang="en-US" sz="780" b="0" dirty="0">
+                          <a:solidFill>
+                            <a:srgbClr val="000000"/>
+                          </a:solidFill>
+                          <a:latin typeface="Microsoft JhengHei"/>
+                        </a:rPr>
+                        <a:t>文字類送記憶層路徑</a:t>
+                      </a:r>
+                      <a:r>
+                        <a:rPr lang="en-US" altLang="zh-TW" sz="780" b="0" dirty="0">
+                          <a:solidFill>
+                            <a:srgbClr val="000000"/>
+                          </a:solidFill>
+                          <a:latin typeface="Microsoft JhengHei"/>
+                        </a:rPr>
+                        <a:t>,</a:t>
+                      </a:r>
+                      <a:r>
+                        <a:rPr lang="zh-TW" altLang="en-US" sz="780" b="0" dirty="0">
+                          <a:solidFill>
+                            <a:srgbClr val="000000"/>
+                          </a:solidFill>
+                          <a:latin typeface="Microsoft JhengHei"/>
+                        </a:rPr>
+                        <a:t>股價送 </a:t>
+                      </a:r>
+                      <a:r>
+                        <a:rPr lang="en-US" altLang="zh-TW" sz="780" b="0" dirty="0">
+                          <a:solidFill>
+                            <a:srgbClr val="000000"/>
+                          </a:solidFill>
+                          <a:latin typeface="Microsoft JhengHei"/>
+                        </a:rPr>
+                        <a:t>Observe </a:t>
+                      </a:r>
+                      <a:r>
+                        <a:rPr lang="zh-TW" altLang="en-US" sz="780" b="0" dirty="0">
+                          <a:solidFill>
+                            <a:srgbClr val="000000"/>
+                          </a:solidFill>
+                          <a:latin typeface="Microsoft JhengHei"/>
+                        </a:rPr>
+                        <a:t>路徑</a:t>
+                      </a:r>
+                      <a:endParaRPr sz="780" b="0" dirty="0">
+                        <a:solidFill>
+                          <a:srgbClr val="000000"/>
+                        </a:solidFill>
+                        <a:latin typeface="Microsoft JhengHei"/>
+                      </a:endParaRPr>
                     </a:p>
                   </a:txBody>
                   <a:tcPr marL="40000" marR="40000" marT="10000" marB="10000" anchor="ctr">
@@ -5004,19 +5954,79 @@
                 </a:tc>
                 <a:tc>
                   <a:txBody>
-                    <a:bodyPr wrap="square"/>
+                    <a:bodyPr/>
                     <a:lstStyle/>
                     <a:p>
                       <a:pPr algn="l"/>
                       <a:r>
-                        <a:rPr sz="780" b="0">
-                          <a:solidFill>
-                            <a:srgbClr val="000000"/>
-                          </a:solidFill>
-                          <a:latin typeface="Microsoft JhengHei"/>
-                        </a:rPr>
-                        <a:t>判斷資料型態,決定接下來走哪條路線</a:t>
-                      </a:r>
+                        <a:rPr lang="zh-TW" altLang="en-US" sz="780" b="0" dirty="0">
+                          <a:solidFill>
+                            <a:srgbClr val="000000"/>
+                          </a:solidFill>
+                          <a:latin typeface="Microsoft JhengHei"/>
+                        </a:rPr>
+                        <a:t>判斷資料是哪種型態</a:t>
+                      </a:r>
+                      <a:r>
+                        <a:rPr lang="en-US" altLang="zh-TW" sz="780" b="0" dirty="0">
+                          <a:solidFill>
+                            <a:srgbClr val="000000"/>
+                          </a:solidFill>
+                          <a:latin typeface="Microsoft JhengHei"/>
+                        </a:rPr>
+                        <a:t>(</a:t>
+                      </a:r>
+                      <a:r>
+                        <a:rPr lang="zh-TW" altLang="en-US" sz="780" b="0" dirty="0">
+                          <a:solidFill>
+                            <a:srgbClr val="000000"/>
+                          </a:solidFill>
+                          <a:latin typeface="Microsoft JhengHei"/>
+                        </a:rPr>
+                        <a:t>文字</a:t>
+                      </a:r>
+                      <a:r>
+                        <a:rPr lang="en-US" altLang="zh-TW" sz="780" b="0" dirty="0">
+                          <a:solidFill>
+                            <a:srgbClr val="000000"/>
+                          </a:solidFill>
+                          <a:latin typeface="Microsoft JhengHei"/>
+                        </a:rPr>
+                        <a:t>/</a:t>
+                      </a:r>
+                      <a:r>
+                        <a:rPr lang="zh-TW" altLang="en-US" sz="780" b="0" dirty="0">
+                          <a:solidFill>
+                            <a:srgbClr val="000000"/>
+                          </a:solidFill>
+                          <a:latin typeface="Microsoft JhengHei"/>
+                        </a:rPr>
+                        <a:t>股價</a:t>
+                      </a:r>
+                      <a:r>
+                        <a:rPr lang="en-US" altLang="zh-TW" sz="780" b="0" dirty="0">
+                          <a:solidFill>
+                            <a:srgbClr val="000000"/>
+                          </a:solidFill>
+                          <a:latin typeface="Microsoft JhengHei"/>
+                        </a:rPr>
+                        <a:t>),</a:t>
+                      </a:r>
+                      <a:r>
+                        <a:rPr lang="zh-TW" altLang="en-US" sz="780" b="0" dirty="0">
+                          <a:solidFill>
+                            <a:srgbClr val="000000"/>
+                          </a:solidFill>
+                          <a:latin typeface="Microsoft JhengHei"/>
+                        </a:rPr>
+                        <a:t>決定接下來走哪條路線</a:t>
+                      </a:r>
+                      <a:endParaRPr sz="780" b="0" dirty="0">
+                        <a:solidFill>
+                          <a:srgbClr val="000000"/>
+                        </a:solidFill>
+                        <a:latin typeface="Microsoft JhengHei"/>
+                      </a:endParaRPr>
                     </a:p>
                   </a:txBody>
                   <a:tcPr marL="40000" marR="40000" marT="10000" marB="10000" anchor="ctr">
@@ -5025,16 +6035,21 @@
                     </a:solidFill>
                   </a:tcPr>
                 </a:tc>
+                <a:extLst>
+                  <a:ext uri="{0D108BD9-81ED-4DB2-BD59-A6C34878D82A}">
+                    <a16:rowId xmlns:a16="http://schemas.microsoft.com/office/drawing/2014/main" val="10003"/>
+                  </a:ext>
+                </a:extLst>
               </a:tr>
               <a:tr h="598932">
                 <a:tc>
                   <a:txBody>
-                    <a:bodyPr wrap="square"/>
+                    <a:bodyPr/>
                     <a:lstStyle/>
                     <a:p>
                       <a:pPr algn="ctr"/>
                       <a:r>
-                        <a:rPr sz="860" b="1">
+                        <a:rPr sz="860" b="1" dirty="0">
                           <a:solidFill>
                             <a:srgbClr val="000000"/>
                           </a:solidFill>
@@ -5046,7 +6061,7 @@
                     <a:p>
                       <a:pPr algn="ctr"/>
                       <a:r>
-                        <a:rPr sz="860" b="1">
+                        <a:rPr sz="860" b="1" dirty="0" err="1">
                           <a:solidFill>
                             <a:srgbClr val="000000"/>
                           </a:solidFill>
@@ -5054,6 +6069,12 @@
                         </a:rPr>
                         <a:t>觀察</a:t>
                       </a:r>
+                      <a:endParaRPr sz="860" b="1" dirty="0">
+                        <a:solidFill>
+                          <a:srgbClr val="000000"/>
+                        </a:solidFill>
+                        <a:latin typeface="Microsoft JhengHei"/>
+                      </a:endParaRPr>
                     </a:p>
                   </a:txBody>
                   <a:tcPr marL="40000" marR="40000" marT="10000" marB="10000" anchor="ctr">
@@ -5064,18 +6085,108 @@
                 </a:tc>
                 <a:tc>
                   <a:txBody>
-                    <a:bodyPr wrap="square"/>
+                    <a:bodyPr/>
                     <a:lstStyle/>
                     <a:p>
                       <a:pPr algn="l"/>
                       <a:r>
-                        <a:rPr sz="780" b="0">
-                          <a:solidFill>
-                            <a:srgbClr val="000000"/>
-                          </a:solidFill>
-                          <a:latin typeface="Microsoft JhengHei"/>
-                        </a:rPr>
-                        <a:t>規則式計算(非 LLM):portfolio.get_moment() 把最近 3 天每天的收盤價差加總,大於零記為漲、小於零記為跌</a:t>
+                        <a:rPr lang="zh-TW" altLang="en-US" sz="780" b="0" dirty="0">
+                          <a:solidFill>
+                            <a:srgbClr val="000000"/>
+                          </a:solidFill>
+                          <a:latin typeface="Microsoft JhengHei"/>
+                        </a:rPr>
+                        <a:t>純計算</a:t>
+                      </a:r>
+                      <a:r>
+                        <a:rPr lang="en-US" altLang="zh-TW" sz="780" b="0" dirty="0">
+                          <a:solidFill>
+                            <a:srgbClr val="000000"/>
+                          </a:solidFill>
+                          <a:latin typeface="Microsoft JhengHei"/>
+                        </a:rPr>
+                        <a:t>:</a:t>
+                      </a:r>
+                      <a:r>
+                        <a:rPr lang="zh-TW" altLang="en-US" sz="780" b="0" dirty="0">
+                          <a:solidFill>
+                            <a:srgbClr val="000000"/>
+                          </a:solidFill>
+                          <a:latin typeface="Microsoft JhengHei"/>
+                        </a:rPr>
+                        <a:t>把最近 </a:t>
+                      </a:r>
+                      <a:r>
+                        <a:rPr lang="en-US" altLang="zh-TW" sz="780" b="0" dirty="0">
+                          <a:solidFill>
+                            <a:srgbClr val="000000"/>
+                          </a:solidFill>
+                          <a:latin typeface="Microsoft JhengHei"/>
+                        </a:rPr>
+                        <a:t>3 </a:t>
+                      </a:r>
+                      <a:r>
+                        <a:rPr lang="zh-TW" altLang="en-US" sz="780" b="0" dirty="0">
+                          <a:solidFill>
+                            <a:srgbClr val="000000"/>
+                          </a:solidFill>
+                          <a:latin typeface="Microsoft JhengHei"/>
+                        </a:rPr>
+                        <a:t>天每天的收盤價差加總</a:t>
+                      </a:r>
+                      <a:r>
+                        <a:rPr lang="en-US" altLang="zh-TW" sz="780" b="0" dirty="0">
+                          <a:solidFill>
+                            <a:srgbClr val="000000"/>
+                          </a:solidFill>
+                          <a:latin typeface="Microsoft JhengHei"/>
+                        </a:rPr>
+                        <a:t>,</a:t>
+                      </a:r>
+                      <a:r>
+                        <a:rPr lang="zh-TW" altLang="en-US" sz="780" b="0" dirty="0">
+                          <a:solidFill>
+                            <a:srgbClr val="000000"/>
+                          </a:solidFill>
+                          <a:latin typeface="Microsoft JhengHei"/>
+                        </a:rPr>
+                        <a:t>大於</a:t>
+                      </a:r>
+                      <a:r>
+                        <a:rPr lang="en-US" altLang="zh-TW" sz="780" b="0" dirty="0">
+                          <a:solidFill>
+                            <a:srgbClr val="000000"/>
+                          </a:solidFill>
+                          <a:latin typeface="Microsoft JhengHei"/>
+                        </a:rPr>
+                        <a:t>0</a:t>
+                      </a:r>
+                      <a:r>
+                        <a:rPr lang="zh-TW" altLang="en-US" sz="780" b="0" dirty="0">
+                          <a:solidFill>
+                            <a:srgbClr val="000000"/>
+                          </a:solidFill>
+                          <a:latin typeface="Microsoft JhengHei"/>
+                        </a:rPr>
+                        <a:t>記為漲、小於</a:t>
+                      </a:r>
+                      <a:r>
+                        <a:rPr lang="en-US" altLang="zh-TW" sz="780" b="0" dirty="0">
+                          <a:solidFill>
+                            <a:srgbClr val="000000"/>
+                          </a:solidFill>
+                          <a:latin typeface="Microsoft JhengHei"/>
+                        </a:rPr>
+                        <a:t>0</a:t>
+                      </a:r>
+                      <a:r>
+                        <a:rPr lang="zh-TW" altLang="en-US" sz="780" b="0" dirty="0">
+                          <a:solidFill>
+                            <a:srgbClr val="000000"/>
+                          </a:solidFill>
+                          <a:latin typeface="Microsoft JhengHei"/>
+                        </a:rPr>
+                        <a:t>記為跌</a:t>
                       </a:r>
                     </a:p>
                   </a:txBody>
@@ -5087,18 +6198,18 @@
                 </a:tc>
                 <a:tc>
                   <a:txBody>
-                    <a:bodyPr wrap="square"/>
+                    <a:bodyPr/>
                     <a:lstStyle/>
                     <a:p>
                       <a:pPr algn="l"/>
                       <a:r>
-                        <a:rPr sz="780" b="0">
-                          <a:solidFill>
-                            <a:srgbClr val="000000"/>
-                          </a:solidFill>
-                          <a:latin typeface="Microsoft JhengHei"/>
-                        </a:rPr>
-                        <a:t>每日收盤價序列</a:t>
+                        <a:rPr lang="zh-TW" altLang="en-US" sz="780" b="0" dirty="0">
+                          <a:solidFill>
+                            <a:srgbClr val="000000"/>
+                          </a:solidFill>
+                          <a:latin typeface="Microsoft JhengHei"/>
+                        </a:rPr>
+                        <a:t>每日收盤價資料</a:t>
                       </a:r>
                     </a:p>
                   </a:txBody>
@@ -5110,18 +6221,81 @@
                 </a:tc>
                 <a:tc>
                   <a:txBody>
-                    <a:bodyPr wrap="square"/>
+                    <a:bodyPr/>
                     <a:lstStyle/>
                     <a:p>
                       <a:pPr algn="l"/>
                       <a:r>
-                        <a:rPr sz="780" b="0">
-                          <a:solidFill>
-                            <a:srgbClr val="000000"/>
-                          </a:solidFill>
-                          <a:latin typeface="Microsoft JhengHei"/>
-                        </a:rPr>
-                        <a:t>動能趨勢描述文字(漲/跌/持平三選一)</a:t>
+                        <a:rPr lang="zh-TW" altLang="en-US" sz="780" b="0" dirty="0">
+                          <a:solidFill>
+                            <a:srgbClr val="000000"/>
+                          </a:solidFill>
+                          <a:latin typeface="Microsoft JhengHei"/>
+                        </a:rPr>
+                        <a:t>動能趨勢的描述文字</a:t>
+                      </a:r>
+                      <a:r>
+                        <a:rPr lang="en-US" altLang="zh-TW" sz="780" b="0" dirty="0">
+                          <a:solidFill>
+                            <a:srgbClr val="000000"/>
+                          </a:solidFill>
+                          <a:latin typeface="Microsoft JhengHei"/>
+                        </a:rPr>
+                        <a:t>(</a:t>
+                      </a:r>
+                      <a:r>
+                        <a:rPr lang="zh-TW" altLang="en-US" sz="780" b="0" dirty="0">
+                          <a:solidFill>
+                            <a:srgbClr val="000000"/>
+                          </a:solidFill>
+                          <a:latin typeface="Microsoft JhengHei"/>
+                        </a:rPr>
+                        <a:t>漲</a:t>
+                      </a:r>
+                      <a:r>
+                        <a:rPr lang="en-US" altLang="zh-TW" sz="780" b="0" dirty="0">
+                          <a:solidFill>
+                            <a:srgbClr val="000000"/>
+                          </a:solidFill>
+                          <a:latin typeface="Microsoft JhengHei"/>
+                        </a:rPr>
+                        <a:t>/</a:t>
+                      </a:r>
+                      <a:r>
+                        <a:rPr lang="zh-TW" altLang="en-US" sz="780" b="0" dirty="0">
+                          <a:solidFill>
+                            <a:srgbClr val="000000"/>
+                          </a:solidFill>
+                          <a:latin typeface="Microsoft JhengHei"/>
+                        </a:rPr>
+                        <a:t>跌</a:t>
+                      </a:r>
+                      <a:r>
+                        <a:rPr lang="en-US" altLang="zh-TW" sz="780" b="0" dirty="0">
+                          <a:solidFill>
+                            <a:srgbClr val="000000"/>
+                          </a:solidFill>
+                          <a:latin typeface="Microsoft JhengHei"/>
+                        </a:rPr>
+                        <a:t>/</a:t>
+                      </a:r>
+                      <a:r>
+                        <a:rPr lang="zh-TW" altLang="en-US" sz="780" b="0" dirty="0">
+                          <a:solidFill>
+                            <a:srgbClr val="000000"/>
+                          </a:solidFill>
+                          <a:latin typeface="Microsoft JhengHei"/>
+                        </a:rPr>
+                        <a:t>持平三選一</a:t>
+                      </a:r>
+                      <a:r>
+                        <a:rPr lang="en-US" altLang="zh-TW" sz="780" b="0" dirty="0">
+                          <a:solidFill>
+                            <a:srgbClr val="000000"/>
+                          </a:solidFill>
+                          <a:latin typeface="Microsoft JhengHei"/>
+                        </a:rPr>
+                        <a:t>)</a:t>
                       </a:r>
                     </a:p>
                   </a:txBody>
@@ -5133,18 +6307,88 @@
                 </a:tc>
                 <a:tc>
                   <a:txBody>
-                    <a:bodyPr wrap="square"/>
+                    <a:bodyPr/>
                     <a:lstStyle/>
                     <a:p>
-                      <a:pPr algn="l"/>
-                      <a:r>
-                        <a:rPr sz="780" b="0">
-                          <a:solidFill>
-                            <a:srgbClr val="000000"/>
-                          </a:solidFill>
-                          <a:latin typeface="Microsoft JhengHei"/>
-                        </a:rPr>
-                        <a:t>捕捉價格慣性訊號,不經記憶層,直接供 Reflect 使用</a:t>
+                      <a:pPr marL="0" marR="0" lvl="0" indent="0" algn="l" defTabSz="457200" rtl="0" eaLnBrk="1" fontAlgn="auto" latinLnBrk="0" hangingPunct="1">
+                        <a:lnSpc>
+                          <a:spcPct val="100000"/>
+                        </a:lnSpc>
+                        <a:spcBef>
+                          <a:spcPts val="0"/>
+                        </a:spcBef>
+                        <a:spcAft>
+                          <a:spcPts val="0"/>
+                        </a:spcAft>
+                        <a:buClrTx/>
+                        <a:buSzTx/>
+                        <a:buFontTx/>
+                        <a:buNone/>
+                        <a:tabLst/>
+                        <a:defRPr/>
+                      </a:pPr>
+                      <a:r>
+                        <a:rPr lang="zh-TW" altLang="en-US" sz="780" b="0" dirty="0">
+                          <a:solidFill>
+                            <a:srgbClr val="000000"/>
+                          </a:solidFill>
+                          <a:latin typeface="Microsoft JhengHei"/>
+                        </a:rPr>
+                        <a:t>捕捉價格的慣性訊號</a:t>
+                      </a:r>
+                      <a:r>
+                        <a:rPr lang="en-US" altLang="zh-TW" sz="780" b="0" dirty="0">
+                          <a:solidFill>
+                            <a:srgbClr val="000000"/>
+                          </a:solidFill>
+                          <a:latin typeface="Microsoft JhengHei"/>
+                        </a:rPr>
+                        <a:t>,</a:t>
+                      </a:r>
+                      <a:r>
+                        <a:rPr lang="zh-TW" altLang="en-US" sz="780" b="0" dirty="0">
+                          <a:solidFill>
+                            <a:srgbClr val="000000"/>
+                          </a:solidFill>
+                          <a:latin typeface="Microsoft JhengHei"/>
+                        </a:rPr>
+                        <a:t>不會經過記憶層</a:t>
+                      </a:r>
+                      <a:r>
+                        <a:rPr lang="en-US" altLang="zh-TW" sz="780" b="0" dirty="0">
+                          <a:solidFill>
+                            <a:srgbClr val="000000"/>
+                          </a:solidFill>
+                          <a:latin typeface="Microsoft JhengHei"/>
+                        </a:rPr>
+                        <a:t>,</a:t>
+                      </a:r>
+                      <a:r>
+                        <a:rPr lang="zh-TW" altLang="en-US" sz="780" b="0" dirty="0">
+                          <a:solidFill>
+                            <a:srgbClr val="000000"/>
+                          </a:solidFill>
+                          <a:latin typeface="Microsoft JhengHei"/>
+                        </a:rPr>
+                        <a:t>直接供給 </a:t>
+                      </a:r>
+                      <a:r>
+                        <a:rPr lang="en-US" altLang="zh-TW" sz="780" b="0" dirty="0">
+                          <a:solidFill>
+                            <a:srgbClr val="000000"/>
+                          </a:solidFill>
+                          <a:latin typeface="Microsoft JhengHei"/>
+                        </a:rPr>
+                        <a:t>Reflect </a:t>
+                      </a:r>
+                      <a:r>
+                        <a:rPr lang="zh-TW" altLang="en-US" sz="780" b="0" dirty="0">
+                          <a:solidFill>
+                            <a:srgbClr val="000000"/>
+                          </a:solidFill>
+                          <a:latin typeface="Microsoft JhengHei"/>
+                        </a:rPr>
+                        <a:t>使用</a:t>
                       </a:r>
                     </a:p>
                   </a:txBody>
@@ -5154,11 +6398,16 @@
                     </a:solidFill>
                   </a:tcPr>
                 </a:tc>
+                <a:extLst>
+                  <a:ext uri="{0D108BD9-81ED-4DB2-BD59-A6C34878D82A}">
+                    <a16:rowId xmlns:a16="http://schemas.microsoft.com/office/drawing/2014/main" val="10004"/>
+                  </a:ext>
+                </a:extLst>
               </a:tr>
               <a:tr h="598932">
                 <a:tc>
                   <a:txBody>
-                    <a:bodyPr wrap="square"/>
+                    <a:bodyPr/>
                     <a:lstStyle/>
                     <a:p>
                       <a:pPr algn="ctr"/>
@@ -5169,7 +6418,7 @@
                           </a:solidFill>
                           <a:latin typeface="Microsoft JhengHei"/>
                         </a:rPr>
-                        <a:t>Layered</a:t>
+                        <a:t>Layered Long-term Memory</a:t>
                       </a:r>
                     </a:p>
                     <a:p>
@@ -5181,7 +6430,7 @@
                           </a:solidFill>
                           <a:latin typeface="Microsoft JhengHei"/>
                         </a:rPr>
-                        <a:t>Memory</a:t>
+                        <a:t>分層長期記憶</a:t>
                       </a:r>
                     </a:p>
                   </a:txBody>
@@ -5193,18 +6442,18 @@
                 </a:tc>
                 <a:tc>
                   <a:txBody>
-                    <a:bodyPr wrap="square"/>
+                    <a:bodyPr/>
                     <a:lstStyle/>
                     <a:p>
                       <a:pPr algn="l"/>
                       <a:r>
-                        <a:rPr sz="780" b="0">
-                          <a:solidFill>
-                            <a:srgbClr val="000000"/>
-                          </a:solidFill>
-                          <a:latin typeface="Microsoft JhengHei"/>
-                        </a:rPr>
-                        <a:t>4 個獨立記憶庫(淺/中/深/反思),各自算重要性、新近度、綜合分數;重要性分數的增減來自 Decision-making 依實際損益給的回饋(賺加分、賠扣分),分數達門檻就在淺中深之間升降,反思層不參與升降層</a:t>
+                        <a:rPr sz="830" b="0">
+                          <a:solidFill>
+                            <a:srgbClr val="202020"/>
+                          </a:solidFill>
+                          <a:latin typeface="Microsoft JhengHei"/>
+                        </a:rPr>
+                        <a:t>4 個獨立記憶庫(淺/中/深/反思),每筆資料都會各自算重要性、新近度、綜合三種分數。重要性分數會依據實際損益給的回饋來做增減(賺加分、賠扣分),達分數門檻就在淺中深三層間升降(反思層不參與升降層);每筆資料的新近度與重要性分數只要任一過低,就會被直接清除;綜合分數(=新近度+重要性)會跟相似度一起,決定 Retrieve 要用哪些資料。</a:t>
                       </a:r>
                     </a:p>
                   </a:txBody>
@@ -5216,18 +6465,45 @@
                 </a:tc>
                 <a:tc>
                   <a:txBody>
-                    <a:bodyPr wrap="square"/>
+                    <a:bodyPr/>
                     <a:lstStyle/>
                     <a:p>
                       <a:pPr algn="l"/>
                       <a:r>
-                        <a:rPr sz="780" b="0">
-                          <a:solidFill>
-                            <a:srgbClr val="000000"/>
-                          </a:solidFill>
-                          <a:latin typeface="Microsoft JhengHei"/>
-                        </a:rPr>
-                        <a:t>Summarize 產出的摘要文字＋Reflect 產出的推理摘要</a:t>
+                        <a:rPr lang="en-US" altLang="zh-TW" sz="780" b="0" dirty="0">
+                          <a:solidFill>
+                            <a:srgbClr val="000000"/>
+                          </a:solidFill>
+                          <a:latin typeface="Microsoft JhengHei"/>
+                        </a:rPr>
+                        <a:t>Summarize </a:t>
+                      </a:r>
+                      <a:r>
+                        <a:rPr lang="zh-TW" altLang="en-US" sz="780" b="0" dirty="0">
+                          <a:solidFill>
+                            <a:srgbClr val="000000"/>
+                          </a:solidFill>
+                          <a:latin typeface="Microsoft JhengHei"/>
+                        </a:rPr>
+                        <a:t>產出的摘要文字＋</a:t>
+                      </a:r>
+                      <a:r>
+                        <a:rPr lang="en-US" altLang="zh-TW" sz="780" b="0" dirty="0">
+                          <a:solidFill>
+                            <a:srgbClr val="000000"/>
+                          </a:solidFill>
+                          <a:latin typeface="Microsoft JhengHei"/>
+                        </a:rPr>
+                        <a:t>Reflect </a:t>
+                      </a:r>
+                      <a:r>
+                        <a:rPr lang="zh-TW" altLang="en-US" sz="780" b="0" dirty="0">
+                          <a:solidFill>
+                            <a:srgbClr val="000000"/>
+                          </a:solidFill>
+                          <a:latin typeface="Microsoft JhengHei"/>
+                        </a:rPr>
+                        <a:t>產出的推理資料</a:t>
                       </a:r>
                     </a:p>
                   </a:txBody>
@@ -5239,18 +6515,18 @@
                 </a:tc>
                 <a:tc>
                   <a:txBody>
-                    <a:bodyPr wrap="square"/>
+                    <a:bodyPr/>
                     <a:lstStyle/>
                     <a:p>
                       <a:pPr algn="l"/>
                       <a:r>
-                        <a:rPr sz="780" b="0">
-                          <a:solidFill>
-                            <a:srgbClr val="000000"/>
-                          </a:solidFill>
-                          <a:latin typeface="Microsoft JhengHei"/>
-                        </a:rPr>
-                        <a:t>會隨時間升降層、淘汰的分層記憶庫</a:t>
+                        <a:rPr lang="zh-TW" altLang="en-US" sz="780" b="0" dirty="0">
+                          <a:solidFill>
+                            <a:srgbClr val="000000"/>
+                          </a:solidFill>
+                          <a:latin typeface="Microsoft JhengHei"/>
+                        </a:rPr>
+                        <a:t>資料會隨時間升降層或清除的分層記憶庫</a:t>
                       </a:r>
                     </a:p>
                   </a:txBody>
@@ -5262,18 +6538,36 @@
                 </a:tc>
                 <a:tc>
                   <a:txBody>
-                    <a:bodyPr wrap="square"/>
+                    <a:bodyPr/>
                     <a:lstStyle/>
                     <a:p>
                       <a:pPr algn="l"/>
                       <a:r>
-                        <a:rPr sz="780" b="0">
-                          <a:solidFill>
-                            <a:srgbClr val="000000"/>
-                          </a:solidFill>
-                          <a:latin typeface="Microsoft JhengHei"/>
-                        </a:rPr>
-                        <a:t>模擬「常用且證實有效的記得久、沒用或誤導的忘得快」,決定哪些資訊該長期保留</a:t>
+                        <a:rPr lang="zh-TW" altLang="en-US" sz="780" b="0" dirty="0">
+                          <a:solidFill>
+                            <a:srgbClr val="000000"/>
+                          </a:solidFill>
+                          <a:latin typeface="Microsoft JhengHei"/>
+                        </a:rPr>
+                        <a:t>模擬「常用且證實有效的資訊會記得久、沒用或誤導的會忘得快」</a:t>
+                      </a:r>
+                      <a:r>
+                        <a:rPr lang="en-US" altLang="zh-TW" sz="780" b="0" dirty="0">
+                          <a:solidFill>
+                            <a:srgbClr val="000000"/>
+                          </a:solidFill>
+                          <a:latin typeface="Microsoft JhengHei"/>
+                        </a:rPr>
+                        <a:t>,</a:t>
+                      </a:r>
+                      <a:r>
+                        <a:rPr lang="zh-TW" altLang="en-US" sz="780" b="0" dirty="0">
+                          <a:solidFill>
+                            <a:srgbClr val="000000"/>
+                          </a:solidFill>
+                          <a:latin typeface="Microsoft JhengHei"/>
+                        </a:rPr>
+                        <a:t>決定哪些資訊該長期保留</a:t>
                       </a:r>
                     </a:p>
                   </a:txBody>
@@ -5283,16 +6577,21 @@
                     </a:solidFill>
                   </a:tcPr>
                 </a:tc>
+                <a:extLst>
+                  <a:ext uri="{0D108BD9-81ED-4DB2-BD59-A6C34878D82A}">
+                    <a16:rowId xmlns:a16="http://schemas.microsoft.com/office/drawing/2014/main" val="10005"/>
+                  </a:ext>
+                </a:extLst>
               </a:tr>
               <a:tr h="598932">
                 <a:tc>
                   <a:txBody>
-                    <a:bodyPr wrap="square"/>
+                    <a:bodyPr/>
                     <a:lstStyle/>
                     <a:p>
                       <a:pPr algn="ctr"/>
                       <a:r>
-                        <a:rPr sz="860" b="1">
+                        <a:rPr sz="860" b="1" dirty="0">
                           <a:solidFill>
                             <a:srgbClr val="000000"/>
                           </a:solidFill>
@@ -5304,7 +6603,7 @@
                     <a:p>
                       <a:pPr algn="ctr"/>
                       <a:r>
-                        <a:rPr sz="860" b="1">
+                        <a:rPr sz="860" b="1" dirty="0" err="1">
                           <a:solidFill>
                             <a:srgbClr val="000000"/>
                           </a:solidFill>
@@ -5312,6 +6611,12 @@
                         </a:rPr>
                         <a:t>檢索</a:t>
                       </a:r>
+                      <a:endParaRPr sz="860" b="1" dirty="0">
+                        <a:solidFill>
+                          <a:srgbClr val="000000"/>
+                        </a:solidFill>
+                        <a:latin typeface="Microsoft JhengHei"/>
+                      </a:endParaRPr>
                     </a:p>
                   </a:txBody>
                   <a:tcPr marL="40000" marR="40000" marT="10000" marB="10000" anchor="ctr">
@@ -5322,18 +6627,18 @@
                 </a:tc>
                 <a:tc>
                   <a:txBody>
-                    <a:bodyPr wrap="square"/>
+                    <a:bodyPr/>
                     <a:lstStyle/>
                     <a:p>
                       <a:pPr algn="l"/>
                       <a:r>
-                        <a:rPr sz="780" b="0">
-                          <a:solidFill>
-                            <a:srgbClr val="000000"/>
-                          </a:solidFill>
-                          <a:latin typeface="Microsoft JhengHei"/>
-                        </a:rPr>
-                        <a:t>人設字串轉 embedding,對四層各自獨立做向量相似度搜尋,各層取分數最高的 Top-K(K=3)</a:t>
+                        <a:rPr sz="830" b="0">
+                          <a:solidFill>
+                            <a:srgbClr val="202020"/>
+                          </a:solidFill>
+                          <a:latin typeface="Microsoft JhengHei"/>
+                        </a:rPr>
+                        <a:t>根據人設字串對四層各自獨立做向量相似度搜尋,各層取分數(相似度+綜合分數)最高的前三筆資料。</a:t>
                       </a:r>
                     </a:p>
                   </a:txBody>
@@ -5345,19 +6650,43 @@
                 </a:tc>
                 <a:tc>
                   <a:txBody>
-                    <a:bodyPr wrap="square"/>
+                    <a:bodyPr/>
                     <a:lstStyle/>
                     <a:p>
                       <a:pPr algn="l"/>
                       <a:r>
-                        <a:rPr sz="780" b="0">
-                          <a:solidFill>
-                            <a:srgbClr val="000000"/>
-                          </a:solidFill>
-                          <a:latin typeface="Microsoft JhengHei"/>
-                        </a:rPr>
-                        <a:t>Profiling 設定的角色人設字串</a:t>
-                      </a:r>
+                        <a:rPr sz="780" b="0" dirty="0">
+                          <a:solidFill>
+                            <a:srgbClr val="000000"/>
+                          </a:solidFill>
+                          <a:latin typeface="Microsoft JhengHei"/>
+                        </a:rPr>
+                        <a:t>Profiling </a:t>
+                      </a:r>
+                      <a:r>
+                        <a:rPr sz="780" b="0" dirty="0" err="1">
+                          <a:solidFill>
+                            <a:srgbClr val="000000"/>
+                          </a:solidFill>
+                          <a:latin typeface="Microsoft JhengHei"/>
+                        </a:rPr>
+                        <a:t>設定的角色人設字串</a:t>
+                      </a:r>
+                      <a:r>
+                        <a:rPr lang="zh-TW" altLang="en-US" sz="780" b="0" dirty="0">
+                          <a:solidFill>
+                            <a:srgbClr val="000000"/>
+                          </a:solidFill>
+                          <a:latin typeface="Microsoft JhengHei"/>
+                        </a:rPr>
+                        <a:t>、四層記憶庫的資料</a:t>
+                      </a:r>
+                      <a:endParaRPr sz="780" b="0" dirty="0">
+                        <a:solidFill>
+                          <a:srgbClr val="000000"/>
+                        </a:solidFill>
+                        <a:latin typeface="Microsoft JhengHei"/>
+                      </a:endParaRPr>
                     </a:p>
                   </a:txBody>
                   <a:tcPr marL="40000" marR="40000" marT="10000" marB="10000" anchor="ctr">
@@ -5368,19 +6697,79 @@
                 </a:tc>
                 <a:tc>
                   <a:txBody>
-                    <a:bodyPr wrap="square"/>
+                    <a:bodyPr/>
                     <a:lstStyle/>
                     <a:p>
                       <a:pPr algn="l"/>
                       <a:r>
-                        <a:rPr sz="780" b="0">
-                          <a:solidFill>
-                            <a:srgbClr val="000000"/>
-                          </a:solidFill>
-                          <a:latin typeface="Microsoft JhengHei"/>
-                        </a:rPr>
-                        <a:t>四層各自的 Top-K 相關記憶(含編號),最多 4×K 筆</a:t>
-                      </a:r>
+                        <a:rPr lang="zh-TW" altLang="en-US" sz="780" b="0" dirty="0">
+                          <a:solidFill>
+                            <a:srgbClr val="000000"/>
+                          </a:solidFill>
+                          <a:latin typeface="Microsoft JhengHei"/>
+                        </a:rPr>
+                        <a:t>四層各自獨立取「相似度</a:t>
+                      </a:r>
+                      <a:r>
+                        <a:rPr lang="en-US" altLang="zh-TW" sz="780" b="0" dirty="0">
+                          <a:solidFill>
+                            <a:srgbClr val="000000"/>
+                          </a:solidFill>
+                          <a:latin typeface="Microsoft JhengHei"/>
+                        </a:rPr>
+                        <a:t>+</a:t>
+                      </a:r>
+                      <a:r>
+                        <a:rPr lang="zh-TW" altLang="en-US" sz="780" b="0" dirty="0">
+                          <a:solidFill>
+                            <a:srgbClr val="000000"/>
+                          </a:solidFill>
+                          <a:latin typeface="Microsoft JhengHei"/>
+                        </a:rPr>
+                        <a:t>綜合分數」最高的前三筆資料</a:t>
+                      </a:r>
+                      <a:r>
+                        <a:rPr lang="en-US" altLang="zh-TW" sz="780" b="0" dirty="0">
+                          <a:solidFill>
+                            <a:srgbClr val="000000"/>
+                          </a:solidFill>
+                          <a:latin typeface="Microsoft JhengHei"/>
+                        </a:rPr>
+                        <a:t>,</a:t>
+                      </a:r>
+                      <a:r>
+                        <a:rPr lang="zh-TW" altLang="en-US" sz="780" b="0" dirty="0">
+                          <a:solidFill>
+                            <a:srgbClr val="000000"/>
+                          </a:solidFill>
+                          <a:latin typeface="Microsoft JhengHei"/>
+                        </a:rPr>
+                        <a:t>每一筆都有「編號</a:t>
+                      </a:r>
+                      <a:r>
+                        <a:rPr lang="en-US" altLang="zh-TW" sz="780" b="0" dirty="0">
+                          <a:solidFill>
+                            <a:srgbClr val="000000"/>
+                          </a:solidFill>
+                          <a:latin typeface="Microsoft JhengHei"/>
+                        </a:rPr>
+                        <a:t>+</a:t>
+                      </a:r>
+                      <a:r>
+                        <a:rPr lang="zh-TW" altLang="en-US" sz="780" b="0" dirty="0">
+                          <a:solidFill>
+                            <a:srgbClr val="000000"/>
+                          </a:solidFill>
+                          <a:latin typeface="Microsoft JhengHei"/>
+                        </a:rPr>
+                        <a:t>文字內容」</a:t>
+                      </a:r>
+                      <a:endParaRPr sz="780" b="0" dirty="0">
+                        <a:solidFill>
+                          <a:srgbClr val="000000"/>
+                        </a:solidFill>
+                        <a:latin typeface="Microsoft JhengHei"/>
+                      </a:endParaRPr>
                     </a:p>
                   </a:txBody>
                   <a:tcPr marL="40000" marR="40000" marT="10000" marB="10000" anchor="ctr">
@@ -5391,18 +6780,54 @@
                 </a:tc>
                 <a:tc>
                   <a:txBody>
-                    <a:bodyPr wrap="square"/>
+                    <a:bodyPr/>
                     <a:lstStyle/>
                     <a:p>
                       <a:pPr algn="l"/>
                       <a:r>
-                        <a:rPr sz="780" b="0">
-                          <a:solidFill>
-                            <a:srgbClr val="000000"/>
-                          </a:solidFill>
-                          <a:latin typeface="Microsoft JhengHei"/>
-                        </a:rPr>
-                        <a:t>找出當下最相關的歷史依據,供 Reflect 使用</a:t>
+                        <a:rPr lang="zh-TW" altLang="en-US" sz="780" b="0" dirty="0">
+                          <a:solidFill>
+                            <a:srgbClr val="000000"/>
+                          </a:solidFill>
+                          <a:latin typeface="Microsoft JhengHei"/>
+                        </a:rPr>
+                        <a:t>找出最相關的資料</a:t>
+                      </a:r>
+                      <a:r>
+                        <a:rPr lang="en-US" altLang="zh-TW" sz="780" b="0" dirty="0">
+                          <a:solidFill>
+                            <a:srgbClr val="000000"/>
+                          </a:solidFill>
+                          <a:latin typeface="Microsoft JhengHei"/>
+                        </a:rPr>
+                        <a:t>,</a:t>
+                      </a:r>
+                      <a:r>
+                        <a:rPr lang="zh-TW" altLang="en-US" sz="780" b="0" dirty="0">
+                          <a:solidFill>
+                            <a:srgbClr val="000000"/>
+                          </a:solidFill>
+                          <a:latin typeface="Microsoft JhengHei"/>
+                        </a:rPr>
+                        <a:t>供 </a:t>
+                      </a:r>
+                      <a:r>
+                        <a:rPr lang="en-US" altLang="zh-TW" sz="780" b="0" dirty="0">
+                          <a:solidFill>
+                            <a:srgbClr val="000000"/>
+                          </a:solidFill>
+                          <a:latin typeface="Microsoft JhengHei"/>
+                        </a:rPr>
+                        <a:t>Reflect </a:t>
+                      </a:r>
+                      <a:r>
+                        <a:rPr lang="zh-TW" altLang="en-US" sz="780" b="0" dirty="0">
+                          <a:solidFill>
+                            <a:srgbClr val="000000"/>
+                          </a:solidFill>
+                          <a:latin typeface="Microsoft JhengHei"/>
+                        </a:rPr>
+                        <a:t>使用</a:t>
                       </a:r>
                     </a:p>
                   </a:txBody>
@@ -5412,16 +6837,21 @@
                     </a:solidFill>
                   </a:tcPr>
                 </a:tc>
+                <a:extLst>
+                  <a:ext uri="{0D108BD9-81ED-4DB2-BD59-A6C34878D82A}">
+                    <a16:rowId xmlns:a16="http://schemas.microsoft.com/office/drawing/2014/main" val="10006"/>
+                  </a:ext>
+                </a:extLst>
               </a:tr>
               <a:tr h="598932">
                 <a:tc>
                   <a:txBody>
-                    <a:bodyPr wrap="square"/>
+                    <a:bodyPr/>
                     <a:lstStyle/>
                     <a:p>
                       <a:pPr algn="ctr"/>
                       <a:r>
-                        <a:rPr sz="860" b="1">
+                        <a:rPr sz="860" b="1" dirty="0">
                           <a:solidFill>
                             <a:srgbClr val="000000"/>
                           </a:solidFill>
@@ -5433,7 +6863,7 @@
                     <a:p>
                       <a:pPr algn="ctr"/>
                       <a:r>
-                        <a:rPr sz="860" b="1">
+                        <a:rPr sz="860" b="1" dirty="0" err="1">
                           <a:solidFill>
                             <a:srgbClr val="000000"/>
                           </a:solidFill>
@@ -5441,6 +6871,12 @@
                         </a:rPr>
                         <a:t>反思推理</a:t>
                       </a:r>
+                      <a:endParaRPr sz="860" b="1" dirty="0">
+                        <a:solidFill>
+                          <a:srgbClr val="000000"/>
+                        </a:solidFill>
+                        <a:latin typeface="Microsoft JhengHei"/>
+                      </a:endParaRPr>
                     </a:p>
                   </a:txBody>
                   <a:tcPr marL="40000" marR="40000" marT="10000" marB="10000" anchor="ctr">
@@ -5451,19 +6887,97 @@
                 </a:tc>
                 <a:tc>
                   <a:txBody>
-                    <a:bodyPr wrap="square"/>
+                    <a:bodyPr/>
                     <a:lstStyle/>
                     <a:p>
                       <a:pPr algn="l"/>
                       <a:r>
-                        <a:rPr sz="780" b="0">
-                          <a:solidFill>
-                            <a:srgbClr val="000000"/>
-                          </a:solidFill>
-                          <a:latin typeface="Microsoft JhengHei"/>
-                        </a:rPr>
-                        <a:t>全流程唯一呼叫 LLM 的地方:guardrails 包裝輸出格式,依訓練/測試模式產出結構化結果;引用幾筆記憶由 LLM 自行判斷,不固定</a:t>
-                      </a:r>
+                        <a:rPr lang="zh-TW" altLang="en-US" sz="780" b="0" dirty="0">
+                          <a:solidFill>
+                            <a:srgbClr val="000000"/>
+                          </a:solidFill>
+                          <a:latin typeface="Microsoft JhengHei"/>
+                        </a:rPr>
+                        <a:t>將</a:t>
+                      </a:r>
+                      <a:r>
+                        <a:rPr lang="en-US" altLang="zh-TW" sz="780" b="0" dirty="0">
+                          <a:solidFill>
+                            <a:srgbClr val="000000"/>
+                          </a:solidFill>
+                          <a:latin typeface="Microsoft JhengHei"/>
+                        </a:rPr>
+                        <a:t>Retrieve</a:t>
+                      </a:r>
+                      <a:r>
+                        <a:rPr lang="zh-TW" altLang="en-US" sz="780" b="0" dirty="0">
+                          <a:solidFill>
+                            <a:srgbClr val="000000"/>
+                          </a:solidFill>
+                          <a:latin typeface="Microsoft JhengHei"/>
+                        </a:rPr>
+                        <a:t>取出的資料跟市場動能組成提示詞送給 </a:t>
+                      </a:r>
+                      <a:r>
+                        <a:rPr lang="en-US" altLang="zh-TW" sz="780" b="0" dirty="0">
+                          <a:solidFill>
+                            <a:srgbClr val="000000"/>
+                          </a:solidFill>
+                          <a:latin typeface="Microsoft JhengHei"/>
+                        </a:rPr>
+                        <a:t>LLM,</a:t>
+                      </a:r>
+                      <a:r>
+                        <a:rPr lang="zh-TW" altLang="en-US" sz="780" b="0" dirty="0">
+                          <a:solidFill>
+                            <a:srgbClr val="000000"/>
+                          </a:solidFill>
+                          <a:latin typeface="Microsoft JhengHei"/>
+                        </a:rPr>
+                        <a:t>並事先規定好回答格式</a:t>
+                      </a:r>
+                      <a:r>
+                        <a:rPr lang="en-US" altLang="zh-TW" sz="780" b="0" dirty="0">
+                          <a:solidFill>
+                            <a:srgbClr val="000000"/>
+                          </a:solidFill>
+                          <a:latin typeface="Microsoft JhengHei"/>
+                        </a:rPr>
+                        <a:t>,</a:t>
+                      </a:r>
+                      <a:r>
+                        <a:rPr lang="zh-TW" altLang="en-US" sz="780" b="0" dirty="0">
+                          <a:solidFill>
+                            <a:srgbClr val="000000"/>
+                          </a:solidFill>
+                          <a:latin typeface="Microsoft JhengHei"/>
+                        </a:rPr>
+                        <a:t>回答不符合規定則會重寫</a:t>
+                      </a:r>
+                      <a:r>
+                        <a:rPr lang="en-US" altLang="zh-TW" sz="780" b="0" dirty="0">
+                          <a:solidFill>
+                            <a:srgbClr val="000000"/>
+                          </a:solidFill>
+                          <a:latin typeface="Microsoft JhengHei"/>
+                        </a:rPr>
+                        <a:t>,</a:t>
+                      </a:r>
+                      <a:r>
+                        <a:rPr lang="zh-TW" altLang="en-US" sz="780" b="0" dirty="0">
+                          <a:solidFill>
+                            <a:srgbClr val="000000"/>
+                          </a:solidFill>
+                          <a:latin typeface="Microsoft JhengHei"/>
+                        </a:rPr>
+                        <a:t>直到正確格式的結果為止。</a:t>
+                      </a:r>
+                      <a:endParaRPr sz="780" b="0" dirty="0">
+                        <a:solidFill>
+                          <a:srgbClr val="000000"/>
+                        </a:solidFill>
+                        <a:latin typeface="Microsoft JhengHei"/>
+                      </a:endParaRPr>
                     </a:p>
                   </a:txBody>
                   <a:tcPr marL="40000" marR="40000" marT="10000" marB="10000" anchor="ctr">
@@ -5474,18 +6988,45 @@
                 </a:tc>
                 <a:tc>
                   <a:txBody>
-                    <a:bodyPr wrap="square"/>
+                    <a:bodyPr/>
                     <a:lstStyle/>
                     <a:p>
                       <a:pPr algn="l"/>
                       <a:r>
-                        <a:rPr sz="780" b="0">
-                          <a:solidFill>
-                            <a:srgbClr val="000000"/>
-                          </a:solidFill>
-                          <a:latin typeface="Microsoft JhengHei"/>
-                        </a:rPr>
-                        <a:t>Retrieve 取出的記憶＋Observe 的市場事實</a:t>
+                        <a:rPr lang="en-US" altLang="zh-TW" sz="780" b="0" dirty="0">
+                          <a:solidFill>
+                            <a:srgbClr val="000000"/>
+                          </a:solidFill>
+                          <a:latin typeface="Microsoft JhengHei"/>
+                        </a:rPr>
+                        <a:t>Retrieve </a:t>
+                      </a:r>
+                      <a:r>
+                        <a:rPr lang="zh-TW" altLang="en-US" sz="780" b="0" dirty="0">
+                          <a:solidFill>
+                            <a:srgbClr val="000000"/>
+                          </a:solidFill>
+                          <a:latin typeface="Microsoft JhengHei"/>
+                        </a:rPr>
+                        <a:t>取出的資料＋</a:t>
+                      </a:r>
+                      <a:r>
+                        <a:rPr lang="en-US" altLang="zh-TW" sz="780" b="0" dirty="0">
+                          <a:solidFill>
+                            <a:srgbClr val="000000"/>
+                          </a:solidFill>
+                          <a:latin typeface="Microsoft JhengHei"/>
+                        </a:rPr>
+                        <a:t>Observe </a:t>
+                      </a:r>
+                      <a:r>
+                        <a:rPr lang="zh-TW" altLang="en-US" sz="780" b="0" dirty="0">
+                          <a:solidFill>
+                            <a:srgbClr val="000000"/>
+                          </a:solidFill>
+                          <a:latin typeface="Microsoft JhengHei"/>
+                        </a:rPr>
+                        <a:t>的市場動能趨勢</a:t>
                       </a:r>
                     </a:p>
                   </a:txBody>
@@ -5497,18 +7038,36 @@
                 </a:tc>
                 <a:tc>
                   <a:txBody>
-                    <a:bodyPr wrap="square"/>
+                    <a:bodyPr/>
                     <a:lstStyle/>
                     <a:p>
                       <a:pPr algn="l"/>
                       <a:r>
-                        <a:rPr sz="780" b="0">
-                          <a:solidFill>
-                            <a:srgbClr val="000000"/>
-                          </a:solidFill>
-                          <a:latin typeface="Microsoft JhengHei"/>
-                        </a:rPr>
-                        <a:t>結構化反思(引用記憶編號＋推理摘要),摘要會回寫進反思層</a:t>
+                        <a:rPr lang="zh-TW" altLang="en-US" sz="780" b="0" dirty="0">
+                          <a:solidFill>
+                            <a:srgbClr val="000000"/>
+                          </a:solidFill>
+                          <a:latin typeface="Microsoft JhengHei"/>
+                        </a:rPr>
+                        <a:t>引用資料編號＋推理摘要</a:t>
+                      </a:r>
+                      <a:r>
+                        <a:rPr lang="en-US" altLang="zh-TW" sz="780" b="0" dirty="0">
+                          <a:solidFill>
+                            <a:srgbClr val="000000"/>
+                          </a:solidFill>
+                          <a:latin typeface="Microsoft JhengHei"/>
+                        </a:rPr>
+                        <a:t>,</a:t>
+                      </a:r>
+                      <a:r>
+                        <a:rPr lang="zh-TW" altLang="en-US" sz="780" b="0" dirty="0">
+                          <a:solidFill>
+                            <a:srgbClr val="000000"/>
+                          </a:solidFill>
+                          <a:latin typeface="Microsoft JhengHei"/>
+                        </a:rPr>
+                        <a:t>摘要會回寫進反思層</a:t>
                       </a:r>
                     </a:p>
                   </a:txBody>
@@ -5520,18 +7079,18 @@
                 </a:tc>
                 <a:tc>
                   <a:txBody>
-                    <a:bodyPr wrap="square"/>
+                    <a:bodyPr/>
                     <a:lstStyle/>
                     <a:p>
                       <a:pPr algn="l"/>
                       <a:r>
-                        <a:rPr sz="780" b="0">
-                          <a:solidFill>
-                            <a:srgbClr val="000000"/>
-                          </a:solidFill>
-                          <a:latin typeface="Microsoft JhengHei"/>
-                        </a:rPr>
-                        <a:t>把記憶與市場觀察轉成一段可解釋的推理</a:t>
+                        <a:rPr lang="zh-TW" altLang="en-US" sz="780" b="0" dirty="0">
+                          <a:solidFill>
+                            <a:srgbClr val="000000"/>
+                          </a:solidFill>
+                          <a:latin typeface="Microsoft JhengHei"/>
+                        </a:rPr>
+                        <a:t>把記憶庫資料與市場觀察轉成一段可解釋的推理</a:t>
                       </a:r>
                     </a:p>
                   </a:txBody>
@@ -5541,34 +7100,40 @@
                     </a:solidFill>
                   </a:tcPr>
                 </a:tc>
+                <a:extLst>
+                  <a:ext uri="{0D108BD9-81ED-4DB2-BD59-A6C34878D82A}">
+                    <a16:rowId xmlns:a16="http://schemas.microsoft.com/office/drawing/2014/main" val="10007"/>
+                  </a:ext>
+                </a:extLst>
               </a:tr>
               <a:tr h="598932">
                 <a:tc>
                   <a:txBody>
-                    <a:bodyPr wrap="square"/>
+                    <a:bodyPr/>
                     <a:lstStyle/>
                     <a:p>
                       <a:pPr algn="ctr"/>
                       <a:r>
-                        <a:rPr sz="860" b="1">
-                          <a:solidFill>
-                            <a:srgbClr val="000000"/>
-                          </a:solidFill>
-                          <a:latin typeface="Microsoft JhengHei"/>
-                        </a:rPr>
-                        <a:t>Decision</a:t>
+                        <a:rPr lang="en-US" altLang="zh-TW" sz="900" b="1" dirty="0">
+                          <a:solidFill>
+                            <a:srgbClr val="202020"/>
+                          </a:solidFill>
+                          <a:latin typeface="Microsoft JhengHei"/>
+                        </a:rPr>
+                        <a:t>Investment decisions and reflecting outcomes</a:t>
                       </a:r>
                     </a:p>
                     <a:p>
                       <a:pPr algn="ctr"/>
                       <a:r>
-                        <a:rPr sz="860" b="1">
-                          <a:solidFill>
-                            <a:srgbClr val="000000"/>
-                          </a:solidFill>
-                          <a:latin typeface="Microsoft JhengHei"/>
-                        </a:rPr>
-                        <a:t>-making</a:t>
+                        <a:rPr lang="zh-TW" altLang="en-US" sz="900" b="1" dirty="0">
+                          <a:solidFill>
+                            <a:srgbClr val="202020"/>
+                          </a:solidFill>
+                          <a:latin typeface="微軟正黑體" panose="020B0604030504040204" pitchFamily="34" charset="-120"/>
+                          <a:ea typeface="微軟正黑體" panose="020B0604030504040204" pitchFamily="34" charset="-120"/>
+                        </a:rPr>
+                        <a:t>投資決策及結果反映</a:t>
                       </a:r>
                     </a:p>
                   </a:txBody>
@@ -5580,19 +7145,115 @@
                 </a:tc>
                 <a:tc>
                   <a:txBody>
-                    <a:bodyPr wrap="square"/>
+                    <a:bodyPr/>
                     <a:lstStyle/>
                     <a:p>
                       <a:pPr algn="l"/>
                       <a:r>
-                        <a:rPr sz="780" b="0">
-                          <a:solidFill>
-                            <a:srgbClr val="000000"/>
-                          </a:solidFill>
-                          <a:latin typeface="Microsoft JhengHei"/>
-                        </a:rPr>
-                        <a:t>4 個子步驟:①依決策(test)或實際隔日漲跌(train)決定買賣方向 ②寫進持倉紀錄(僅內部模擬,未連接真實券商) ③依最近 7 天實際損益,對本次引用的記憶加分或扣分 ④觸發整個記憶庫當天的衰退/清倉/升降層</a:t>
-                      </a:r>
+                        <a:rPr lang="zh-TW" altLang="en-US" sz="780" b="0" dirty="0">
+                          <a:solidFill>
+                            <a:srgbClr val="000000"/>
+                          </a:solidFill>
+                          <a:latin typeface="Microsoft JhengHei"/>
+                        </a:rPr>
+                        <a:t>用 </a:t>
+                      </a:r>
+                      <a:r>
+                        <a:rPr lang="en-US" altLang="zh-TW" sz="780" b="0" dirty="0">
+                          <a:solidFill>
+                            <a:srgbClr val="000000"/>
+                          </a:solidFill>
+                          <a:latin typeface="Microsoft JhengHei"/>
+                        </a:rPr>
+                        <a:t>Reflect </a:t>
+                      </a:r>
+                      <a:r>
+                        <a:rPr lang="zh-TW" altLang="en-US" sz="780" b="0" dirty="0">
+                          <a:solidFill>
+                            <a:srgbClr val="000000"/>
+                          </a:solidFill>
+                          <a:latin typeface="Microsoft JhengHei"/>
+                        </a:rPr>
+                        <a:t>的結論產出決策結果</a:t>
+                      </a:r>
+                      <a:r>
+                        <a:rPr lang="en-US" altLang="zh-TW" sz="780" b="0" dirty="0">
+                          <a:solidFill>
+                            <a:srgbClr val="000000"/>
+                          </a:solidFill>
+                          <a:latin typeface="Microsoft JhengHei"/>
+                        </a:rPr>
+                        <a:t> (</a:t>
+                      </a:r>
+                      <a:r>
+                        <a:rPr lang="zh-TW" altLang="en-US" sz="780" b="0" dirty="0">
+                          <a:solidFill>
+                            <a:srgbClr val="000000"/>
+                          </a:solidFill>
+                          <a:latin typeface="Microsoft JhengHei"/>
+                        </a:rPr>
+                        <a:t>買</a:t>
+                      </a:r>
+                      <a:r>
+                        <a:rPr lang="en-US" altLang="zh-TW" sz="780" b="0" dirty="0">
+                          <a:solidFill>
+                            <a:srgbClr val="000000"/>
+                          </a:solidFill>
+                          <a:latin typeface="Microsoft JhengHei"/>
+                        </a:rPr>
+                        <a:t>/</a:t>
+                      </a:r>
+                      <a:r>
+                        <a:rPr lang="zh-TW" altLang="en-US" sz="780" b="0" dirty="0">
+                          <a:solidFill>
+                            <a:srgbClr val="000000"/>
+                          </a:solidFill>
+                          <a:latin typeface="Microsoft JhengHei"/>
+                        </a:rPr>
+                        <a:t>賣</a:t>
+                      </a:r>
+                      <a:r>
+                        <a:rPr lang="en-US" altLang="zh-TW" sz="780" b="0" dirty="0">
+                          <a:solidFill>
+                            <a:srgbClr val="000000"/>
+                          </a:solidFill>
+                          <a:latin typeface="Microsoft JhengHei"/>
+                        </a:rPr>
+                        <a:t>/</a:t>
+                      </a:r>
+                      <a:r>
+                        <a:rPr lang="zh-TW" altLang="en-US" sz="780" b="0" dirty="0">
+                          <a:solidFill>
+                            <a:srgbClr val="000000"/>
+                          </a:solidFill>
+                          <a:latin typeface="Microsoft JhengHei"/>
+                        </a:rPr>
+                        <a:t>持有</a:t>
+                      </a:r>
+                      <a:r>
+                        <a:rPr lang="en-US" altLang="zh-TW" sz="780" b="0" dirty="0">
+                          <a:solidFill>
+                            <a:srgbClr val="000000"/>
+                          </a:solidFill>
+                          <a:latin typeface="Microsoft JhengHei"/>
+                        </a:rPr>
+                        <a:t>),</a:t>
+                      </a:r>
+                      <a:r>
+                        <a:rPr lang="zh-TW" altLang="en-US" sz="780" b="0" dirty="0">
+                          <a:solidFill>
+                            <a:srgbClr val="000000"/>
+                          </a:solidFill>
+                          <a:latin typeface="Microsoft JhengHei"/>
+                        </a:rPr>
+                        <a:t>並回頭依照最近幾天的損益，替用到的那些資料加分或扣分，讓整個記憶庫的每筆資料完成當天的分數的增減、升降層變動。</a:t>
+                      </a:r>
+                      <a:endParaRPr sz="780" b="0" dirty="0">
+                        <a:solidFill>
+                          <a:srgbClr val="000000"/>
+                        </a:solidFill>
+                        <a:latin typeface="Microsoft JhengHei"/>
+                      </a:endParaRPr>
                     </a:p>
                   </a:txBody>
                   <a:tcPr marL="40000" marR="40000" marT="10000" marB="10000" anchor="ctr">
@@ -5603,19 +7264,34 @@
                 </a:tc>
                 <a:tc>
                   <a:txBody>
-                    <a:bodyPr wrap="square"/>
+                    <a:bodyPr/>
                     <a:lstStyle/>
                     <a:p>
                       <a:pPr algn="l"/>
                       <a:r>
-                        <a:rPr sz="780" b="0">
-                          <a:solidFill>
-                            <a:srgbClr val="000000"/>
-                          </a:solidFill>
-                          <a:latin typeface="Microsoft JhengHei"/>
-                        </a:rPr>
-                        <a:t>Reflect 的推理結果＋目前持倉＋近期實際損益</a:t>
-                      </a:r>
+                        <a:rPr sz="780" b="0" dirty="0">
+                          <a:solidFill>
+                            <a:srgbClr val="000000"/>
+                          </a:solidFill>
+                          <a:latin typeface="Microsoft JhengHei"/>
+                        </a:rPr>
+                        <a:t>Reflect </a:t>
+                      </a:r>
+                      <a:r>
+                        <a:rPr sz="780" b="0" dirty="0" err="1">
+                          <a:solidFill>
+                            <a:srgbClr val="000000"/>
+                          </a:solidFill>
+                          <a:latin typeface="Microsoft JhengHei"/>
+                        </a:rPr>
+                        <a:t>的推理結果＋目前持倉＋近期損益</a:t>
+                      </a:r>
+                      <a:endParaRPr sz="780" b="0" dirty="0">
+                        <a:solidFill>
+                          <a:srgbClr val="000000"/>
+                        </a:solidFill>
+                        <a:latin typeface="Microsoft JhengHei"/>
+                      </a:endParaRPr>
                     </a:p>
                   </a:txBody>
                   <a:tcPr marL="40000" marR="40000" marT="10000" marB="10000" anchor="ctr">
@@ -5626,18 +7302,54 @@
                 </a:tc>
                 <a:tc>
                   <a:txBody>
-                    <a:bodyPr wrap="square"/>
+                    <a:bodyPr/>
                     <a:lstStyle/>
                     <a:p>
                       <a:pPr algn="l"/>
                       <a:r>
-                        <a:rPr sz="780" b="0">
-                          <a:solidFill>
-                            <a:srgbClr val="000000"/>
-                          </a:solidFill>
-                          <a:latin typeface="Microsoft JhengHei"/>
-                        </a:rPr>
-                        <a:t>Buy / Sell / Hold 決策、更新後的持倉、記憶分數獎懲、記憶庫完成當天維護</a:t>
+                        <a:rPr lang="zh-TW" altLang="en-US" sz="780" b="0" dirty="0">
+                          <a:solidFill>
+                            <a:srgbClr val="000000"/>
+                          </a:solidFill>
+                          <a:latin typeface="Microsoft JhengHei"/>
+                        </a:rPr>
+                        <a:t>買</a:t>
+                      </a:r>
+                      <a:r>
+                        <a:rPr lang="en-US" altLang="zh-TW" sz="780" b="0" dirty="0">
+                          <a:solidFill>
+                            <a:srgbClr val="000000"/>
+                          </a:solidFill>
+                          <a:latin typeface="Microsoft JhengHei"/>
+                        </a:rPr>
+                        <a:t>/</a:t>
+                      </a:r>
+                      <a:r>
+                        <a:rPr lang="zh-TW" altLang="en-US" sz="780" b="0" dirty="0">
+                          <a:solidFill>
+                            <a:srgbClr val="000000"/>
+                          </a:solidFill>
+                          <a:latin typeface="Microsoft JhengHei"/>
+                        </a:rPr>
+                        <a:t>賣</a:t>
+                      </a:r>
+                      <a:r>
+                        <a:rPr lang="en-US" altLang="zh-TW" sz="780" b="0" dirty="0">
+                          <a:solidFill>
+                            <a:srgbClr val="000000"/>
+                          </a:solidFill>
+                          <a:latin typeface="Microsoft JhengHei"/>
+                        </a:rPr>
+                        <a:t>/</a:t>
+                      </a:r>
+                      <a:r>
+                        <a:rPr lang="zh-TW" altLang="en-US" sz="780" b="0" dirty="0">
+                          <a:solidFill>
+                            <a:srgbClr val="000000"/>
+                          </a:solidFill>
+                          <a:latin typeface="Microsoft JhengHei"/>
+                        </a:rPr>
+                        <a:t>持有 決策、更新後的持倉、記憶庫資料分數獎懲及分數變動</a:t>
                       </a:r>
                     </a:p>
                   </a:txBody>
@@ -5649,18 +7361,36 @@
                 </a:tc>
                 <a:tc>
                   <a:txBody>
-                    <a:bodyPr wrap="square"/>
+                    <a:bodyPr/>
                     <a:lstStyle/>
                     <a:p>
                       <a:pPr algn="l"/>
                       <a:r>
-                        <a:rPr sz="780" b="0">
-                          <a:solidFill>
-                            <a:srgbClr val="000000"/>
-                          </a:solidFill>
-                          <a:latin typeface="Microsoft JhengHei"/>
-                        </a:rPr>
-                        <a:t>把推理轉成模擬倉位動作,並用實際績效回頭校正記憶的可信度</a:t>
+                        <a:rPr lang="zh-TW" altLang="en-US" sz="780" b="0" dirty="0">
+                          <a:solidFill>
+                            <a:srgbClr val="000000"/>
+                          </a:solidFill>
+                          <a:latin typeface="Microsoft JhengHei"/>
+                        </a:rPr>
+                        <a:t>把推理轉成倉位動作</a:t>
+                      </a:r>
+                      <a:r>
+                        <a:rPr lang="en-US" altLang="zh-TW" sz="780" b="0" dirty="0">
+                          <a:solidFill>
+                            <a:srgbClr val="000000"/>
+                          </a:solidFill>
+                          <a:latin typeface="Microsoft JhengHei"/>
+                        </a:rPr>
+                        <a:t>,</a:t>
+                      </a:r>
+                      <a:r>
+                        <a:rPr lang="zh-TW" altLang="en-US" sz="780" b="0" dirty="0">
+                          <a:solidFill>
+                            <a:srgbClr val="000000"/>
+                          </a:solidFill>
+                          <a:latin typeface="Microsoft JhengHei"/>
+                        </a:rPr>
+                        <a:t>並用實際績效回頭校正資料的可信度</a:t>
                       </a:r>
                     </a:p>
                   </a:txBody>
@@ -5670,11 +7400,51 @@
                     </a:solidFill>
                   </a:tcPr>
                 </a:tc>
+                <a:extLst>
+                  <a:ext uri="{0D108BD9-81ED-4DB2-BD59-A6C34878D82A}">
+                    <a16:rowId xmlns:a16="http://schemas.microsoft.com/office/drawing/2014/main" val="10008"/>
+                  </a:ext>
+                </a:extLst>
               </a:tr>
             </a:tbl>
           </a:graphicData>
         </a:graphic>
       </p:graphicFrame>
+      <p:sp>
+        <p:nvSpPr>
+          <p:cNvPr id="30" name="TextBox 29"/>
+          <p:cNvSpPr txBox="1"/>
+          <p:nvPr/>
+        </p:nvSpPr>
+        <p:spPr>
+          <a:xfrm>
+            <a:off x="11010544" y="3386704"/>
+            <a:ext cx="1954480" cy="240000"/>
+          </a:xfrm>
+          <a:prstGeom prst="rect">
+            <a:avLst/>
+          </a:prstGeom>
+          <a:noFill/>
+        </p:spPr>
+        <p:txBody>
+          <a:bodyPr wrap="square" lIns="0" rIns="0" tIns="0" bIns="0">
+            <a:spAutoFit/>
+          </a:bodyPr>
+          <a:lstStyle/>
+          <a:p>
+            <a:pPr algn="ctr"/>
+            <a:r>
+              <a:rPr sz="750" b="1">
+                <a:solidFill>
+                  <a:srgbClr val="C03030"/>
+                </a:solidFill>
+                <a:latin typeface="Microsoft JhengHei"/>
+              </a:rPr>
+              <a:t>僅模擬,未連接真實券商下單</a:t>
+            </a:r>
+          </a:p>
+        </p:txBody>
+      </p:sp>
     </p:spTree>
   </p:cSld>
   <p:clrMapOvr>
@@ -5684,7 +7454,7 @@
 </file>
 
 <file path=ppt/slides/slide2.xml><?xml version="1.0" encoding="utf-8"?>
-<p:sld xmlns:a="http://schemas.openxmlformats.org/drawingml/2006/main" xmlns:p="http://schemas.openxmlformats.org/presentationml/2006/main" xmlns:r="http://schemas.openxmlformats.org/officeDocument/2006/relationships">
+<p:sld xmlns:a="http://schemas.openxmlformats.org/drawingml/2006/main" xmlns:r="http://schemas.openxmlformats.org/officeDocument/2006/relationships" xmlns:p="http://schemas.openxmlformats.org/presentationml/2006/main">
   <p:cSld>
     <p:spTree>
       <p:nvGrpSpPr>
@@ -5692,7 +7462,14 @@
         <p:cNvGrpSpPr/>
         <p:nvPr/>
       </p:nvGrpSpPr>
-      <p:grpSpPr/>
+      <p:grpSpPr>
+        <a:xfrm>
+          <a:off x="0" y="0"/>
+          <a:ext cx="0" cy="0"/>
+          <a:chOff x="0" y="0"/>
+          <a:chExt cx="0" cy="0"/>
+        </a:xfrm>
+      </p:grpSpPr>
       <p:sp>
         <p:nvSpPr>
           <p:cNvPr id="2" name="TextBox 1"/>
@@ -5710,7 +7487,7 @@
           <a:noFill/>
         </p:spPr>
         <p:txBody>
-          <a:bodyPr wrap="square" anchor="t" lIns="0" rIns="0" tIns="0" bIns="0">
+          <a:bodyPr wrap="square" lIns="0" tIns="0" rIns="0" bIns="0" anchor="t">
             <a:spAutoFit/>
           </a:bodyPr>
           <a:lstStyle/>
@@ -5749,7 +7526,7 @@
           <a:noFill/>
         </p:spPr>
         <p:txBody>
-          <a:bodyPr wrap="square" anchor="t" lIns="0" rIns="0" tIns="0" bIns="0">
+          <a:bodyPr wrap="square" lIns="0" tIns="0" rIns="0" bIns="0" anchor="t">
             <a:spAutoFit/>
           </a:bodyPr>
           <a:lstStyle/>
@@ -5799,14 +7576,32 @@
                 <a:tableStyleId>{5C22544A-7EE6-4342-B048-85BDC9FD1C3A}</a:tableStyleId>
               </a:tblPr>
               <a:tblGrid>
-                <a:gridCol w="1988819"/>
-                <a:gridCol w="4507992"/>
-                <a:gridCol w="6761988"/>
+                <a:gridCol w="1988819">
+                  <a:extLst>
+                    <a:ext uri="{9D8B030D-6E8A-4147-A177-3AD203B41FA5}">
+                      <a16:colId xmlns:a16="http://schemas.microsoft.com/office/drawing/2014/main" val="20000"/>
+                    </a:ext>
+                  </a:extLst>
+                </a:gridCol>
+                <a:gridCol w="4507992">
+                  <a:extLst>
+                    <a:ext uri="{9D8B030D-6E8A-4147-A177-3AD203B41FA5}">
+                      <a16:colId xmlns:a16="http://schemas.microsoft.com/office/drawing/2014/main" val="20001"/>
+                    </a:ext>
+                  </a:extLst>
+                </a:gridCol>
+                <a:gridCol w="6761988">
+                  <a:extLst>
+                    <a:ext uri="{9D8B030D-6E8A-4147-A177-3AD203B41FA5}">
+                      <a16:colId xmlns:a16="http://schemas.microsoft.com/office/drawing/2014/main" val="20002"/>
+                    </a:ext>
+                  </a:extLst>
+                </a:gridCol>
               </a:tblGrid>
               <a:tr h="310896">
                 <a:tc>
                   <a:txBody>
-                    <a:bodyPr wrap="square"/>
+                    <a:bodyPr/>
                     <a:lstStyle/>
                     <a:p>
                       <a:pPr algn="ctr"/>
@@ -5829,7 +7624,7 @@
                 </a:tc>
                 <a:tc>
                   <a:txBody>
-                    <a:bodyPr wrap="square"/>
+                    <a:bodyPr/>
                     <a:lstStyle/>
                     <a:p>
                       <a:pPr algn="ctr"/>
@@ -5852,7 +7647,7 @@
                 </a:tc>
                 <a:tc>
                   <a:txBody>
-                    <a:bodyPr wrap="square"/>
+                    <a:bodyPr/>
                     <a:lstStyle/>
                     <a:p>
                       <a:pPr algn="ctr"/>
@@ -5873,11 +7668,16 @@
                     </a:solidFill>
                   </a:tcPr>
                 </a:tc>
+                <a:extLst>
+                  <a:ext uri="{0D108BD9-81ED-4DB2-BD59-A6C34878D82A}">
+                    <a16:rowId xmlns:a16="http://schemas.microsoft.com/office/drawing/2014/main" val="10000"/>
+                  </a:ext>
+                </a:extLst>
               </a:tr>
               <a:tr h="428936">
                 <a:tc>
                   <a:txBody>
-                    <a:bodyPr wrap="square"/>
+                    <a:bodyPr/>
                     <a:lstStyle/>
                     <a:p>
                       <a:pPr algn="l"/>
@@ -5900,7 +7700,7 @@
                 </a:tc>
                 <a:tc>
                   <a:txBody>
-                    <a:bodyPr wrap="square"/>
+                    <a:bodyPr/>
                     <a:lstStyle/>
                     <a:p>
                       <a:pPr algn="l"/>
@@ -5923,7 +7723,7 @@
                 </a:tc>
                 <a:tc>
                   <a:txBody>
-                    <a:bodyPr wrap="square"/>
+                    <a:bodyPr/>
                     <a:lstStyle/>
                     <a:p>
                       <a:pPr algn="l"/>
@@ -5944,11 +7744,16 @@
                     </a:solidFill>
                   </a:tcPr>
                 </a:tc>
+                <a:extLst>
+                  <a:ext uri="{0D108BD9-81ED-4DB2-BD59-A6C34878D82A}">
+                    <a16:rowId xmlns:a16="http://schemas.microsoft.com/office/drawing/2014/main" val="10001"/>
+                  </a:ext>
+                </a:extLst>
               </a:tr>
               <a:tr h="428936">
                 <a:tc>
                   <a:txBody>
-                    <a:bodyPr wrap="square"/>
+                    <a:bodyPr/>
                     <a:lstStyle/>
                     <a:p>
                       <a:pPr algn="l"/>
@@ -5971,7 +7776,7 @@
                 </a:tc>
                 <a:tc>
                   <a:txBody>
-                    <a:bodyPr wrap="square"/>
+                    <a:bodyPr/>
                     <a:lstStyle/>
                     <a:p>
                       <a:pPr algn="l"/>
@@ -5994,7 +7799,7 @@
                 </a:tc>
                 <a:tc>
                   <a:txBody>
-                    <a:bodyPr wrap="square"/>
+                    <a:bodyPr/>
                     <a:lstStyle/>
                     <a:p>
                       <a:pPr algn="l"/>
@@ -6015,11 +7820,16 @@
                     </a:solidFill>
                   </a:tcPr>
                 </a:tc>
+                <a:extLst>
+                  <a:ext uri="{0D108BD9-81ED-4DB2-BD59-A6C34878D82A}">
+                    <a16:rowId xmlns:a16="http://schemas.microsoft.com/office/drawing/2014/main" val="10002"/>
+                  </a:ext>
+                </a:extLst>
               </a:tr>
               <a:tr h="428936">
                 <a:tc>
                   <a:txBody>
-                    <a:bodyPr wrap="square"/>
+                    <a:bodyPr/>
                     <a:lstStyle/>
                     <a:p>
                       <a:pPr algn="l"/>
@@ -6042,7 +7852,7 @@
                 </a:tc>
                 <a:tc>
                   <a:txBody>
-                    <a:bodyPr wrap="square"/>
+                    <a:bodyPr/>
                     <a:lstStyle/>
                     <a:p>
                       <a:pPr algn="l"/>
@@ -6065,7 +7875,7 @@
                 </a:tc>
                 <a:tc>
                   <a:txBody>
-                    <a:bodyPr wrap="square"/>
+                    <a:bodyPr/>
                     <a:lstStyle/>
                     <a:p>
                       <a:pPr algn="l"/>
@@ -6086,11 +7896,16 @@
                     </a:solidFill>
                   </a:tcPr>
                 </a:tc>
+                <a:extLst>
+                  <a:ext uri="{0D108BD9-81ED-4DB2-BD59-A6C34878D82A}">
+                    <a16:rowId xmlns:a16="http://schemas.microsoft.com/office/drawing/2014/main" val="10003"/>
+                  </a:ext>
+                </a:extLst>
               </a:tr>
               <a:tr h="428936">
                 <a:tc>
                   <a:txBody>
-                    <a:bodyPr wrap="square"/>
+                    <a:bodyPr/>
                     <a:lstStyle/>
                     <a:p>
                       <a:pPr algn="l"/>
@@ -6113,7 +7928,7 @@
                 </a:tc>
                 <a:tc>
                   <a:txBody>
-                    <a:bodyPr wrap="square"/>
+                    <a:bodyPr/>
                     <a:lstStyle/>
                     <a:p>
                       <a:pPr algn="l"/>
@@ -6136,7 +7951,7 @@
                 </a:tc>
                 <a:tc>
                   <a:txBody>
-                    <a:bodyPr wrap="square"/>
+                    <a:bodyPr/>
                     <a:lstStyle/>
                     <a:p>
                       <a:pPr algn="l"/>
@@ -6157,11 +7972,16 @@
                     </a:solidFill>
                   </a:tcPr>
                 </a:tc>
+                <a:extLst>
+                  <a:ext uri="{0D108BD9-81ED-4DB2-BD59-A6C34878D82A}">
+                    <a16:rowId xmlns:a16="http://schemas.microsoft.com/office/drawing/2014/main" val="10004"/>
+                  </a:ext>
+                </a:extLst>
               </a:tr>
               <a:tr h="428936">
                 <a:tc>
                   <a:txBody>
-                    <a:bodyPr wrap="square"/>
+                    <a:bodyPr/>
                     <a:lstStyle/>
                     <a:p>
                       <a:pPr algn="l"/>
@@ -6184,7 +8004,7 @@
                 </a:tc>
                 <a:tc>
                   <a:txBody>
-                    <a:bodyPr wrap="square"/>
+                    <a:bodyPr/>
                     <a:lstStyle/>
                     <a:p>
                       <a:pPr algn="l"/>
@@ -6207,7 +8027,7 @@
                 </a:tc>
                 <a:tc>
                   <a:txBody>
-                    <a:bodyPr wrap="square"/>
+                    <a:bodyPr/>
                     <a:lstStyle/>
                     <a:p>
                       <a:pPr algn="l"/>
@@ -6228,11 +8048,16 @@
                     </a:solidFill>
                   </a:tcPr>
                 </a:tc>
+                <a:extLst>
+                  <a:ext uri="{0D108BD9-81ED-4DB2-BD59-A6C34878D82A}">
+                    <a16:rowId xmlns:a16="http://schemas.microsoft.com/office/drawing/2014/main" val="10005"/>
+                  </a:ext>
+                </a:extLst>
               </a:tr>
               <a:tr h="428936">
                 <a:tc>
                   <a:txBody>
-                    <a:bodyPr wrap="square"/>
+                    <a:bodyPr/>
                     <a:lstStyle/>
                     <a:p>
                       <a:pPr algn="l"/>
@@ -6267,7 +8092,7 @@
                 </a:tc>
                 <a:tc>
                   <a:txBody>
-                    <a:bodyPr wrap="square"/>
+                    <a:bodyPr/>
                     <a:lstStyle/>
                     <a:p>
                       <a:pPr algn="l"/>
@@ -6290,7 +8115,7 @@
                 </a:tc>
                 <a:tc>
                   <a:txBody>
-                    <a:bodyPr wrap="square"/>
+                    <a:bodyPr/>
                     <a:lstStyle/>
                     <a:p>
                       <a:pPr algn="l"/>
@@ -6311,11 +8136,16 @@
                     </a:solidFill>
                   </a:tcPr>
                 </a:tc>
+                <a:extLst>
+                  <a:ext uri="{0D108BD9-81ED-4DB2-BD59-A6C34878D82A}">
+                    <a16:rowId xmlns:a16="http://schemas.microsoft.com/office/drawing/2014/main" val="10006"/>
+                  </a:ext>
+                </a:extLst>
               </a:tr>
               <a:tr h="428936">
                 <a:tc>
                   <a:txBody>
-                    <a:bodyPr wrap="square"/>
+                    <a:bodyPr/>
                     <a:lstStyle/>
                     <a:p>
                       <a:pPr algn="l"/>
@@ -6338,7 +8168,7 @@
                 </a:tc>
                 <a:tc>
                   <a:txBody>
-                    <a:bodyPr wrap="square"/>
+                    <a:bodyPr/>
                     <a:lstStyle/>
                     <a:p>
                       <a:pPr algn="l"/>
@@ -6361,7 +8191,7 @@
                 </a:tc>
                 <a:tc>
                   <a:txBody>
-                    <a:bodyPr wrap="square"/>
+                    <a:bodyPr/>
                     <a:lstStyle/>
                     <a:p>
                       <a:pPr algn="l"/>
@@ -6382,11 +8212,16 @@
                     </a:solidFill>
                   </a:tcPr>
                 </a:tc>
+                <a:extLst>
+                  <a:ext uri="{0D108BD9-81ED-4DB2-BD59-A6C34878D82A}">
+                    <a16:rowId xmlns:a16="http://schemas.microsoft.com/office/drawing/2014/main" val="10007"/>
+                  </a:ext>
+                </a:extLst>
               </a:tr>
               <a:tr h="428936">
                 <a:tc>
                   <a:txBody>
-                    <a:bodyPr wrap="square"/>
+                    <a:bodyPr/>
                     <a:lstStyle/>
                     <a:p>
                       <a:pPr algn="l"/>
@@ -6409,7 +8244,7 @@
                 </a:tc>
                 <a:tc>
                   <a:txBody>
-                    <a:bodyPr wrap="square"/>
+                    <a:bodyPr/>
                     <a:lstStyle/>
                     <a:p>
                       <a:pPr algn="l"/>
@@ -6432,7 +8267,7 @@
                 </a:tc>
                 <a:tc>
                   <a:txBody>
-                    <a:bodyPr wrap="square"/>
+                    <a:bodyPr/>
                     <a:lstStyle/>
                     <a:p>
                       <a:pPr algn="l"/>
@@ -6453,22 +8288,28 @@
                     </a:solidFill>
                   </a:tcPr>
                 </a:tc>
+                <a:extLst>
+                  <a:ext uri="{0D108BD9-81ED-4DB2-BD59-A6C34878D82A}">
+                    <a16:rowId xmlns:a16="http://schemas.microsoft.com/office/drawing/2014/main" val="10008"/>
+                  </a:ext>
+                </a:extLst>
               </a:tr>
               <a:tr h="428936">
                 <a:tc>
                   <a:txBody>
-                    <a:bodyPr wrap="square"/>
+                    <a:bodyPr/>
                     <a:lstStyle/>
                     <a:p>
                       <a:pPr algn="l"/>
                       <a:r>
                         <a:rPr sz="880" b="1">
                           <a:solidFill>
-                            <a:srgbClr val="000000"/>
-                          </a:solidFill>
-                          <a:latin typeface="Microsoft JhengHei"/>
-                        </a:rPr>
-                        <a:t>Decision-making</a:t>
+                            <a:srgbClr val="202020"/>
+                          </a:solidFill>
+                          <a:latin typeface="Microsoft JhengHei"/>
+                        </a:rPr>
+                        <a:t>Investment decisions
+and reflecting outcomes</a:t>
                       </a:r>
                     </a:p>
                   </a:txBody>
@@ -6480,7 +8321,7 @@
                 </a:tc>
                 <a:tc>
                   <a:txBody>
-                    <a:bodyPr wrap="square"/>
+                    <a:bodyPr/>
                     <a:lstStyle/>
                     <a:p>
                       <a:pPr algn="l"/>
@@ -6503,7 +8344,7 @@
                 </a:tc>
                 <a:tc>
                   <a:txBody>
-                    <a:bodyPr wrap="square"/>
+                    <a:bodyPr/>
                     <a:lstStyle/>
                     <a:p>
                       <a:pPr algn="l"/>
@@ -6524,11 +8365,16 @@
                     </a:solidFill>
                   </a:tcPr>
                 </a:tc>
+                <a:extLst>
+                  <a:ext uri="{0D108BD9-81ED-4DB2-BD59-A6C34878D82A}">
+                    <a16:rowId xmlns:a16="http://schemas.microsoft.com/office/drawing/2014/main" val="10009"/>
+                  </a:ext>
+                </a:extLst>
               </a:tr>
               <a:tr h="428936">
                 <a:tc>
                   <a:txBody>
-                    <a:bodyPr wrap="square"/>
+                    <a:bodyPr/>
                     <a:lstStyle/>
                     <a:p>
                       <a:pPr algn="l"/>
@@ -6551,7 +8397,7 @@
                 </a:tc>
                 <a:tc>
                   <a:txBody>
-                    <a:bodyPr wrap="square"/>
+                    <a:bodyPr/>
                     <a:lstStyle/>
                     <a:p>
                       <a:pPr algn="l"/>
@@ -6574,7 +8420,7 @@
                 </a:tc>
                 <a:tc>
                   <a:txBody>
-                    <a:bodyPr wrap="square"/>
+                    <a:bodyPr/>
                     <a:lstStyle/>
                     <a:p>
                       <a:pPr algn="l"/>
@@ -6595,11 +8441,16 @@
                     </a:solidFill>
                   </a:tcPr>
                 </a:tc>
+                <a:extLst>
+                  <a:ext uri="{0D108BD9-81ED-4DB2-BD59-A6C34878D82A}">
+                    <a16:rowId xmlns:a16="http://schemas.microsoft.com/office/drawing/2014/main" val="10010"/>
+                  </a:ext>
+                </a:extLst>
               </a:tr>
               <a:tr h="428936">
                 <a:tc>
                   <a:txBody>
-                    <a:bodyPr wrap="square"/>
+                    <a:bodyPr/>
                     <a:lstStyle/>
                     <a:p>
                       <a:pPr algn="l"/>
@@ -6622,7 +8473,7 @@
                 </a:tc>
                 <a:tc>
                   <a:txBody>
-                    <a:bodyPr wrap="square"/>
+                    <a:bodyPr/>
                     <a:lstStyle/>
                     <a:p>
                       <a:pPr algn="l"/>
@@ -6645,7 +8496,7 @@
                 </a:tc>
                 <a:tc>
                   <a:txBody>
-                    <a:bodyPr wrap="square"/>
+                    <a:bodyPr/>
                     <a:lstStyle/>
                     <a:p>
                       <a:pPr algn="l"/>
@@ -6666,6 +8517,11 @@
                     </a:solidFill>
                   </a:tcPr>
                 </a:tc>
+                <a:extLst>
+                  <a:ext uri="{0D108BD9-81ED-4DB2-BD59-A6C34878D82A}">
+                    <a16:rowId xmlns:a16="http://schemas.microsoft.com/office/drawing/2014/main" val="10011"/>
+                  </a:ext>
+                </a:extLst>
               </a:tr>
             </a:tbl>
           </a:graphicData>
@@ -6688,7 +8544,7 @@
           <a:noFill/>
         </p:spPr>
         <p:txBody>
-          <a:bodyPr wrap="square" anchor="t" lIns="0" rIns="0" tIns="0" bIns="0">
+          <a:bodyPr wrap="square" lIns="0" tIns="0" rIns="0" bIns="0" anchor="t">
             <a:spAutoFit/>
           </a:bodyPr>
           <a:lstStyle/>
@@ -6751,6 +8607,7 @@
           <a:lstStyle/>
           <a:p>
             <a:pPr algn="ctr"/>
+            <a:endParaRPr/>
           </a:p>
         </p:txBody>
       </p:sp>
@@ -6771,7 +8628,7 @@
           <a:noFill/>
         </p:spPr>
         <p:txBody>
-          <a:bodyPr wrap="square" anchor="t" lIns="0" rIns="0" tIns="0" bIns="0">
+          <a:bodyPr wrap="square" lIns="0" tIns="0" rIns="0" bIns="0" anchor="t">
             <a:spAutoFit/>
           </a:bodyPr>
           <a:lstStyle/>
@@ -6845,15 +8702,12 @@
                 <a:spcPct val="115000"/>
               </a:lnSpc>
             </a:pPr>
-            <a:r>
-              <a:rPr sz="950" b="0">
-                <a:solidFill>
-                  <a:srgbClr val="D8DEE5"/>
-                </a:solidFill>
-                <a:latin typeface="Microsoft JhengHei"/>
-              </a:rPr>
-              <a:t/>
-            </a:r>
+            <a:endParaRPr sz="950" b="0">
+              <a:solidFill>
+                <a:srgbClr val="D8DEE5"/>
+              </a:solidFill>
+              <a:latin typeface="Microsoft JhengHei"/>
+            </a:endParaRPr>
           </a:p>
           <a:p>
             <a:pPr algn="l">
@@ -6906,7 +8760,7 @@
           <a:noFill/>
         </p:spPr>
         <p:txBody>
-          <a:bodyPr wrap="square" anchor="t" lIns="0" rIns="0" tIns="0" bIns="0">
+          <a:bodyPr wrap="square" lIns="0" tIns="0" rIns="0" bIns="0" anchor="t">
             <a:spAutoFit/>
           </a:bodyPr>
           <a:lstStyle/>
@@ -7001,7 +8855,7 @@
 </file>
 
 <file path=ppt/slides/slide3.xml><?xml version="1.0" encoding="utf-8"?>
-<p:sld xmlns:a="http://schemas.openxmlformats.org/drawingml/2006/main" xmlns:p="http://schemas.openxmlformats.org/presentationml/2006/main" xmlns:r="http://schemas.openxmlformats.org/officeDocument/2006/relationships">
+<p:sld xmlns:a="http://schemas.openxmlformats.org/drawingml/2006/main" xmlns:r="http://schemas.openxmlformats.org/officeDocument/2006/relationships" xmlns:p="http://schemas.openxmlformats.org/presentationml/2006/main">
   <p:cSld>
     <p:spTree>
       <p:nvGrpSpPr>
@@ -7009,7 +8863,14 @@
         <p:cNvGrpSpPr/>
         <p:nvPr/>
       </p:nvGrpSpPr>
-      <p:grpSpPr/>
+      <p:grpSpPr>
+        <a:xfrm>
+          <a:off x="0" y="0"/>
+          <a:ext cx="0" cy="0"/>
+          <a:chOff x="0" y="0"/>
+          <a:chExt cx="0" cy="0"/>
+        </a:xfrm>
+      </p:grpSpPr>
       <p:sp>
         <p:nvSpPr>
           <p:cNvPr id="2" name="TextBox 1"/>
@@ -7027,7 +8888,7 @@
           <a:noFill/>
         </p:spPr>
         <p:txBody>
-          <a:bodyPr wrap="square" anchor="t" lIns="0" rIns="0" tIns="0" bIns="0">
+          <a:bodyPr wrap="square" lIns="0" tIns="0" rIns="0" bIns="0" anchor="t">
             <a:spAutoFit/>
           </a:bodyPr>
           <a:lstStyle/>
@@ -7066,7 +8927,7 @@
           <a:noFill/>
         </p:spPr>
         <p:txBody>
-          <a:bodyPr wrap="square" anchor="t" lIns="0" rIns="0" tIns="0" bIns="0">
+          <a:bodyPr wrap="square" lIns="0" tIns="0" rIns="0" bIns="0" anchor="t">
             <a:spAutoFit/>
           </a:bodyPr>
           <a:lstStyle/>
@@ -7131,6 +8992,7 @@
           <a:lstStyle/>
           <a:p>
             <a:pPr algn="ctr"/>
+            <a:endParaRPr/>
           </a:p>
         </p:txBody>
       </p:sp>
@@ -7151,7 +9013,7 @@
           <a:noFill/>
         </p:spPr>
         <p:txBody>
-          <a:bodyPr wrap="square" anchor="t" lIns="0" rIns="0" tIns="0" bIns="0">
+          <a:bodyPr wrap="square" lIns="0" tIns="0" rIns="0" bIns="0" anchor="t">
             <a:spAutoFit/>
           </a:bodyPr>
           <a:lstStyle/>
@@ -7242,7 +9104,7 @@
           <a:noFill/>
         </p:spPr>
         <p:txBody>
-          <a:bodyPr wrap="square" anchor="t" lIns="0" rIns="0" tIns="0" bIns="0">
+          <a:bodyPr wrap="square" lIns="0" tIns="0" rIns="0" bIns="0" anchor="t">
             <a:spAutoFit/>
           </a:bodyPr>
           <a:lstStyle/>
@@ -7283,14 +9145,32 @@
                 <a:tableStyleId>{5C22544A-7EE6-4342-B048-85BDC9FD1C3A}</a:tableStyleId>
               </a:tblPr>
               <a:tblGrid>
-                <a:gridCol w="1371600"/>
-                <a:gridCol w="6675120"/>
-                <a:gridCol w="3200400"/>
+                <a:gridCol w="1371600">
+                  <a:extLst>
+                    <a:ext uri="{9D8B030D-6E8A-4147-A177-3AD203B41FA5}">
+                      <a16:colId xmlns:a16="http://schemas.microsoft.com/office/drawing/2014/main" val="20000"/>
+                    </a:ext>
+                  </a:extLst>
+                </a:gridCol>
+                <a:gridCol w="6675120">
+                  <a:extLst>
+                    <a:ext uri="{9D8B030D-6E8A-4147-A177-3AD203B41FA5}">
+                      <a16:colId xmlns:a16="http://schemas.microsoft.com/office/drawing/2014/main" val="20001"/>
+                    </a:ext>
+                  </a:extLst>
+                </a:gridCol>
+                <a:gridCol w="3200400">
+                  <a:extLst>
+                    <a:ext uri="{9D8B030D-6E8A-4147-A177-3AD203B41FA5}">
+                      <a16:colId xmlns:a16="http://schemas.microsoft.com/office/drawing/2014/main" val="20002"/>
+                    </a:ext>
+                  </a:extLst>
+                </a:gridCol>
               </a:tblGrid>
               <a:tr h="274320">
                 <a:tc>
                   <a:txBody>
-                    <a:bodyPr wrap="square"/>
+                    <a:bodyPr/>
                     <a:lstStyle/>
                     <a:p>
                       <a:pPr algn="ctr"/>
@@ -7313,7 +9193,7 @@
                 </a:tc>
                 <a:tc>
                   <a:txBody>
-                    <a:bodyPr wrap="square"/>
+                    <a:bodyPr/>
                     <a:lstStyle/>
                     <a:p>
                       <a:pPr algn="ctr"/>
@@ -7336,7 +9216,7 @@
                 </a:tc>
                 <a:tc>
                   <a:txBody>
-                    <a:bodyPr wrap="square"/>
+                    <a:bodyPr/>
                     <a:lstStyle/>
                     <a:p>
                       <a:pPr algn="ctr"/>
@@ -7357,11 +9237,16 @@
                     </a:solidFill>
                   </a:tcPr>
                 </a:tc>
+                <a:extLst>
+                  <a:ext uri="{0D108BD9-81ED-4DB2-BD59-A6C34878D82A}">
+                    <a16:rowId xmlns:a16="http://schemas.microsoft.com/office/drawing/2014/main" val="10000"/>
+                  </a:ext>
+                </a:extLst>
               </a:tr>
               <a:tr h="301752">
                 <a:tc>
                   <a:txBody>
-                    <a:bodyPr wrap="square"/>
+                    <a:bodyPr/>
                     <a:lstStyle/>
                     <a:p>
                       <a:pPr algn="ctr"/>
@@ -7384,7 +9269,7 @@
                 </a:tc>
                 <a:tc>
                   <a:txBody>
-                    <a:bodyPr wrap="square"/>
+                    <a:bodyPr/>
                     <a:lstStyle/>
                     <a:p>
                       <a:pPr algn="l"/>
@@ -7407,7 +9292,7 @@
                 </a:tc>
                 <a:tc>
                   <a:txBody>
-                    <a:bodyPr wrap="square"/>
+                    <a:bodyPr/>
                     <a:lstStyle/>
                     <a:p>
                       <a:pPr algn="l"/>
@@ -7428,11 +9313,16 @@
                     </a:solidFill>
                   </a:tcPr>
                 </a:tc>
+                <a:extLst>
+                  <a:ext uri="{0D108BD9-81ED-4DB2-BD59-A6C34878D82A}">
+                    <a16:rowId xmlns:a16="http://schemas.microsoft.com/office/drawing/2014/main" val="10001"/>
+                  </a:ext>
+                </a:extLst>
               </a:tr>
               <a:tr h="301752">
                 <a:tc>
                   <a:txBody>
-                    <a:bodyPr wrap="square"/>
+                    <a:bodyPr/>
                     <a:lstStyle/>
                     <a:p>
                       <a:pPr algn="ctr"/>
@@ -7455,7 +9345,7 @@
                 </a:tc>
                 <a:tc>
                   <a:txBody>
-                    <a:bodyPr wrap="square"/>
+                    <a:bodyPr/>
                     <a:lstStyle/>
                     <a:p>
                       <a:pPr algn="l"/>
@@ -7478,7 +9368,7 @@
                 </a:tc>
                 <a:tc>
                   <a:txBody>
-                    <a:bodyPr wrap="square"/>
+                    <a:bodyPr/>
                     <a:lstStyle/>
                     <a:p>
                       <a:pPr algn="l"/>
@@ -7499,11 +9389,16 @@
                     </a:solidFill>
                   </a:tcPr>
                 </a:tc>
+                <a:extLst>
+                  <a:ext uri="{0D108BD9-81ED-4DB2-BD59-A6C34878D82A}">
+                    <a16:rowId xmlns:a16="http://schemas.microsoft.com/office/drawing/2014/main" val="10002"/>
+                  </a:ext>
+                </a:extLst>
               </a:tr>
               <a:tr h="301752">
                 <a:tc>
                   <a:txBody>
-                    <a:bodyPr wrap="square"/>
+                    <a:bodyPr/>
                     <a:lstStyle/>
                     <a:p>
                       <a:pPr algn="ctr"/>
@@ -7526,7 +9421,7 @@
                 </a:tc>
                 <a:tc>
                   <a:txBody>
-                    <a:bodyPr wrap="square"/>
+                    <a:bodyPr/>
                     <a:lstStyle/>
                     <a:p>
                       <a:pPr algn="l"/>
@@ -7549,7 +9444,7 @@
                 </a:tc>
                 <a:tc>
                   <a:txBody>
-                    <a:bodyPr wrap="square"/>
+                    <a:bodyPr/>
                     <a:lstStyle/>
                     <a:p>
                       <a:pPr algn="l"/>
@@ -7570,6 +9465,11 @@
                     </a:solidFill>
                   </a:tcPr>
                 </a:tc>
+                <a:extLst>
+                  <a:ext uri="{0D108BD9-81ED-4DB2-BD59-A6C34878D82A}">
+                    <a16:rowId xmlns:a16="http://schemas.microsoft.com/office/drawing/2014/main" val="10003"/>
+                  </a:ext>
+                </a:extLst>
               </a:tr>
             </a:tbl>
           </a:graphicData>
@@ -7592,7 +9492,7 @@
           <a:noFill/>
         </p:spPr>
         <p:txBody>
-          <a:bodyPr wrap="square" anchor="t" lIns="0" rIns="0" tIns="0" bIns="0">
+          <a:bodyPr wrap="square" lIns="0" tIns="0" rIns="0" bIns="0" anchor="t">
             <a:spAutoFit/>
           </a:bodyPr>
           <a:lstStyle/>
@@ -7631,7 +9531,7 @@
           <a:noFill/>
         </p:spPr>
         <p:txBody>
-          <a:bodyPr wrap="square" anchor="t" lIns="0" rIns="0" tIns="0" bIns="0">
+          <a:bodyPr wrap="square" lIns="0" tIns="0" rIns="0" bIns="0" anchor="t">
             <a:spAutoFit/>
           </a:bodyPr>
           <a:lstStyle/>
@@ -7723,7 +9623,7 @@
                 </a:solidFill>
                 <a:latin typeface="Microsoft JhengHei"/>
               </a:rPr>
-              <a:t> — 把記憶得到的洞見轉換成投資決策(對應 Reflect＋Decision-making)</a:t>
+              <a:t> — 把記憶得到的洞見轉換成投資決策(對應 Reflect＋Investment decisions and reflecting outcomes)</a:t>
             </a:r>
           </a:p>
         </p:txBody>
@@ -7745,7 +9645,7 @@
           <a:noFill/>
         </p:spPr>
         <p:txBody>
-          <a:bodyPr wrap="square" anchor="t" lIns="0" rIns="0" tIns="0" bIns="0">
+          <a:bodyPr wrap="square" lIns="0" tIns="0" rIns="0" bIns="0" anchor="t">
             <a:spAutoFit/>
           </a:bodyPr>
           <a:lstStyle/>
@@ -7784,7 +9684,7 @@
           <a:noFill/>
         </p:spPr>
         <p:txBody>
-          <a:bodyPr wrap="square" anchor="t" lIns="0" rIns="0" tIns="0" bIns="0">
+          <a:bodyPr wrap="square" lIns="0" tIns="0" rIns="0" bIns="0" anchor="t">
             <a:spAutoFit/>
           </a:bodyPr>
           <a:lstStyle/>
@@ -7815,7 +9715,7 @@
 </file>
 
 <file path=ppt/slides/slide4.xml><?xml version="1.0" encoding="utf-8"?>
-<p:sld xmlns:a="http://schemas.openxmlformats.org/drawingml/2006/main" xmlns:p="http://schemas.openxmlformats.org/presentationml/2006/main" xmlns:r="http://schemas.openxmlformats.org/officeDocument/2006/relationships">
+<p:sld xmlns:a="http://schemas.openxmlformats.org/drawingml/2006/main" xmlns:r="http://schemas.openxmlformats.org/officeDocument/2006/relationships" xmlns:p="http://schemas.openxmlformats.org/presentationml/2006/main">
   <p:cSld>
     <p:spTree>
       <p:nvGrpSpPr>
@@ -7823,7 +9723,14 @@
         <p:cNvGrpSpPr/>
         <p:nvPr/>
       </p:nvGrpSpPr>
-      <p:grpSpPr/>
+      <p:grpSpPr>
+        <a:xfrm>
+          <a:off x="0" y="0"/>
+          <a:ext cx="0" cy="0"/>
+          <a:chOff x="0" y="0"/>
+          <a:chExt cx="0" cy="0"/>
+        </a:xfrm>
+      </p:grpSpPr>
       <p:sp>
         <p:nvSpPr>
           <p:cNvPr id="2" name="TextBox 1"/>
@@ -7841,7 +9748,7 @@
           <a:noFill/>
         </p:spPr>
         <p:txBody>
-          <a:bodyPr wrap="square" anchor="t" lIns="0" rIns="0" tIns="0" bIns="0">
+          <a:bodyPr wrap="square" lIns="0" tIns="0" rIns="0" bIns="0" anchor="t">
             <a:spAutoFit/>
           </a:bodyPr>
           <a:lstStyle/>
@@ -7880,7 +9787,7 @@
           <a:noFill/>
         </p:spPr>
         <p:txBody>
-          <a:bodyPr wrap="square" anchor="t" lIns="0" rIns="0" tIns="0" bIns="0">
+          <a:bodyPr wrap="square" lIns="0" tIns="0" rIns="0" bIns="0" anchor="t">
             <a:spAutoFit/>
           </a:bodyPr>
           <a:lstStyle/>
@@ -7966,7 +9873,7 @@
           </a:fontRef>
         </p:style>
         <p:txBody>
-          <a:bodyPr rtlCol="0" anchor="ctr" wrap="square" lIns="30000" rIns="30000"/>
+          <a:bodyPr wrap="square" lIns="30000" rIns="30000" rtlCol="0" anchor="ctr"/>
           <a:lstStyle/>
           <a:p>
             <a:pPr algn="ctr"/>
@@ -8035,6 +9942,7 @@
           <a:lstStyle/>
           <a:p>
             <a:pPr algn="ctr"/>
+            <a:endParaRPr/>
           </a:p>
         </p:txBody>
       </p:sp>
@@ -8077,7 +9985,7 @@
           </a:fontRef>
         </p:style>
         <p:txBody>
-          <a:bodyPr rtlCol="0" anchor="ctr" wrap="square" lIns="30000" rIns="30000"/>
+          <a:bodyPr wrap="square" lIns="30000" rIns="30000" rtlCol="0" anchor="ctr"/>
           <a:lstStyle/>
           <a:p>
             <a:pPr algn="ctr"/>
@@ -8134,6 +10042,7 @@
           <a:lstStyle/>
           <a:p>
             <a:pPr algn="ctr"/>
+            <a:endParaRPr/>
           </a:p>
         </p:txBody>
       </p:sp>
@@ -8176,7 +10085,7 @@
           </a:fontRef>
         </p:style>
         <p:txBody>
-          <a:bodyPr rtlCol="0" anchor="ctr" wrap="square" lIns="30000" rIns="30000"/>
+          <a:bodyPr wrap="square" lIns="30000" rIns="30000" rtlCol="0" anchor="ctr"/>
           <a:lstStyle/>
           <a:p>
             <a:pPr algn="ctr"/>
@@ -8233,6 +10142,7 @@
           <a:lstStyle/>
           <a:p>
             <a:pPr algn="ctr"/>
+            <a:endParaRPr/>
           </a:p>
         </p:txBody>
       </p:sp>
@@ -8275,7 +10185,7 @@
           </a:fontRef>
         </p:style>
         <p:txBody>
-          <a:bodyPr rtlCol="0" anchor="ctr" wrap="square" lIns="30000" rIns="30000"/>
+          <a:bodyPr wrap="square" lIns="30000" rIns="30000" rtlCol="0" anchor="ctr"/>
           <a:lstStyle/>
           <a:p>
             <a:pPr algn="ctr"/>
@@ -8344,6 +10254,7 @@
           <a:lstStyle/>
           <a:p>
             <a:pPr algn="ctr"/>
+            <a:endParaRPr/>
           </a:p>
         </p:txBody>
       </p:sp>
@@ -8386,7 +10297,7 @@
           </a:fontRef>
         </p:style>
         <p:txBody>
-          <a:bodyPr rtlCol="0" anchor="ctr" wrap="square" lIns="30000" rIns="30000"/>
+          <a:bodyPr wrap="square" lIns="30000" rIns="30000" rtlCol="0" anchor="ctr"/>
           <a:lstStyle/>
           <a:p>
             <a:pPr algn="ctr"/>
@@ -8419,7 +10330,7 @@
           <a:noFill/>
         </p:spPr>
         <p:txBody>
-          <a:bodyPr wrap="square" anchor="t" lIns="0" rIns="0" tIns="0" bIns="0">
+          <a:bodyPr wrap="square" lIns="0" tIns="0" rIns="0" bIns="0" anchor="t">
             <a:spAutoFit/>
           </a:bodyPr>
           <a:lstStyle/>
@@ -8480,7 +10391,7 @@
           </a:fontRef>
         </p:style>
         <p:txBody>
-          <a:bodyPr rtlCol="0" anchor="ctr" wrap="square" lIns="30000" rIns="30000"/>
+          <a:bodyPr wrap="square" lIns="30000" rIns="30000" rtlCol="0" anchor="ctr"/>
           <a:lstStyle/>
           <a:p>
             <a:pPr algn="ctr"/>
@@ -8547,7 +10458,7 @@
           </a:fontRef>
         </p:style>
         <p:txBody>
-          <a:bodyPr rtlCol="0" anchor="ctr" wrap="square" lIns="30000" rIns="30000"/>
+          <a:bodyPr wrap="square" lIns="30000" rIns="30000" rtlCol="0" anchor="ctr"/>
           <a:lstStyle/>
           <a:p>
             <a:pPr algn="ctr"/>
@@ -8592,7 +10503,7 @@
           <a:noFill/>
         </p:spPr>
         <p:txBody>
-          <a:bodyPr wrap="square" anchor="t" lIns="0" rIns="0" tIns="0" bIns="0">
+          <a:bodyPr wrap="square" lIns="0" tIns="0" rIns="0" bIns="0" anchor="t">
             <a:spAutoFit/>
           </a:bodyPr>
           <a:lstStyle/>
@@ -8657,6 +10568,7 @@
           <a:lstStyle/>
           <a:p>
             <a:pPr algn="ctr"/>
+            <a:endParaRPr/>
           </a:p>
         </p:txBody>
       </p:sp>
@@ -8677,7 +10589,7 @@
           <a:noFill/>
         </p:spPr>
         <p:txBody>
-          <a:bodyPr wrap="square" anchor="t" lIns="0" rIns="0" tIns="0" bIns="0">
+          <a:bodyPr wrap="square" lIns="0" tIns="0" rIns="0" bIns="0" anchor="t">
             <a:spAutoFit/>
           </a:bodyPr>
           <a:lstStyle/>
@@ -8750,7 +10662,7 @@
           <a:noFill/>
         </p:spPr>
         <p:txBody>
-          <a:bodyPr wrap="square" anchor="t" lIns="0" rIns="0" tIns="0" bIns="0">
+          <a:bodyPr wrap="square" lIns="0" tIns="0" rIns="0" bIns="0" anchor="t">
             <a:spAutoFit/>
           </a:bodyPr>
           <a:lstStyle/>
@@ -8811,7 +10723,7 @@
           </a:fontRef>
         </p:style>
         <p:txBody>
-          <a:bodyPr rtlCol="0" anchor="ctr" wrap="square" lIns="30000" rIns="30000"/>
+          <a:bodyPr wrap="square" lIns="30000" rIns="30000" rtlCol="0" anchor="ctr"/>
           <a:lstStyle/>
           <a:p>
             <a:pPr algn="ctr"/>
@@ -8878,7 +10790,7 @@
           </a:fontRef>
         </p:style>
         <p:txBody>
-          <a:bodyPr rtlCol="0" anchor="ctr" wrap="square" lIns="30000" rIns="30000"/>
+          <a:bodyPr wrap="square" lIns="30000" rIns="30000" rtlCol="0" anchor="ctr"/>
           <a:lstStyle/>
           <a:p>
             <a:pPr algn="ctr"/>
@@ -8945,7 +10857,7 @@
           </a:fontRef>
         </p:style>
         <p:txBody>
-          <a:bodyPr rtlCol="0" anchor="ctr" wrap="square" lIns="30000" rIns="30000"/>
+          <a:bodyPr wrap="square" lIns="30000" rIns="30000" rtlCol="0" anchor="ctr"/>
           <a:lstStyle/>
           <a:p>
             <a:pPr algn="ctr"/>
@@ -9012,7 +10924,7 @@
           </a:fontRef>
         </p:style>
         <p:txBody>
-          <a:bodyPr rtlCol="0" anchor="ctr" wrap="square" lIns="30000" rIns="30000"/>
+          <a:bodyPr wrap="square" lIns="30000" rIns="30000" rtlCol="0" anchor="ctr"/>
           <a:lstStyle/>
           <a:p>
             <a:pPr algn="ctr"/>
@@ -9079,7 +10991,7 @@
           </a:fontRef>
         </p:style>
         <p:txBody>
-          <a:bodyPr rtlCol="0" anchor="ctr" wrap="square" lIns="30000" rIns="30000"/>
+          <a:bodyPr wrap="square" lIns="30000" rIns="30000" rtlCol="0" anchor="ctr"/>
           <a:lstStyle/>
           <a:p>
             <a:pPr algn="ctr"/>
@@ -9136,7 +11048,7 @@
           <a:noFill/>
         </p:spPr>
         <p:txBody>
-          <a:bodyPr wrap="square" anchor="t" lIns="0" rIns="0" tIns="0" bIns="0">
+          <a:bodyPr wrap="square" lIns="0" tIns="0" rIns="0" bIns="0" anchor="t">
             <a:spAutoFit/>
           </a:bodyPr>
           <a:lstStyle/>
@@ -9509,4 +11421,319 @@
   </a:objectDefaults>
   <a:extraClrSchemeLst/>
 </a:theme>
+</file>
+
+<file path=ppt/theme/theme2.xml><?xml version="1.0" encoding="utf-8"?>
+<a:theme xmlns:a="http://schemas.openxmlformats.org/drawingml/2006/main" name="Office 佈景主題">
+  <a:themeElements>
+    <a:clrScheme name="Office">
+      <a:dk1>
+        <a:sysClr val="windowText" lastClr="000000"/>
+      </a:dk1>
+      <a:lt1>
+        <a:sysClr val="window" lastClr="FFFFFF"/>
+      </a:lt1>
+      <a:dk2>
+        <a:srgbClr val="0E2841"/>
+      </a:dk2>
+      <a:lt2>
+        <a:srgbClr val="E8E8E8"/>
+      </a:lt2>
+      <a:accent1>
+        <a:srgbClr val="156082"/>
+      </a:accent1>
+      <a:accent2>
+        <a:srgbClr val="E97132"/>
+      </a:accent2>
+      <a:accent3>
+        <a:srgbClr val="196B24"/>
+      </a:accent3>
+      <a:accent4>
+        <a:srgbClr val="0F9ED5"/>
+      </a:accent4>
+      <a:accent5>
+        <a:srgbClr val="A02B93"/>
+      </a:accent5>
+      <a:accent6>
+        <a:srgbClr val="4EA72E"/>
+      </a:accent6>
+      <a:hlink>
+        <a:srgbClr val="467886"/>
+      </a:hlink>
+      <a:folHlink>
+        <a:srgbClr val="96607D"/>
+      </a:folHlink>
+    </a:clrScheme>
+    <a:fontScheme name="Office">
+      <a:majorFont>
+        <a:latin typeface="Aptos Display" panose="02110004020202020204"/>
+        <a:ea typeface=""/>
+        <a:cs typeface=""/>
+        <a:font script="Jpan" typeface="游ゴシック Light"/>
+        <a:font script="Hang" typeface="맑은 고딕"/>
+        <a:font script="Hans" typeface="等线 Light"/>
+        <a:font script="Hant" typeface="新細明體"/>
+        <a:font script="Arab" typeface="Times New Roman"/>
+        <a:font script="Hebr" typeface="Times New Roman"/>
+        <a:font script="Thai" typeface="Angsana New"/>
+        <a:font script="Ethi" typeface="Nyala"/>
+        <a:font script="Beng" typeface="Vrinda"/>
+        <a:font script="Gujr" typeface="Shruti"/>
+        <a:font script="Khmr" typeface="MoolBoran"/>
+        <a:font script="Knda" typeface="Tunga"/>
+        <a:font script="Guru" typeface="Raavi"/>
+        <a:font script="Cans" typeface="Euphemia"/>
+        <a:font script="Cher" typeface="Plantagenet Cherokee"/>
+        <a:font script="Yiii" typeface="Microsoft Yi Baiti"/>
+        <a:font script="Tibt" typeface="Microsoft Himalaya"/>
+        <a:font script="Thaa" typeface="MV Boli"/>
+        <a:font script="Deva" typeface="Mangal"/>
+        <a:font script="Telu" typeface="Gautami"/>
+        <a:font script="Taml" typeface="Latha"/>
+        <a:font script="Syrc" typeface="Estrangelo Edessa"/>
+        <a:font script="Orya" typeface="Kalinga"/>
+        <a:font script="Mlym" typeface="Kartika"/>
+        <a:font script="Laoo" typeface="DokChampa"/>
+        <a:font script="Sinh" typeface="Iskoola Pota"/>
+        <a:font script="Mong" typeface="Mongolian Baiti"/>
+        <a:font script="Viet" typeface="Times New Roman"/>
+        <a:font script="Uigh" typeface="Microsoft Uighur"/>
+        <a:font script="Geor" typeface="Sylfaen"/>
+        <a:font script="Armn" typeface="Arial"/>
+        <a:font script="Bugi" typeface="Leelawadee UI"/>
+        <a:font script="Bopo" typeface="Microsoft JhengHei"/>
+        <a:font script="Java" typeface="Javanese Text"/>
+        <a:font script="Lisu" typeface="Segoe UI"/>
+        <a:font script="Mymr" typeface="Myanmar Text"/>
+        <a:font script="Nkoo" typeface="Ebrima"/>
+        <a:font script="Olck" typeface="Nirmala UI"/>
+        <a:font script="Osma" typeface="Ebrima"/>
+        <a:font script="Phag" typeface="Phagspa"/>
+        <a:font script="Syrn" typeface="Estrangelo Edessa"/>
+        <a:font script="Syrj" typeface="Estrangelo Edessa"/>
+        <a:font script="Syre" typeface="Estrangelo Edessa"/>
+        <a:font script="Sora" typeface="Nirmala UI"/>
+        <a:font script="Tale" typeface="Microsoft Tai Le"/>
+        <a:font script="Talu" typeface="Microsoft New Tai Lue"/>
+        <a:font script="Tfng" typeface="Ebrima"/>
+      </a:majorFont>
+      <a:minorFont>
+        <a:latin typeface="Aptos" panose="02110004020202020204"/>
+        <a:ea typeface=""/>
+        <a:cs typeface=""/>
+        <a:font script="Jpan" typeface="游ゴシック"/>
+        <a:font script="Hang" typeface="맑은 고딕"/>
+        <a:font script="Hans" typeface="等线"/>
+        <a:font script="Hant" typeface="新細明體"/>
+        <a:font script="Arab" typeface="Arial"/>
+        <a:font script="Hebr" typeface="Arial"/>
+        <a:font script="Thai" typeface="Cordia New"/>
+        <a:font script="Ethi" typeface="Nyala"/>
+        <a:font script="Beng" typeface="Vrinda"/>
+        <a:font script="Gujr" typeface="Shruti"/>
+        <a:font script="Khmr" typeface="DaunPenh"/>
+        <a:font script="Knda" typeface="Tunga"/>
+        <a:font script="Guru" typeface="Raavi"/>
+        <a:font script="Cans" typeface="Euphemia"/>
+        <a:font script="Cher" typeface="Plantagenet Cherokee"/>
+        <a:font script="Yiii" typeface="Microsoft Yi Baiti"/>
+        <a:font script="Tibt" typeface="Microsoft Himalaya"/>
+        <a:font script="Thaa" typeface="MV Boli"/>
+        <a:font script="Deva" typeface="Mangal"/>
+        <a:font script="Telu" typeface="Gautami"/>
+        <a:font script="Taml" typeface="Latha"/>
+        <a:font script="Syrc" typeface="Estrangelo Edessa"/>
+        <a:font script="Orya" typeface="Kalinga"/>
+        <a:font script="Mlym" typeface="Kartika"/>
+        <a:font script="Laoo" typeface="DokChampa"/>
+        <a:font script="Sinh" typeface="Iskoola Pota"/>
+        <a:font script="Mong" typeface="Mongolian Baiti"/>
+        <a:font script="Viet" typeface="Arial"/>
+        <a:font script="Uigh" typeface="Microsoft Uighur"/>
+        <a:font script="Geor" typeface="Sylfaen"/>
+        <a:font script="Armn" typeface="Arial"/>
+        <a:font script="Bugi" typeface="Leelawadee UI"/>
+        <a:font script="Bopo" typeface="Microsoft JhengHei"/>
+        <a:font script="Java" typeface="Javanese Text"/>
+        <a:font script="Lisu" typeface="Segoe UI"/>
+        <a:font script="Mymr" typeface="Myanmar Text"/>
+        <a:font script="Nkoo" typeface="Ebrima"/>
+        <a:font script="Olck" typeface="Nirmala UI"/>
+        <a:font script="Osma" typeface="Ebrima"/>
+        <a:font script="Phag" typeface="Phagspa"/>
+        <a:font script="Syrn" typeface="Estrangelo Edessa"/>
+        <a:font script="Syrj" typeface="Estrangelo Edessa"/>
+        <a:font script="Syre" typeface="Estrangelo Edessa"/>
+        <a:font script="Sora" typeface="Nirmala UI"/>
+        <a:font script="Tale" typeface="Microsoft Tai Le"/>
+        <a:font script="Talu" typeface="Microsoft New Tai Lue"/>
+        <a:font script="Tfng" typeface="Ebrima"/>
+      </a:minorFont>
+    </a:fontScheme>
+    <a:fmtScheme name="Office">
+      <a:fillStyleLst>
+        <a:solidFill>
+          <a:schemeClr val="phClr"/>
+        </a:solidFill>
+        <a:gradFill rotWithShape="1">
+          <a:gsLst>
+            <a:gs pos="0">
+              <a:schemeClr val="phClr">
+                <a:lumMod val="110000"/>
+                <a:satMod val="105000"/>
+                <a:tint val="67000"/>
+              </a:schemeClr>
+            </a:gs>
+            <a:gs pos="50000">
+              <a:schemeClr val="phClr">
+                <a:lumMod val="105000"/>
+                <a:satMod val="103000"/>
+                <a:tint val="73000"/>
+              </a:schemeClr>
+            </a:gs>
+            <a:gs pos="100000">
+              <a:schemeClr val="phClr">
+                <a:lumMod val="105000"/>
+                <a:satMod val="109000"/>
+                <a:tint val="81000"/>
+              </a:schemeClr>
+            </a:gs>
+          </a:gsLst>
+          <a:lin ang="5400000" scaled="0"/>
+        </a:gradFill>
+        <a:gradFill rotWithShape="1">
+          <a:gsLst>
+            <a:gs pos="0">
+              <a:schemeClr val="phClr">
+                <a:satMod val="103000"/>
+                <a:lumMod val="102000"/>
+                <a:tint val="94000"/>
+              </a:schemeClr>
+            </a:gs>
+            <a:gs pos="50000">
+              <a:schemeClr val="phClr">
+                <a:satMod val="110000"/>
+                <a:lumMod val="100000"/>
+                <a:shade val="100000"/>
+              </a:schemeClr>
+            </a:gs>
+            <a:gs pos="100000">
+              <a:schemeClr val="phClr">
+                <a:lumMod val="99000"/>
+                <a:satMod val="120000"/>
+                <a:shade val="78000"/>
+              </a:schemeClr>
+            </a:gs>
+          </a:gsLst>
+          <a:lin ang="5400000" scaled="0"/>
+        </a:gradFill>
+      </a:fillStyleLst>
+      <a:lnStyleLst>
+        <a:ln w="12700" cap="flat" cmpd="sng" algn="ctr">
+          <a:solidFill>
+            <a:schemeClr val="phClr"/>
+          </a:solidFill>
+          <a:prstDash val="solid"/>
+          <a:miter lim="800000"/>
+        </a:ln>
+        <a:ln w="19050" cap="flat" cmpd="sng" algn="ctr">
+          <a:solidFill>
+            <a:schemeClr val="phClr"/>
+          </a:solidFill>
+          <a:prstDash val="solid"/>
+          <a:miter lim="800000"/>
+        </a:ln>
+        <a:ln w="25400" cap="flat" cmpd="sng" algn="ctr">
+          <a:solidFill>
+            <a:schemeClr val="phClr"/>
+          </a:solidFill>
+          <a:prstDash val="solid"/>
+          <a:miter lim="800000"/>
+        </a:ln>
+      </a:lnStyleLst>
+      <a:effectStyleLst>
+        <a:effectStyle>
+          <a:effectLst/>
+        </a:effectStyle>
+        <a:effectStyle>
+          <a:effectLst/>
+        </a:effectStyle>
+        <a:effectStyle>
+          <a:effectLst>
+            <a:outerShdw blurRad="57150" dist="19050" dir="5400000" algn="ctr" rotWithShape="0">
+              <a:srgbClr val="000000">
+                <a:alpha val="63000"/>
+              </a:srgbClr>
+            </a:outerShdw>
+          </a:effectLst>
+        </a:effectStyle>
+      </a:effectStyleLst>
+      <a:bgFillStyleLst>
+        <a:solidFill>
+          <a:schemeClr val="phClr"/>
+        </a:solidFill>
+        <a:solidFill>
+          <a:schemeClr val="phClr">
+            <a:tint val="95000"/>
+            <a:satMod val="170000"/>
+          </a:schemeClr>
+        </a:solidFill>
+        <a:gradFill rotWithShape="1">
+          <a:gsLst>
+            <a:gs pos="0">
+              <a:schemeClr val="phClr">
+                <a:tint val="93000"/>
+                <a:satMod val="150000"/>
+                <a:shade val="98000"/>
+                <a:lumMod val="102000"/>
+              </a:schemeClr>
+            </a:gs>
+            <a:gs pos="50000">
+              <a:schemeClr val="phClr">
+                <a:tint val="98000"/>
+                <a:satMod val="130000"/>
+                <a:shade val="90000"/>
+                <a:lumMod val="103000"/>
+              </a:schemeClr>
+            </a:gs>
+            <a:gs pos="100000">
+              <a:schemeClr val="phClr">
+                <a:shade val="63000"/>
+                <a:satMod val="120000"/>
+              </a:schemeClr>
+            </a:gs>
+          </a:gsLst>
+          <a:lin ang="5400000" scaled="0"/>
+        </a:gradFill>
+      </a:bgFillStyleLst>
+    </a:fmtScheme>
+  </a:themeElements>
+  <a:objectDefaults>
+    <a:lnDef>
+      <a:spPr/>
+      <a:bodyPr/>
+      <a:lstStyle/>
+      <a:style>
+        <a:lnRef idx="2">
+          <a:schemeClr val="accent1"/>
+        </a:lnRef>
+        <a:fillRef idx="0">
+          <a:schemeClr val="accent1"/>
+        </a:fillRef>
+        <a:effectRef idx="1">
+          <a:schemeClr val="accent1"/>
+        </a:effectRef>
+        <a:fontRef idx="minor">
+          <a:schemeClr val="tx1"/>
+        </a:fontRef>
+      </a:style>
+    </a:lnDef>
+  </a:objectDefaults>
+  <a:extraClrSchemeLst/>
+  <a:extLst>
+    <a:ext uri="{05A4C25C-085E-4340-85A3-A5531E510DB2}">
+      <thm15:themeFamily xmlns:thm15="http://schemas.microsoft.com/office/thememl/2012/main" name="Office Theme" id="{2E142A2C-CD16-42D6-873A-C26D2A0506FA}" vid="{1BDDFF52-6CD6-40A5-AB3C-68EB2F1E4D0A}"/>
+    </a:ext>
+  </a:extLst>
+</a:theme>
 </file>
--- a/Andy/FinMem_PPT_完整版.pptx
+++ b/Andy/FinMem_PPT_完整版.pptx
@@ -4988,7 +4988,7 @@
         </p:nvGraphicFramePr>
         <p:xfrm>
           <a:off x="1133856" y="4270248"/>
-          <a:ext cx="11631164" cy="5209220"/>
+          <a:ext cx="11631164" cy="5262748"/>
         </p:xfrm>
         <a:graphic>
           <a:graphicData uri="http://schemas.openxmlformats.org/drawingml/2006/table">
@@ -7427,7 +7427,7 @@
           <a:noFill/>
         </p:spPr>
         <p:txBody>
-          <a:bodyPr wrap="square" lIns="0" rIns="0" tIns="0" bIns="0">
+          <a:bodyPr wrap="square" lIns="0" tIns="0" rIns="0" bIns="0">
             <a:spAutoFit/>
           </a:bodyPr>
           <a:lstStyle/>
@@ -7479,7 +7479,7 @@
         <p:spPr>
           <a:xfrm>
             <a:off x="320040" y="137160"/>
-            <a:ext cx="10972800" cy="365760"/>
+            <a:ext cx="10972800" cy="261610"/>
           </a:xfrm>
           <a:prstGeom prst="rect">
             <a:avLst/>
@@ -7492,19 +7492,15 @@
           </a:bodyPr>
           <a:lstStyle/>
           <a:p>
-            <a:pPr algn="l">
-              <a:lnSpc>
-                <a:spcPct val="100000"/>
-              </a:lnSpc>
-            </a:pPr>
-            <a:r>
-              <a:rPr sz="1700" b="1">
+            <a:r>
+              <a:rPr lang="zh-TW" altLang="en-US" sz="1700" b="1" dirty="0">
                 <a:solidFill>
                   <a:srgbClr val="202020"/>
                 </a:solidFill>
-                <a:latin typeface="Microsoft JhengHei"/>
+                <a:latin typeface="微軟正黑體" panose="020B0604030504040204" pitchFamily="34" charset="-120"/>
+                <a:ea typeface="微軟正黑體" panose="020B0604030504040204" pitchFamily="34" charset="-120"/>
               </a:rPr>
-              <a:t>程式碼:模組怎麼對應到實際檔案</a:t>
+              <a:t>各模組對應程式碼</a:t>
             </a:r>
           </a:p>
         </p:txBody>
@@ -7518,7 +7514,7 @@
         <p:spPr>
           <a:xfrm>
             <a:off x="320040" y="530352"/>
-            <a:ext cx="11247120" cy="365760"/>
+            <a:ext cx="11247120" cy="161583"/>
           </a:xfrm>
           <a:prstGeom prst="rect">
             <a:avLst/>
@@ -7537,37 +7533,106 @@
               </a:lnSpc>
             </a:pPr>
             <a:r>
-              <a:rPr sz="1050" b="1">
+              <a:rPr sz="1050" b="1" dirty="0" err="1">
                 <a:solidFill>
                   <a:srgbClr val="202020"/>
                 </a:solidFill>
                 <a:latin typeface="Microsoft JhengHei"/>
               </a:rPr>
-              <a:t>倉庫分成兩塊:</a:t>
-            </a:r>
-            <a:r>
-              <a:rPr sz="1050" b="0">
+              <a:t>分成兩塊:</a:t>
+            </a:r>
+            <a:r>
+              <a:rPr sz="1050" b="0" dirty="0" err="1">
                 <a:solidFill>
                   <a:srgbClr val="202020"/>
                 </a:solidFill>
                 <a:latin typeface="Microsoft JhengHei"/>
               </a:rPr>
-              <a:t>puppy/ 是每天實際運行的 Agent 原始碼,data-pipeline/ 是模擬開始前的離線資料前處理腳本。</a:t>
+              <a:t>puppy</a:t>
+            </a:r>
+            <a:r>
+              <a:rPr sz="1050" b="0" dirty="0">
+                <a:solidFill>
+                  <a:srgbClr val="202020"/>
+                </a:solidFill>
+                <a:latin typeface="Microsoft JhengHei"/>
+              </a:rPr>
+              <a:t>/ </a:t>
+            </a:r>
+            <a:r>
+              <a:rPr sz="1050" b="0" dirty="0" err="1">
+                <a:solidFill>
+                  <a:srgbClr val="202020"/>
+                </a:solidFill>
+                <a:latin typeface="Microsoft JhengHei"/>
+              </a:rPr>
+              <a:t>是每天運行的</a:t>
+            </a:r>
+            <a:r>
+              <a:rPr sz="1050" b="0" dirty="0">
+                <a:solidFill>
+                  <a:srgbClr val="202020"/>
+                </a:solidFill>
+                <a:latin typeface="Microsoft JhengHei"/>
+              </a:rPr>
+              <a:t> Agent </a:t>
+            </a:r>
+            <a:r>
+              <a:rPr sz="1050" b="0" dirty="0" err="1">
+                <a:solidFill>
+                  <a:srgbClr val="202020"/>
+                </a:solidFill>
+                <a:latin typeface="Microsoft JhengHei"/>
+              </a:rPr>
+              <a:t>原始碼,data</a:t>
+            </a:r>
+            <a:r>
+              <a:rPr sz="1050" b="0" dirty="0">
+                <a:solidFill>
+                  <a:srgbClr val="202020"/>
+                </a:solidFill>
+                <a:latin typeface="Microsoft JhengHei"/>
+              </a:rPr>
+              <a:t>-pipeline/ </a:t>
+            </a:r>
+            <a:r>
+              <a:rPr sz="1050" b="0" dirty="0" err="1">
+                <a:solidFill>
+                  <a:srgbClr val="202020"/>
+                </a:solidFill>
+                <a:latin typeface="Microsoft JhengHei"/>
+              </a:rPr>
+              <a:t>是模擬開始前的資料處理</a:t>
+            </a:r>
+            <a:r>
+              <a:rPr sz="1050" b="0" dirty="0">
+                <a:solidFill>
+                  <a:srgbClr val="202020"/>
+                </a:solidFill>
+                <a:latin typeface="Microsoft JhengHei"/>
+              </a:rPr>
+              <a:t>。</a:t>
             </a:r>
           </a:p>
         </p:txBody>
       </p:sp>
       <p:graphicFrame>
         <p:nvGraphicFramePr>
-          <p:cNvPr id="4" name="Table 3"/>
+          <p:cNvPr id="9" name="Table 8"/>
           <p:cNvGraphicFramePr>
             <a:graphicFrameLocks noGrp="1"/>
           </p:cNvGraphicFramePr>
-          <p:nvPr/>
+          <p:nvPr>
+            <p:extLst>
+              <p:ext uri="{D42A27DB-BD31-4B8C-83A1-F6EECF244321}">
+                <p14:modId xmlns:p14="http://schemas.microsoft.com/office/powerpoint/2010/main" val="3996793241"/>
+              </p:ext>
+            </p:extLst>
+          </p:nvPr>
         </p:nvGraphicFramePr>
         <p:xfrm>
           <a:off x="320040" y="1005840"/>
-          <a:ext cx="13258799" cy="5029192"/>
+          <a:ext cx="13258797" cy="6675120"/>
         </p:xfrm>
         <a:graphic>
           <a:graphicData uri="http://schemas.openxmlformats.org/drawingml/2006/table">
@@ -7576,21 +7641,21 @@
                 <a:tableStyleId>{5C22544A-7EE6-4342-B048-85BDC9FD1C3A}</a:tableStyleId>
               </a:tblPr>
               <a:tblGrid>
-                <a:gridCol w="1988819">
+                <a:gridCol w="2121407">
                   <a:extLst>
                     <a:ext uri="{9D8B030D-6E8A-4147-A177-3AD203B41FA5}">
                       <a16:colId xmlns:a16="http://schemas.microsoft.com/office/drawing/2014/main" val="20000"/>
                     </a:ext>
                   </a:extLst>
                 </a:gridCol>
-                <a:gridCol w="4507992">
+                <a:gridCol w="4507991">
                   <a:extLst>
                     <a:ext uri="{9D8B030D-6E8A-4147-A177-3AD203B41FA5}">
                       <a16:colId xmlns:a16="http://schemas.microsoft.com/office/drawing/2014/main" val="20001"/>
                     </a:ext>
                   </a:extLst>
                 </a:gridCol>
-                <a:gridCol w="6761988">
+                <a:gridCol w="6629399">
                   <a:extLst>
                     <a:ext uri="{9D8B030D-6E8A-4147-A177-3AD203B41FA5}">
                       <a16:colId xmlns:a16="http://schemas.microsoft.com/office/drawing/2014/main" val="20002"/>
@@ -7612,7 +7677,7 @@
                           </a:solidFill>
                           <a:latin typeface="Microsoft JhengHei"/>
                         </a:rPr>
-                        <a:t>模組 / 階段</a:t>
+                        <a:t>模組</a:t>
                       </a:r>
                     </a:p>
                   </a:txBody>
@@ -7629,7 +7694,7 @@
                     <a:p>
                       <a:pPr algn="ctr"/>
                       <a:r>
-                        <a:rPr sz="1000" b="1">
+                        <a:rPr sz="1000" b="1" dirty="0" err="1">
                           <a:solidFill>
                             <a:srgbClr val="FFFFFF"/>
                           </a:solidFill>
@@ -7637,6 +7702,12 @@
                         </a:rPr>
                         <a:t>對應檔案</a:t>
                       </a:r>
+                      <a:endParaRPr sz="1000" b="1" dirty="0">
+                        <a:solidFill>
+                          <a:srgbClr val="FFFFFF"/>
+                        </a:solidFill>
+                        <a:latin typeface="Microsoft JhengHei"/>
+                      </a:endParaRPr>
                     </a:p>
                   </a:txBody>
                   <a:tcPr marL="40000" marR="40000" marT="10000" marB="10000" anchor="ctr">
@@ -7658,7 +7729,7 @@
                           </a:solidFill>
                           <a:latin typeface="Microsoft JhengHei"/>
                         </a:rPr>
-                        <a:t>這裡實際在做什麼</a:t>
+                        <a:t>程式碼功能</a:t>
                       </a:r>
                     </a:p>
                   </a:txBody>
@@ -7674,21 +7745,33 @@
                   </a:ext>
                 </a:extLst>
               </a:tr>
-              <a:tr h="428936">
+              <a:tr h="795528">
                 <a:tc>
                   <a:txBody>
                     <a:bodyPr/>
                     <a:lstStyle/>
                     <a:p>
-                      <a:pPr algn="l"/>
+                      <a:pPr algn="ctr"/>
                       <a:r>
                         <a:rPr sz="880" b="1">
                           <a:solidFill>
-                            <a:srgbClr val="000000"/>
-                          </a:solidFill>
-                          <a:latin typeface="Microsoft JhengHei"/>
-                        </a:rPr>
-                        <a:t>Sorting</a:t>
+                            <a:srgbClr val="202020"/>
+                          </a:solidFill>
+                          <a:latin typeface="Microsoft JhengHei"/>
+                        </a:rPr>
+                        <a:t>Summarize</a:t>
+                      </a:r>
+                    </a:p>
+                    <a:p>
+                      <a:pPr algn="ctr"/>
+                      <a:r>
+                        <a:rPr sz="880" b="1">
+                          <a:solidFill>
+                            <a:srgbClr val="202020"/>
+                          </a:solidFill>
+                          <a:latin typeface="Microsoft JhengHei"/>
+                        </a:rPr>
+                        <a:t>摘要</a:t>
                       </a:r>
                     </a:p>
                   </a:txBody>
@@ -7707,11 +7790,11 @@
                       <a:r>
                         <a:rPr sz="830" b="0">
                           <a:solidFill>
-                            <a:srgbClr val="000000"/>
-                          </a:solidFill>
-                          <a:latin typeface="Microsoft JhengHei"/>
-                        </a:rPr>
-                        <a:t>puppy/agent.py — LLMAgent.step() 開頭(官方註解 1~3)</a:t>
+                            <a:srgbClr val="202020"/>
+                          </a:solidFill>
+                          <a:latin typeface="Microsoft JhengHei"/>
+                        </a:rPr>
+                        <a:t>data-pipeline/03-summary.py ＋ 03-model_wrapper.py</a:t>
                       </a:r>
                     </a:p>
                   </a:txBody>
@@ -7730,11 +7813,11 @@
                       <a:r>
                         <a:rPr sz="830" b="0">
                           <a:solidFill>
-                            <a:srgbClr val="000000"/>
-                          </a:solidFill>
-                          <a:latin typeface="Microsoft JhengHei"/>
-                        </a:rPr>
-                        <a:t>依資料型態把股價、新聞、財報拆開:文字送進記憶路徑,股價送去 Observe</a:t>
+                            <a:srgbClr val="202020"/>
+                          </a:solidFill>
+                          <a:latin typeface="Microsoft JhengHei"/>
+                        </a:rPr>
+                        <a:t>呼叫 LLM,把一整篇新聞或財報的原文壓縮成約 200 tokens 的精簡摘要,存回 CSV,減少之後存進記憶庫與送進提示詞的負擔</a:t>
                       </a:r>
                     </a:p>
                   </a:txBody>
@@ -7750,21 +7833,33 @@
                   </a:ext>
                 </a:extLst>
               </a:tr>
-              <a:tr h="428936">
+              <a:tr h="795528">
                 <a:tc>
                   <a:txBody>
                     <a:bodyPr/>
                     <a:lstStyle/>
                     <a:p>
-                      <a:pPr algn="l"/>
+                      <a:pPr algn="ctr"/>
                       <a:r>
                         <a:rPr sz="880" b="1">
                           <a:solidFill>
-                            <a:srgbClr val="000000"/>
+                            <a:srgbClr val="202020"/>
                           </a:solidFill>
                           <a:latin typeface="Microsoft JhengHei"/>
                         </a:rPr>
                         <a:t>Profiling</a:t>
+                      </a:r>
+                    </a:p>
+                    <a:p>
+                      <a:pPr algn="ctr"/>
+                      <a:r>
+                        <a:rPr sz="880" b="1">
+                          <a:solidFill>
+                            <a:srgbClr val="202020"/>
+                          </a:solidFill>
+                          <a:latin typeface="Microsoft JhengHei"/>
+                        </a:rPr>
+                        <a:t>Module</a:t>
                       </a:r>
                     </a:p>
                   </a:txBody>
@@ -7783,7 +7878,7 @@
                       <a:r>
                         <a:rPr sz="830" b="0">
                           <a:solidFill>
-                            <a:srgbClr val="000000"/>
+                            <a:srgbClr val="202020"/>
                           </a:solidFill>
                           <a:latin typeface="Microsoft JhengHei"/>
                         </a:rPr>
@@ -7804,14 +7899,74 @@
                     <a:p>
                       <a:pPr algn="l"/>
                       <a:r>
-                        <a:rPr sz="830" b="0">
-                          <a:solidFill>
-                            <a:srgbClr val="000000"/>
-                          </a:solidFill>
-                          <a:latin typeface="Microsoft JhengHei"/>
-                        </a:rPr>
-                        <a:t>Agent 一建立就把設定檔這段文字讀進來存成屬性,全程不變;只給 Retrieve 當查詢字串用,不會出現在 Reflect 的提示詞裡</a:t>
-                      </a:r>
+                        <a:rPr sz="830" b="0" dirty="0" err="1">
+                          <a:solidFill>
+                            <a:srgbClr val="202020"/>
+                          </a:solidFill>
+                          <a:latin typeface="Microsoft JhengHei"/>
+                        </a:rPr>
+                        <a:t>建立</a:t>
+                      </a:r>
+                      <a:r>
+                        <a:rPr sz="830" b="0" dirty="0">
+                          <a:solidFill>
+                            <a:srgbClr val="202020"/>
+                          </a:solidFill>
+                          <a:latin typeface="Microsoft JhengHei"/>
+                        </a:rPr>
+                        <a:t> Agent </a:t>
+                      </a:r>
+                      <a:r>
+                        <a:rPr sz="830" b="0" dirty="0" err="1">
+                          <a:solidFill>
+                            <a:srgbClr val="202020"/>
+                          </a:solidFill>
+                          <a:latin typeface="Microsoft JhengHei"/>
+                        </a:rPr>
+                        <a:t>的當下,把設定檔這段人設文字讀進來,存成</a:t>
+                      </a:r>
+                      <a:r>
+                        <a:rPr sz="830" b="0" dirty="0">
+                          <a:solidFill>
+                            <a:srgbClr val="202020"/>
+                          </a:solidFill>
+                          <a:latin typeface="Microsoft JhengHei"/>
+                        </a:rPr>
+                        <a:t> Agent </a:t>
+                      </a:r>
+                      <a:r>
+                        <a:rPr sz="830" b="0" dirty="0" err="1">
+                          <a:solidFill>
+                            <a:srgbClr val="202020"/>
+                          </a:solidFill>
+                          <a:latin typeface="Microsoft JhengHei"/>
+                        </a:rPr>
+                        <a:t>的固定屬性,整個模擬過程都不會再變動;用途是交給</a:t>
+                      </a:r>
+                      <a:r>
+                        <a:rPr sz="830" b="0" dirty="0">
+                          <a:solidFill>
+                            <a:srgbClr val="202020"/>
+                          </a:solidFill>
+                          <a:latin typeface="Microsoft JhengHei"/>
+                        </a:rPr>
+                        <a:t> Retrieve </a:t>
+                      </a:r>
+                      <a:r>
+                        <a:rPr sz="830" b="0" dirty="0" err="1">
+                          <a:solidFill>
+                            <a:srgbClr val="202020"/>
+                          </a:solidFill>
+                          <a:latin typeface="Microsoft JhengHei"/>
+                        </a:rPr>
+                        <a:t>當查詢向量的來源</a:t>
+                      </a:r>
+                      <a:endParaRPr sz="830" b="0" dirty="0">
+                        <a:solidFill>
+                          <a:srgbClr val="202020"/>
+                        </a:solidFill>
+                        <a:latin typeface="Microsoft JhengHei"/>
+                      </a:endParaRPr>
                     </a:p>
                   </a:txBody>
                   <a:tcPr marL="40000" marR="40000" marT="10000" marB="10000" anchor="ctr">
@@ -7826,21 +7981,33 @@
                   </a:ext>
                 </a:extLst>
               </a:tr>
-              <a:tr h="428936">
+              <a:tr h="795528">
                 <a:tc>
                   <a:txBody>
                     <a:bodyPr/>
                     <a:lstStyle/>
                     <a:p>
-                      <a:pPr algn="l"/>
+                      <a:pPr algn="ctr"/>
                       <a:r>
                         <a:rPr sz="880" b="1">
                           <a:solidFill>
-                            <a:srgbClr val="000000"/>
-                          </a:solidFill>
-                          <a:latin typeface="Microsoft JhengHei"/>
-                        </a:rPr>
-                        <a:t>Summarize(離線)</a:t>
+                            <a:srgbClr val="202020"/>
+                          </a:solidFill>
+                          <a:latin typeface="Microsoft JhengHei"/>
+                        </a:rPr>
+                        <a:t>Sorting</a:t>
+                      </a:r>
+                    </a:p>
+                    <a:p>
+                      <a:pPr algn="ctr"/>
+                      <a:r>
+                        <a:rPr sz="880" b="1">
+                          <a:solidFill>
+                            <a:srgbClr val="202020"/>
+                          </a:solidFill>
+                          <a:latin typeface="Microsoft JhengHei"/>
+                        </a:rPr>
+                        <a:t>分類</a:t>
                       </a:r>
                     </a:p>
                   </a:txBody>
@@ -7859,11 +8026,11 @@
                       <a:r>
                         <a:rPr sz="830" b="0">
                           <a:solidFill>
-                            <a:srgbClr val="000000"/>
-                          </a:solidFill>
-                          <a:latin typeface="Microsoft JhengHei"/>
-                        </a:rPr>
-                        <a:t>data-pipeline/03-summary.py ＋ 03-model_wrapper.py</a:t>
+                            <a:srgbClr val="202020"/>
+                          </a:solidFill>
+                          <a:latin typeface="Microsoft JhengHei"/>
+                        </a:rPr>
+                        <a:t>puppy/agent.py — LLMAgent.step() 開頭(官方註解 1~3)</a:t>
                       </a:r>
                     </a:p>
                   </a:txBody>
@@ -7882,11 +8049,11 @@
                       <a:r>
                         <a:rPr sz="830" b="0">
                           <a:solidFill>
-                            <a:srgbClr val="000000"/>
-                          </a:solidFill>
-                          <a:latin typeface="Microsoft JhengHei"/>
-                        </a:rPr>
-                        <a:t>把整篇新聞/財報丟給 LLM,請它壓縮成約 200 tokens 的摘要,存回 CSV</a:t>
+                            <a:srgbClr val="202020"/>
+                          </a:solidFill>
+                          <a:latin typeface="Microsoft JhengHei"/>
+                        </a:rPr>
+                        <a:t>每天執行的第一步:讀進當天打包好的股價、新聞、財報,依型態各自呼叫對應的處理函式,文字類存進記憶庫、股價交給 Observe 計算動能</a:t>
                       </a:r>
                     </a:p>
                   </a:txBody>
@@ -7902,21 +8069,33 @@
                   </a:ext>
                 </a:extLst>
               </a:tr>
-              <a:tr h="428936">
+              <a:tr h="795528">
                 <a:tc>
                   <a:txBody>
                     <a:bodyPr/>
                     <a:lstStyle/>
                     <a:p>
-                      <a:pPr algn="l"/>
+                      <a:pPr algn="ctr"/>
                       <a:r>
                         <a:rPr sz="880" b="1">
                           <a:solidFill>
-                            <a:srgbClr val="000000"/>
-                          </a:solidFill>
-                          <a:latin typeface="Microsoft JhengHei"/>
-                        </a:rPr>
-                        <a:t>清理／情緒標註(離線)</a:t>
+                            <a:srgbClr val="202020"/>
+                          </a:solidFill>
+                          <a:latin typeface="Microsoft JhengHei"/>
+                        </a:rPr>
+                        <a:t>Observe</a:t>
+                      </a:r>
+                    </a:p>
+                    <a:p>
+                      <a:pPr algn="ctr"/>
+                      <a:r>
+                        <a:rPr sz="880" b="1">
+                          <a:solidFill>
+                            <a:srgbClr val="202020"/>
+                          </a:solidFill>
+                          <a:latin typeface="Microsoft JhengHei"/>
+                        </a:rPr>
+                        <a:t>觀察</a:t>
                       </a:r>
                     </a:p>
                   </a:txBody>
@@ -7935,11 +8114,11 @@
                       <a:r>
                         <a:rPr sz="830" b="0">
                           <a:solidFill>
-                            <a:srgbClr val="000000"/>
-                          </a:solidFill>
-                          <a:latin typeface="Microsoft JhengHei"/>
-                        </a:rPr>
-                        <a:t>data-pipeline/02-Raw_News_Data_Cleaning.py ＋ 05-get_sentiment_by_ticker.py</a:t>
+                            <a:srgbClr val="202020"/>
+                          </a:solidFill>
+                          <a:latin typeface="Microsoft JhengHei"/>
+                        </a:rPr>
+                        <a:t>puppy/portfolio.py — get_moment(moment_window=3)</a:t>
                       </a:r>
                     </a:p>
                   </a:txBody>
@@ -7956,14 +8135,56 @@
                     <a:p>
                       <a:pPr algn="l"/>
                       <a:r>
-                        <a:rPr sz="830" b="0">
-                          <a:solidFill>
-                            <a:srgbClr val="000000"/>
-                          </a:solidFill>
-                          <a:latin typeface="Microsoft JhengHei"/>
-                        </a:rPr>
-                        <a:t>02 先清掉重複報導、制式前綴等雜訊;05 用 VADER(規則詞典)或 FinBERT(金融專用模型)幫每則新聞標正負中立傾向</a:t>
-                      </a:r>
+                        <a:rPr sz="830" b="0" dirty="0" err="1">
+                          <a:solidFill>
+                            <a:srgbClr val="202020"/>
+                          </a:solidFill>
+                          <a:latin typeface="Microsoft JhengHei"/>
+                        </a:rPr>
+                        <a:t>抓最近</a:t>
+                      </a:r>
+                      <a:r>
+                        <a:rPr sz="830" b="0" dirty="0">
+                          <a:solidFill>
+                            <a:srgbClr val="202020"/>
+                          </a:solidFill>
+                          <a:latin typeface="Microsoft JhengHei"/>
+                        </a:rPr>
+                        <a:t> 3 </a:t>
+                      </a:r>
+                      <a:r>
+                        <a:rPr sz="830" b="0" dirty="0" err="1">
+                          <a:solidFill>
+                            <a:srgbClr val="202020"/>
+                          </a:solidFill>
+                          <a:latin typeface="Microsoft JhengHei"/>
+                        </a:rPr>
+                        <a:t>天的收盤價,逐日相減後加總,結果大於零記為上漲、小於零記為下跌、等於零記為持平,轉換成一句敘述,供</a:t>
+                      </a:r>
+                      <a:r>
+                        <a:rPr sz="830" b="0" dirty="0">
+                          <a:solidFill>
+                            <a:srgbClr val="202020"/>
+                          </a:solidFill>
+                          <a:latin typeface="Microsoft JhengHei"/>
+                        </a:rPr>
+                        <a:t> Reflect </a:t>
+                      </a:r>
+                      <a:r>
+                        <a:rPr sz="830" b="0" dirty="0" err="1">
+                          <a:solidFill>
+                            <a:srgbClr val="202020"/>
+                          </a:solidFill>
+                          <a:latin typeface="Microsoft JhengHei"/>
+                        </a:rPr>
+                        <a:t>直接使用</a:t>
+                      </a:r>
+                      <a:endParaRPr sz="830" b="0" dirty="0">
+                        <a:solidFill>
+                          <a:srgbClr val="202020"/>
+                        </a:solidFill>
+                        <a:latin typeface="Microsoft JhengHei"/>
+                      </a:endParaRPr>
                     </a:p>
                   </a:txBody>
                   <a:tcPr marL="40000" marR="40000" marT="10000" marB="10000" anchor="ctr">
@@ -7978,21 +8199,45 @@
                   </a:ext>
                 </a:extLst>
               </a:tr>
-              <a:tr h="428936">
+              <a:tr h="795528">
                 <a:tc>
                   <a:txBody>
                     <a:bodyPr/>
                     <a:lstStyle/>
                     <a:p>
-                      <a:pPr algn="l"/>
+                      <a:pPr algn="ctr"/>
                       <a:r>
                         <a:rPr sz="880" b="1">
                           <a:solidFill>
-                            <a:srgbClr val="000000"/>
-                          </a:solidFill>
-                          <a:latin typeface="Microsoft JhengHei"/>
-                        </a:rPr>
-                        <a:t>Observe</a:t>
+                            <a:srgbClr val="202020"/>
+                          </a:solidFill>
+                          <a:latin typeface="Microsoft JhengHei"/>
+                        </a:rPr>
+                        <a:t>Layered Long-term</a:t>
+                      </a:r>
+                    </a:p>
+                    <a:p>
+                      <a:pPr algn="ctr"/>
+                      <a:r>
+                        <a:rPr sz="880" b="1">
+                          <a:solidFill>
+                            <a:srgbClr val="202020"/>
+                          </a:solidFill>
+                          <a:latin typeface="Microsoft JhengHei"/>
+                        </a:rPr>
+                        <a:t>Memory</a:t>
+                      </a:r>
+                    </a:p>
+                    <a:p>
+                      <a:pPr algn="ctr"/>
+                      <a:r>
+                        <a:rPr sz="880" b="1">
+                          <a:solidFill>
+                            <a:srgbClr val="202020"/>
+                          </a:solidFill>
+                          <a:latin typeface="Microsoft JhengHei"/>
+                        </a:rPr>
+                        <a:t>分層長期記憶</a:t>
                       </a:r>
                     </a:p>
                   </a:txBody>
@@ -8011,11 +8256,11 @@
                       <a:r>
                         <a:rPr sz="830" b="0">
                           <a:solidFill>
-                            <a:srgbClr val="000000"/>
-                          </a:solidFill>
-                          <a:latin typeface="Microsoft JhengHei"/>
-                        </a:rPr>
-                        <a:t>puppy/portfolio.py — get_moment(moment_window=3)</a:t>
+                            <a:srgbClr val="202020"/>
+                          </a:solidFill>
+                          <a:latin typeface="Microsoft JhengHei"/>
+                        </a:rPr>
+                        <a:t>puppy/memorydb.py(MemoryDB、BrainDB)＋ puppy/memory_functions/(decay.py、importance_score.py、compound_score.py、access_counter.py)</a:t>
                       </a:r>
                     </a:p>
                   </a:txBody>
@@ -8032,14 +8277,128 @@
                     <a:p>
                       <a:pPr algn="l"/>
                       <a:r>
-                        <a:rPr sz="830" b="0">
-                          <a:solidFill>
-                            <a:srgbClr val="000000"/>
-                          </a:solidFill>
-                          <a:latin typeface="Microsoft JhengHei"/>
-                        </a:rPr>
-                        <a:t>把最近 3 天每天的收盤價差加總,大於零記漲、小於零記跌,轉成一句英文敘述</a:t>
-                      </a:r>
+                        <a:rPr sz="830" b="0" dirty="0" err="1">
+                          <a:solidFill>
+                            <a:srgbClr val="202020"/>
+                          </a:solidFill>
+                          <a:latin typeface="Microsoft JhengHei"/>
+                        </a:rPr>
+                        <a:t>MemoryDB</a:t>
+                      </a:r>
+                      <a:r>
+                        <a:rPr sz="830" b="0" dirty="0">
+                          <a:solidFill>
+                            <a:srgbClr val="202020"/>
+                          </a:solidFill>
+                          <a:latin typeface="Microsoft JhengHei"/>
+                        </a:rPr>
+                        <a:t> </a:t>
+                      </a:r>
+                      <a:r>
+                        <a:rPr sz="830" b="0" dirty="0" err="1">
+                          <a:solidFill>
+                            <a:srgbClr val="202020"/>
+                          </a:solidFill>
+                          <a:latin typeface="Microsoft JhengHei"/>
+                        </a:rPr>
+                        <a:t>負責單一層的資料存取與三種分數計算;BrainDB</a:t>
+                      </a:r>
+                      <a:r>
+                        <a:rPr sz="830" b="0" dirty="0">
+                          <a:solidFill>
+                            <a:srgbClr val="202020"/>
+                          </a:solidFill>
+                          <a:latin typeface="Microsoft JhengHei"/>
+                        </a:rPr>
+                        <a:t> </a:t>
+                      </a:r>
+                      <a:r>
+                        <a:rPr sz="830" b="0" dirty="0" err="1">
+                          <a:solidFill>
+                            <a:srgbClr val="202020"/>
+                          </a:solidFill>
+                          <a:latin typeface="Microsoft JhengHei"/>
+                        </a:rPr>
+                        <a:t>把淺</a:t>
+                      </a:r>
+                      <a:r>
+                        <a:rPr sz="830" b="0" dirty="0">
+                          <a:solidFill>
+                            <a:srgbClr val="202020"/>
+                          </a:solidFill>
+                          <a:latin typeface="Microsoft JhengHei"/>
+                        </a:rPr>
+                        <a:t>/中/深/</a:t>
+                      </a:r>
+                      <a:r>
+                        <a:rPr sz="830" b="0" dirty="0" err="1">
+                          <a:solidFill>
+                            <a:srgbClr val="202020"/>
+                          </a:solidFill>
+                          <a:latin typeface="Microsoft JhengHei"/>
+                        </a:rPr>
+                        <a:t>反思四個</a:t>
+                      </a:r>
+                      <a:r>
+                        <a:rPr sz="830" b="0" dirty="0">
+                          <a:solidFill>
+                            <a:srgbClr val="202020"/>
+                          </a:solidFill>
+                          <a:latin typeface="Microsoft JhengHei"/>
+                        </a:rPr>
+                        <a:t> </a:t>
+                      </a:r>
+                      <a:r>
+                        <a:rPr sz="830" b="0" dirty="0" err="1">
+                          <a:solidFill>
+                            <a:srgbClr val="202020"/>
+                          </a:solidFill>
+                          <a:latin typeface="Microsoft JhengHei"/>
+                        </a:rPr>
+                        <a:t>MemoryDB</a:t>
+                      </a:r>
+                      <a:r>
+                        <a:rPr sz="830" b="0" dirty="0">
+                          <a:solidFill>
+                            <a:srgbClr val="202020"/>
+                          </a:solidFill>
+                          <a:latin typeface="Microsoft JhengHei"/>
+                        </a:rPr>
+                        <a:t> </a:t>
+                      </a:r>
+                      <a:r>
+                        <a:rPr sz="830" b="0" dirty="0" err="1">
+                          <a:solidFill>
+                            <a:srgbClr val="202020"/>
+                          </a:solidFill>
+                          <a:latin typeface="Microsoft JhengHei"/>
+                        </a:rPr>
+                        <a:t>包成一個整體,統一查詢與寫入;memory_functions</a:t>
+                      </a:r>
+                      <a:r>
+                        <a:rPr sz="830" b="0" dirty="0">
+                          <a:solidFill>
+                            <a:srgbClr val="202020"/>
+                          </a:solidFill>
+                          <a:latin typeface="Microsoft JhengHei"/>
+                        </a:rPr>
+                        <a:t> </a:t>
+                      </a:r>
+                      <a:r>
+                        <a:rPr sz="830" b="0" dirty="0" err="1">
+                          <a:solidFill>
+                            <a:srgbClr val="202020"/>
+                          </a:solidFill>
+                          <a:latin typeface="Microsoft JhengHei"/>
+                        </a:rPr>
+                        <a:t>底下的檔案分別負責重要性分數的初始抽籤機率、每日的指數衰退、被引用後的加減分,以及合成排序用的綜合分數</a:t>
+                      </a:r>
+                      <a:endParaRPr sz="830" b="0" dirty="0">
+                        <a:solidFill>
+                          <a:srgbClr val="202020"/>
+                        </a:solidFill>
+                        <a:latin typeface="Microsoft JhengHei"/>
+                      </a:endParaRPr>
                     </a:p>
                   </a:txBody>
                   <a:tcPr marL="40000" marR="40000" marT="10000" marB="10000" anchor="ctr">
@@ -8054,33 +8413,33 @@
                   </a:ext>
                 </a:extLst>
               </a:tr>
-              <a:tr h="428936">
+              <a:tr h="795528">
                 <a:tc>
                   <a:txBody>
                     <a:bodyPr/>
                     <a:lstStyle/>
                     <a:p>
-                      <a:pPr algn="l"/>
+                      <a:pPr algn="ctr"/>
                       <a:r>
                         <a:rPr sz="880" b="1">
                           <a:solidFill>
-                            <a:srgbClr val="000000"/>
-                          </a:solidFill>
-                          <a:latin typeface="Microsoft JhengHei"/>
-                        </a:rPr>
-                        <a:t>Layered Memory /</a:t>
+                            <a:srgbClr val="202020"/>
+                          </a:solidFill>
+                          <a:latin typeface="Microsoft JhengHei"/>
+                        </a:rPr>
+                        <a:t>Retrieve</a:t>
                       </a:r>
                     </a:p>
                     <a:p>
-                      <a:pPr algn="l"/>
+                      <a:pPr algn="ctr"/>
                       <a:r>
                         <a:rPr sz="880" b="1">
                           <a:solidFill>
-                            <a:srgbClr val="000000"/>
-                          </a:solidFill>
-                          <a:latin typeface="Microsoft JhengHei"/>
-                        </a:rPr>
-                        <a:t>Retrieve</a:t>
+                            <a:srgbClr val="202020"/>
+                          </a:solidFill>
+                          <a:latin typeface="Microsoft JhengHei"/>
+                        </a:rPr>
+                        <a:t>檢索</a:t>
                       </a:r>
                     </a:p>
                   </a:txBody>
@@ -8099,11 +8458,11 @@
                       <a:r>
                         <a:rPr sz="830" b="0">
                           <a:solidFill>
-                            <a:srgbClr val="000000"/>
-                          </a:solidFill>
-                          <a:latin typeface="Microsoft JhengHei"/>
-                        </a:rPr>
-                        <a:t>puppy/memorydb.py(MemoryDB、BrainDB)</a:t>
+                            <a:srgbClr val="202020"/>
+                          </a:solidFill>
+                          <a:latin typeface="Microsoft JhengHei"/>
+                        </a:rPr>
+                        <a:t>puppy/memorydb.py — MemoryDB.query()</a:t>
                       </a:r>
                     </a:p>
                   </a:txBody>
@@ -8120,13 +8479,103 @@
                     <a:p>
                       <a:pPr algn="l"/>
                       <a:r>
-                        <a:rPr sz="830" b="0">
-                          <a:solidFill>
-                            <a:srgbClr val="000000"/>
-                          </a:solidFill>
-                          <a:latin typeface="Microsoft JhengHei"/>
-                        </a:rPr>
-                        <a:t>MemoryDB 管理單一層的存取與分數;BrainDB 把淺/中/深/反思 4 個 MemoryDB 包在一起,對外統一查詢跟寫入</a:t>
+                        <a:rPr lang="zh-TW" altLang="en-US" sz="830" b="0" dirty="0">
+                          <a:solidFill>
+                            <a:srgbClr val="202020"/>
+                          </a:solidFill>
+                          <a:latin typeface="Microsoft JhengHei"/>
+                        </a:rPr>
+                        <a:t>把 </a:t>
+                      </a:r>
+                      <a:r>
+                        <a:rPr lang="en-US" altLang="zh-TW" sz="830" b="0" dirty="0">
+                          <a:solidFill>
+                            <a:srgbClr val="202020"/>
+                          </a:solidFill>
+                          <a:latin typeface="Microsoft JhengHei"/>
+                        </a:rPr>
+                        <a:t>Profiling </a:t>
+                      </a:r>
+                      <a:r>
+                        <a:rPr lang="zh-TW" altLang="en-US" sz="830" b="0" dirty="0">
+                          <a:solidFill>
+                            <a:srgbClr val="202020"/>
+                          </a:solidFill>
+                          <a:latin typeface="Microsoft JhengHei"/>
+                        </a:rPr>
+                        <a:t>設定的人設字串轉成查詢向量</a:t>
+                      </a:r>
+                      <a:r>
+                        <a:rPr lang="en-US" altLang="zh-TW" sz="830" b="0" dirty="0">
+                          <a:solidFill>
+                            <a:srgbClr val="202020"/>
+                          </a:solidFill>
+                          <a:latin typeface="Microsoft JhengHei"/>
+                        </a:rPr>
+                        <a:t>,</a:t>
+                      </a:r>
+                      <a:r>
+                        <a:rPr lang="zh-TW" altLang="en-US" sz="830" b="0" dirty="0">
+                          <a:solidFill>
+                            <a:srgbClr val="202020"/>
+                          </a:solidFill>
+                          <a:latin typeface="Microsoft JhengHei"/>
+                        </a:rPr>
+                        <a:t>對這一層裡的每一筆資料做相似度比對</a:t>
+                      </a:r>
+                      <a:r>
+                        <a:rPr lang="en-US" altLang="zh-TW" sz="830" b="0" dirty="0">
+                          <a:solidFill>
+                            <a:srgbClr val="202020"/>
+                          </a:solidFill>
+                          <a:latin typeface="Microsoft JhengHei"/>
+                        </a:rPr>
+                        <a:t>,</a:t>
+                      </a:r>
+                      <a:r>
+                        <a:rPr lang="zh-TW" altLang="en-US" sz="830" b="0" dirty="0">
+                          <a:solidFill>
+                            <a:srgbClr val="202020"/>
+                          </a:solidFill>
+                          <a:latin typeface="Microsoft JhengHei"/>
+                        </a:rPr>
+                        <a:t>再跟資料本身的綜合分數加總排名</a:t>
+                      </a:r>
+                      <a:r>
+                        <a:rPr lang="en-US" altLang="zh-TW" sz="830" b="0" dirty="0">
+                          <a:solidFill>
+                            <a:srgbClr val="202020"/>
+                          </a:solidFill>
+                          <a:latin typeface="Microsoft JhengHei"/>
+                        </a:rPr>
+                        <a:t>,</a:t>
+                      </a:r>
+                      <a:r>
+                        <a:rPr lang="zh-TW" altLang="en-US" sz="830" b="0" dirty="0">
+                          <a:solidFill>
+                            <a:srgbClr val="202020"/>
+                          </a:solidFill>
+                          <a:latin typeface="Microsoft JhengHei"/>
+                        </a:rPr>
+                        <a:t>取分數最高的前 </a:t>
+                      </a:r>
+                      <a:r>
+                        <a:rPr lang="en-US" altLang="zh-TW" sz="830" b="0" dirty="0">
+                          <a:solidFill>
+                            <a:srgbClr val="202020"/>
+                          </a:solidFill>
+                          <a:latin typeface="Microsoft JhengHei"/>
+                        </a:rPr>
+                        <a:t>3 </a:t>
+                      </a:r>
+                      <a:r>
+                        <a:rPr lang="zh-TW" altLang="en-US" sz="830" b="0" dirty="0">
+                          <a:solidFill>
+                            <a:srgbClr val="202020"/>
+                          </a:solidFill>
+                          <a:latin typeface="Microsoft JhengHei"/>
+                        </a:rPr>
+                        <a:t>筆回傳</a:t>
                       </a:r>
                     </a:p>
                   </a:txBody>
@@ -8142,21 +8591,33 @@
                   </a:ext>
                 </a:extLst>
               </a:tr>
-              <a:tr h="428936">
+              <a:tr h="795528">
                 <a:tc>
                   <a:txBody>
                     <a:bodyPr/>
                     <a:lstStyle/>
                     <a:p>
-                      <a:pPr algn="l"/>
+                      <a:pPr algn="ctr"/>
                       <a:r>
                         <a:rPr sz="880" b="1">
                           <a:solidFill>
-                            <a:srgbClr val="000000"/>
-                          </a:solidFill>
-                          <a:latin typeface="Microsoft JhengHei"/>
-                        </a:rPr>
-                        <a:t>分數計算</a:t>
+                            <a:srgbClr val="202020"/>
+                          </a:solidFill>
+                          <a:latin typeface="Microsoft JhengHei"/>
+                        </a:rPr>
+                        <a:t>Reflect</a:t>
+                      </a:r>
+                    </a:p>
+                    <a:p>
+                      <a:pPr algn="ctr"/>
+                      <a:r>
+                        <a:rPr sz="880" b="1">
+                          <a:solidFill>
+                            <a:srgbClr val="202020"/>
+                          </a:solidFill>
+                          <a:latin typeface="Microsoft JhengHei"/>
+                        </a:rPr>
+                        <a:t>反思推理</a:t>
                       </a:r>
                     </a:p>
                   </a:txBody>
@@ -8175,11 +8636,11 @@
                       <a:r>
                         <a:rPr sz="830" b="0">
                           <a:solidFill>
-                            <a:srgbClr val="000000"/>
-                          </a:solidFill>
-                          <a:latin typeface="Microsoft JhengHei"/>
-                        </a:rPr>
-                        <a:t>puppy/memory_functions/(decay.py、importance_score.py、recency.py、compound_score.py、access_counter.py)</a:t>
+                            <a:srgbClr val="202020"/>
+                          </a:solidFill>
+                          <a:latin typeface="Microsoft JhengHei"/>
+                        </a:rPr>
+                        <a:t>puppy/reflection.py ＋ puppy/chat.py(LLM 呼叫)＋ puppy/prompts.py(提示詞模板)</a:t>
                       </a:r>
                     </a:p>
                   </a:txBody>
@@ -8196,13 +8657,139 @@
                     <a:p>
                       <a:pPr algn="l"/>
                       <a:r>
-                        <a:rPr sz="830" b="0">
-                          <a:solidFill>
-                            <a:srgbClr val="000000"/>
-                          </a:solidFill>
-                          <a:latin typeface="Microsoft JhengHei"/>
-                        </a:rPr>
-                        <a:t>importance_score.py 決定新記憶誕生時的抽籤機率;decay.py 算每天的指數衰退;access_counter.py 算加減分;compound_score.py 把兩個分數合成排序用的分數</a:t>
+                        <a:rPr lang="zh-TW" altLang="en-US" sz="830" b="0" dirty="0">
+                          <a:solidFill>
+                            <a:srgbClr val="202020"/>
+                          </a:solidFill>
+                          <a:latin typeface="Microsoft JhengHei"/>
+                        </a:rPr>
+                        <a:t>把 </a:t>
+                      </a:r>
+                      <a:r>
+                        <a:rPr lang="en-US" altLang="zh-TW" sz="830" b="0" dirty="0">
+                          <a:solidFill>
+                            <a:srgbClr val="202020"/>
+                          </a:solidFill>
+                          <a:latin typeface="Microsoft JhengHei"/>
+                        </a:rPr>
+                        <a:t>Retrieve </a:t>
+                      </a:r>
+                      <a:r>
+                        <a:rPr lang="zh-TW" altLang="en-US" sz="830" b="0" dirty="0">
+                          <a:solidFill>
+                            <a:srgbClr val="202020"/>
+                          </a:solidFill>
+                          <a:latin typeface="Microsoft JhengHei"/>
+                        </a:rPr>
+                        <a:t>撈出的資料內容跟 </a:t>
+                      </a:r>
+                      <a:r>
+                        <a:rPr lang="en-US" altLang="zh-TW" sz="830" b="0" dirty="0">
+                          <a:solidFill>
+                            <a:srgbClr val="202020"/>
+                          </a:solidFill>
+                          <a:latin typeface="Microsoft JhengHei"/>
+                        </a:rPr>
+                        <a:t>Observe </a:t>
+                      </a:r>
+                      <a:r>
+                        <a:rPr lang="zh-TW" altLang="en-US" sz="830" b="0" dirty="0">
+                          <a:solidFill>
+                            <a:srgbClr val="202020"/>
+                          </a:solidFill>
+                          <a:latin typeface="Microsoft JhengHei"/>
+                        </a:rPr>
+                        <a:t>的動能敘述組成一段提示詞</a:t>
+                      </a:r>
+                      <a:r>
+                        <a:rPr lang="en-US" altLang="zh-TW" sz="830" b="0" dirty="0">
+                          <a:solidFill>
+                            <a:srgbClr val="202020"/>
+                          </a:solidFill>
+                          <a:latin typeface="Microsoft JhengHei"/>
+                        </a:rPr>
+                        <a:t>,</a:t>
+                      </a:r>
+                      <a:r>
+                        <a:rPr lang="zh-TW" altLang="en-US" sz="830" b="0" dirty="0">
+                          <a:solidFill>
+                            <a:srgbClr val="202020"/>
+                          </a:solidFill>
+                          <a:latin typeface="Microsoft JhengHei"/>
+                        </a:rPr>
+                        <a:t>呼叫 </a:t>
+                      </a:r>
+                      <a:r>
+                        <a:rPr lang="en-US" altLang="zh-TW" sz="830" b="0" dirty="0">
+                          <a:solidFill>
+                            <a:srgbClr val="202020"/>
+                          </a:solidFill>
+                          <a:latin typeface="Microsoft JhengHei"/>
+                        </a:rPr>
+                        <a:t>LLM </a:t>
+                      </a:r>
+                      <a:r>
+                        <a:rPr lang="zh-TW" altLang="en-US" sz="830" b="0" dirty="0">
+                          <a:solidFill>
+                            <a:srgbClr val="202020"/>
+                          </a:solidFill>
+                          <a:latin typeface="Microsoft JhengHei"/>
+                        </a:rPr>
+                        <a:t>取得回應</a:t>
+                      </a:r>
+                      <a:r>
+                        <a:rPr lang="en-US" altLang="zh-TW" sz="830" b="0" dirty="0">
+                          <a:solidFill>
+                            <a:srgbClr val="202020"/>
+                          </a:solidFill>
+                          <a:latin typeface="Microsoft JhengHei"/>
+                        </a:rPr>
+                        <a:t>,</a:t>
+                      </a:r>
+                      <a:r>
+                        <a:rPr lang="zh-TW" altLang="en-US" sz="830" b="0" dirty="0">
+                          <a:solidFill>
+                            <a:srgbClr val="202020"/>
+                          </a:solidFill>
+                          <a:latin typeface="Microsoft JhengHei"/>
+                        </a:rPr>
+                        <a:t>並驗證回傳格式是否正確</a:t>
+                      </a:r>
+                      <a:r>
+                        <a:rPr lang="en-US" altLang="zh-TW" sz="830" b="0" dirty="0">
+                          <a:solidFill>
+                            <a:srgbClr val="202020"/>
+                          </a:solidFill>
+                          <a:latin typeface="Microsoft JhengHei"/>
+                        </a:rPr>
+                        <a:t>;LLM</a:t>
+                      </a:r>
+                      <a:r>
+                        <a:rPr lang="zh-TW" altLang="en-US" sz="830" b="0" dirty="0">
+                          <a:solidFill>
+                            <a:srgbClr val="202020"/>
+                          </a:solidFill>
+                          <a:latin typeface="Microsoft JhengHei"/>
+                        </a:rPr>
+                        <a:t> 會自行判斷這次要引用哪些記憶編號</a:t>
+                      </a:r>
+                      <a:r>
+                        <a:rPr lang="en-US" altLang="zh-TW" sz="830" b="0" dirty="0">
+                          <a:solidFill>
+                            <a:srgbClr val="202020"/>
+                          </a:solidFill>
+                          <a:latin typeface="Microsoft JhengHei"/>
+                        </a:rPr>
+                        <a:t>,</a:t>
+                      </a:r>
+                      <a:r>
+                        <a:rPr lang="zh-TW" altLang="en-US" sz="830" b="0" dirty="0">
+                          <a:solidFill>
+                            <a:srgbClr val="202020"/>
+                          </a:solidFill>
+                          <a:latin typeface="Microsoft JhengHei"/>
+                        </a:rPr>
+                        <a:t>數量不固定</a:t>
                       </a:r>
                     </a:p>
                   </a:txBody>
@@ -8218,21 +8805,45 @@
                   </a:ext>
                 </a:extLst>
               </a:tr>
-              <a:tr h="428936">
+              <a:tr h="795528">
                 <a:tc>
                   <a:txBody>
                     <a:bodyPr/>
                     <a:lstStyle/>
                     <a:p>
-                      <a:pPr algn="l"/>
+                      <a:pPr algn="ctr"/>
                       <a:r>
                         <a:rPr sz="880" b="1">
                           <a:solidFill>
-                            <a:srgbClr val="000000"/>
-                          </a:solidFill>
-                          <a:latin typeface="Microsoft JhengHei"/>
-                        </a:rPr>
-                        <a:t>Reflect</a:t>
+                            <a:srgbClr val="202020"/>
+                          </a:solidFill>
+                          <a:latin typeface="Microsoft JhengHei"/>
+                        </a:rPr>
+                        <a:t>Investment decisions</a:t>
+                      </a:r>
+                    </a:p>
+                    <a:p>
+                      <a:pPr algn="ctr"/>
+                      <a:r>
+                        <a:rPr sz="880" b="1">
+                          <a:solidFill>
+                            <a:srgbClr val="202020"/>
+                          </a:solidFill>
+                          <a:latin typeface="Microsoft JhengHei"/>
+                        </a:rPr>
+                        <a:t>and reflecting outcomes</a:t>
+                      </a:r>
+                    </a:p>
+                    <a:p>
+                      <a:pPr algn="ctr"/>
+                      <a:r>
+                        <a:rPr sz="880" b="1">
+                          <a:solidFill>
+                            <a:srgbClr val="202020"/>
+                          </a:solidFill>
+                          <a:latin typeface="Microsoft JhengHei"/>
+                        </a:rPr>
+                        <a:t>投資決策及結果反映</a:t>
                       </a:r>
                     </a:p>
                   </a:txBody>
@@ -8251,11 +8862,11 @@
                       <a:r>
                         <a:rPr sz="830" b="0">
                           <a:solidFill>
-                            <a:srgbClr val="000000"/>
-                          </a:solidFill>
-                          <a:latin typeface="Microsoft JhengHei"/>
-                        </a:rPr>
-                        <a:t>puppy/reflection.py ＋ puppy/chat.py(LLM 呼叫)＋ puppy/prompts.py(提示詞模板)</a:t>
+                            <a:srgbClr val="202020"/>
+                          </a:solidFill>
+                          <a:latin typeface="Microsoft JhengHei"/>
+                        </a:rPr>
+                        <a:t>puppy/agent.py 的 _construct_train_actions／__process_test_action／_portfolio_step／_update_access_counter ＋ puppy/portfolio.py 的 get_feedback_response</a:t>
                       </a:r>
                     </a:p>
                   </a:txBody>
@@ -8274,11 +8885,11 @@
                       <a:r>
                         <a:rPr sz="830" b="0">
                           <a:solidFill>
-                            <a:srgbClr val="000000"/>
-                          </a:solidFill>
-                          <a:latin typeface="Microsoft JhengHei"/>
-                        </a:rPr>
-                        <a:t>組合提示詞(記憶內容＋動能敘述),呼叫 LLM,guardrails 驗證回傳格式,LLM 自己決定引用了哪些記憶編號</a:t>
+                            <a:srgbClr val="202020"/>
+                          </a:solidFill>
+                          <a:latin typeface="Microsoft JhengHei"/>
+                        </a:rPr>
+                        <a:t>先依模式決定買賣方向(Test 模式看 LLM 的決策,Train 模式看隔日實際漲跌);接著把改動寫進持倉紀錄;再往回看最近幾天的實際損益,對這次引用過的記憶加分或扣分;最後呼叫 brain.step(),讓整個記憶庫完成當天的分數異動、清除與升降層檢查</a:t>
                       </a:r>
                     </a:p>
                   </a:txBody>
@@ -8294,558 +8905,10 @@
                   </a:ext>
                 </a:extLst>
               </a:tr>
-              <a:tr h="428936">
-                <a:tc>
-                  <a:txBody>
-                    <a:bodyPr/>
-                    <a:lstStyle/>
-                    <a:p>
-                      <a:pPr algn="l"/>
-                      <a:r>
-                        <a:rPr sz="880" b="1">
-                          <a:solidFill>
-                            <a:srgbClr val="202020"/>
-                          </a:solidFill>
-                          <a:latin typeface="Microsoft JhengHei"/>
-                        </a:rPr>
-                        <a:t>Investment decisions
-and reflecting outcomes</a:t>
-                      </a:r>
-                    </a:p>
-                  </a:txBody>
-                  <a:tcPr marL="40000" marR="40000" marT="10000" marB="10000" anchor="ctr">
-                    <a:solidFill>
-                      <a:srgbClr val="FFFFFF"/>
-                    </a:solidFill>
-                  </a:tcPr>
-                </a:tc>
-                <a:tc>
-                  <a:txBody>
-                    <a:bodyPr/>
-                    <a:lstStyle/>
-                    <a:p>
-                      <a:pPr algn="l"/>
-                      <a:r>
-                        <a:rPr sz="830" b="0">
-                          <a:solidFill>
-                            <a:srgbClr val="000000"/>
-                          </a:solidFill>
-                          <a:latin typeface="Microsoft JhengHei"/>
-                        </a:rPr>
-                        <a:t>puppy/agent.py 的 _construct_train_actions／__process_test_action／_portfolio_step／_update_access_counter ＋ puppy/portfolio.py 的 get_feedback_response</a:t>
-                      </a:r>
-                    </a:p>
-                  </a:txBody>
-                  <a:tcPr marL="40000" marR="40000" marT="10000" marB="10000" anchor="ctr">
-                    <a:solidFill>
-                      <a:srgbClr val="FFFFFF"/>
-                    </a:solidFill>
-                  </a:tcPr>
-                </a:tc>
-                <a:tc>
-                  <a:txBody>
-                    <a:bodyPr/>
-                    <a:lstStyle/>
-                    <a:p>
-                      <a:pPr algn="l"/>
-                      <a:r>
-                        <a:rPr sz="830" b="0">
-                          <a:solidFill>
-                            <a:srgbClr val="000000"/>
-                          </a:solidFill>
-                          <a:latin typeface="Microsoft JhengHei"/>
-                        </a:rPr>
-                        <a:t>四個函式接力:先決定買賣方向 → 寫入持倉 → 依最近實際損益回饋剛引用的記憶 → 呼叫 brain.step() 讓記憶系統過完這一天</a:t>
-                      </a:r>
-                    </a:p>
-                  </a:txBody>
-                  <a:tcPr marL="40000" marR="40000" marT="10000" marB="10000" anchor="ctr">
-                    <a:solidFill>
-                      <a:srgbClr val="FFFFFF"/>
-                    </a:solidFill>
-                  </a:tcPr>
-                </a:tc>
-                <a:extLst>
-                  <a:ext uri="{0D108BD9-81ED-4DB2-BD59-A6C34878D82A}">
-                    <a16:rowId xmlns:a16="http://schemas.microsoft.com/office/drawing/2014/main" val="10009"/>
-                  </a:ext>
-                </a:extLst>
-              </a:tr>
-              <a:tr h="428936">
-                <a:tc>
-                  <a:txBody>
-                    <a:bodyPr/>
-                    <a:lstStyle/>
-                    <a:p>
-                      <a:pPr algn="l"/>
-                      <a:r>
-                        <a:rPr sz="880" b="1">
-                          <a:solidFill>
-                            <a:srgbClr val="000000"/>
-                          </a:solidFill>
-                          <a:latin typeface="Microsoft JhengHei"/>
-                        </a:rPr>
-                        <a:t>資料下載與打包(離線)</a:t>
-                      </a:r>
-                    </a:p>
-                  </a:txBody>
-                  <a:tcPr marL="40000" marR="40000" marT="10000" marB="10000" anchor="ctr">
-                    <a:solidFill>
-                      <a:srgbClr val="F4F6F8"/>
-                    </a:solidFill>
-                  </a:tcPr>
-                </a:tc>
-                <a:tc>
-                  <a:txBody>
-                    <a:bodyPr/>
-                    <a:lstStyle/>
-                    <a:p>
-                      <a:pPr algn="l"/>
-                      <a:r>
-                        <a:rPr sz="830" b="0">
-                          <a:solidFill>
-                            <a:srgbClr val="000000"/>
-                          </a:solidFill>
-                          <a:latin typeface="Microsoft JhengHei"/>
-                        </a:rPr>
-                        <a:t>data-pipeline/01_*.py ～ 04-data_pipeline.py</a:t>
-                      </a:r>
-                    </a:p>
-                  </a:txBody>
-                  <a:tcPr marL="40000" marR="40000" marT="10000" marB="10000" anchor="ctr">
-                    <a:solidFill>
-                      <a:srgbClr val="F4F6F8"/>
-                    </a:solidFill>
-                  </a:tcPr>
-                </a:tc>
-                <a:tc>
-                  <a:txBody>
-                    <a:bodyPr/>
-                    <a:lstStyle/>
-                    <a:p>
-                      <a:pPr algn="l"/>
-                      <a:r>
-                        <a:rPr sz="830" b="0">
-                          <a:solidFill>
-                            <a:srgbClr val="000000"/>
-                          </a:solidFill>
-                          <a:latin typeface="Microsoft JhengHei"/>
-                        </a:rPr>
-                        <a:t>01 系列分別向 SEC API、Alpaca News API 抓原始資料;04 再用 yfinance 補股價,全部合併打包成 env_data.pkl</a:t>
-                      </a:r>
-                    </a:p>
-                  </a:txBody>
-                  <a:tcPr marL="40000" marR="40000" marT="10000" marB="10000" anchor="ctr">
-                    <a:solidFill>
-                      <a:srgbClr val="F4F6F8"/>
-                    </a:solidFill>
-                  </a:tcPr>
-                </a:tc>
-                <a:extLst>
-                  <a:ext uri="{0D108BD9-81ED-4DB2-BD59-A6C34878D82A}">
-                    <a16:rowId xmlns:a16="http://schemas.microsoft.com/office/drawing/2014/main" val="10010"/>
-                  </a:ext>
-                </a:extLst>
-              </a:tr>
-              <a:tr h="428936">
-                <a:tc>
-                  <a:txBody>
-                    <a:bodyPr/>
-                    <a:lstStyle/>
-                    <a:p>
-                      <a:pPr algn="l"/>
-                      <a:r>
-                        <a:rPr sz="880" b="1">
-                          <a:solidFill>
-                            <a:srgbClr val="000000"/>
-                          </a:solidFill>
-                          <a:latin typeface="Microsoft JhengHei"/>
-                        </a:rPr>
-                        <a:t>進入點</a:t>
-                      </a:r>
-                    </a:p>
-                  </a:txBody>
-                  <a:tcPr marL="40000" marR="40000" marT="10000" marB="10000" anchor="ctr">
-                    <a:solidFill>
-                      <a:srgbClr val="FFFFFF"/>
-                    </a:solidFill>
-                  </a:tcPr>
-                </a:tc>
-                <a:tc>
-                  <a:txBody>
-                    <a:bodyPr/>
-                    <a:lstStyle/>
-                    <a:p>
-                      <a:pPr algn="l"/>
-                      <a:r>
-                        <a:rPr sz="830" b="0">
-                          <a:solidFill>
-                            <a:srgbClr val="000000"/>
-                          </a:solidFill>
-                          <a:latin typeface="Microsoft JhengHei"/>
-                        </a:rPr>
-                        <a:t>run.py — 建立 MarketEnvironment 與 LLMAgent,逐日呼叫 step()</a:t>
-                      </a:r>
-                    </a:p>
-                  </a:txBody>
-                  <a:tcPr marL="40000" marR="40000" marT="10000" marB="10000" anchor="ctr">
-                    <a:solidFill>
-                      <a:srgbClr val="FFFFFF"/>
-                    </a:solidFill>
-                  </a:tcPr>
-                </a:tc>
-                <a:tc>
-                  <a:txBody>
-                    <a:bodyPr/>
-                    <a:lstStyle/>
-                    <a:p>
-                      <a:pPr algn="l"/>
-                      <a:r>
-                        <a:rPr sz="830" b="0">
-                          <a:solidFill>
-                            <a:srgbClr val="000000"/>
-                          </a:solidFill>
-                          <a:latin typeface="Microsoft JhengHei"/>
-                        </a:rPr>
-                        <a:t>讀 config.toml,建立環境與 Agent;while 迴圈裡逐日拿資料、跑完整套模組,每天存一次檔避免 API 中斷要重跑</a:t>
-                      </a:r>
-                    </a:p>
-                  </a:txBody>
-                  <a:tcPr marL="40000" marR="40000" marT="10000" marB="10000" anchor="ctr">
-                    <a:solidFill>
-                      <a:srgbClr val="FFFFFF"/>
-                    </a:solidFill>
-                  </a:tcPr>
-                </a:tc>
-                <a:extLst>
-                  <a:ext uri="{0D108BD9-81ED-4DB2-BD59-A6C34878D82A}">
-                    <a16:rowId xmlns:a16="http://schemas.microsoft.com/office/drawing/2014/main" val="10011"/>
-                  </a:ext>
-                </a:extLst>
-              </a:tr>
             </a:tbl>
           </a:graphicData>
         </a:graphic>
       </p:graphicFrame>
-      <p:sp>
-        <p:nvSpPr>
-          <p:cNvPr id="5" name="TextBox 4"/>
-          <p:cNvSpPr txBox="1"/>
-          <p:nvPr/>
-        </p:nvSpPr>
-        <p:spPr>
-          <a:xfrm>
-            <a:off x="320040" y="6263640"/>
-            <a:ext cx="9144000" cy="274320"/>
-          </a:xfrm>
-          <a:prstGeom prst="rect">
-            <a:avLst/>
-          </a:prstGeom>
-          <a:noFill/>
-        </p:spPr>
-        <p:txBody>
-          <a:bodyPr wrap="square" lIns="0" tIns="0" rIns="0" bIns="0" anchor="t">
-            <a:spAutoFit/>
-          </a:bodyPr>
-          <a:lstStyle/>
-          <a:p>
-            <a:pPr algn="l">
-              <a:lnSpc>
-                <a:spcPct val="100000"/>
-              </a:lnSpc>
-            </a:pPr>
-            <a:r>
-              <a:rPr sz="1050" b="1">
-                <a:solidFill>
-                  <a:srgbClr val="202020"/>
-                </a:solidFill>
-                <a:latin typeface="Microsoft JhengHei"/>
-              </a:rPr>
-              <a:t>範例:記憶的加分/扣分,其實來自實際損益,不是單純被引用就加分(portfolio.py)</a:t>
-            </a:r>
-          </a:p>
-        </p:txBody>
-      </p:sp>
-      <p:sp>
-        <p:nvSpPr>
-          <p:cNvPr id="6" name="Rectangle 5"/>
-          <p:cNvSpPr/>
-          <p:nvPr/>
-        </p:nvSpPr>
-        <p:spPr>
-          <a:xfrm>
-            <a:off x="320040" y="6583679"/>
-            <a:ext cx="7589520" cy="1600200"/>
-          </a:xfrm>
-          <a:prstGeom prst="rect">
-            <a:avLst/>
-          </a:prstGeom>
-          <a:solidFill>
-            <a:srgbClr val="272B33"/>
-          </a:solidFill>
-          <a:ln>
-            <a:noFill/>
-          </a:ln>
-          <a:effectLst/>
-        </p:spPr>
-        <p:style>
-          <a:lnRef idx="1">
-            <a:schemeClr val="accent1"/>
-          </a:lnRef>
-          <a:fillRef idx="3">
-            <a:schemeClr val="accent1"/>
-          </a:fillRef>
-          <a:effectRef idx="2">
-            <a:schemeClr val="accent1"/>
-          </a:effectRef>
-          <a:fontRef idx="minor">
-            <a:schemeClr val="lt1"/>
-          </a:fontRef>
-        </p:style>
-        <p:txBody>
-          <a:bodyPr rtlCol="0" anchor="ctr"/>
-          <a:lstStyle/>
-          <a:p>
-            <a:pPr algn="ctr"/>
-            <a:endParaRPr/>
-          </a:p>
-        </p:txBody>
-      </p:sp>
-      <p:sp>
-        <p:nvSpPr>
-          <p:cNvPr id="7" name="TextBox 6"/>
-          <p:cNvSpPr txBox="1"/>
-          <p:nvPr/>
-        </p:nvSpPr>
-        <p:spPr>
-          <a:xfrm>
-            <a:off x="502920" y="6720840"/>
-            <a:ext cx="7223760" cy="1371600"/>
-          </a:xfrm>
-          <a:prstGeom prst="rect">
-            <a:avLst/>
-          </a:prstGeom>
-          <a:noFill/>
-        </p:spPr>
-        <p:txBody>
-          <a:bodyPr wrap="square" lIns="0" tIns="0" rIns="0" bIns="0" anchor="t">
-            <a:spAutoFit/>
-          </a:bodyPr>
-          <a:lstStyle/>
-          <a:p>
-            <a:pPr algn="l">
-              <a:lnSpc>
-                <a:spcPct val="115000"/>
-              </a:lnSpc>
-            </a:pPr>
-            <a:r>
-              <a:rPr sz="950" b="0">
-                <a:solidFill>
-                  <a:srgbClr val="D8DEE5"/>
-                </a:solidFill>
-                <a:latin typeface="Microsoft JhengHei"/>
-              </a:rPr>
-              <a:t>temp = cumsum((diff(price) * shares_held)[-lookback_window:])[-1]</a:t>
-            </a:r>
-          </a:p>
-          <a:p>
-            <a:pPr algn="l">
-              <a:lnSpc>
-                <a:spcPct val="115000"/>
-              </a:lnSpc>
-            </a:pPr>
-            <a:r>
-              <a:rPr sz="950" b="0">
-                <a:solidFill>
-                  <a:srgbClr val="D8DEE5"/>
-                </a:solidFill>
-                <a:latin typeface="Microsoft JhengHei"/>
-              </a:rPr>
-              <a:t>if temp &gt; 0:  feedback = 1    # 這段期間實際有賺錢</a:t>
-            </a:r>
-          </a:p>
-          <a:p>
-            <a:pPr algn="l">
-              <a:lnSpc>
-                <a:spcPct val="115000"/>
-              </a:lnSpc>
-            </a:pPr>
-            <a:r>
-              <a:rPr sz="950" b="0">
-                <a:solidFill>
-                  <a:srgbClr val="D8DEE5"/>
-                </a:solidFill>
-                <a:latin typeface="Microsoft JhengHei"/>
-              </a:rPr>
-              <a:t>elif temp &lt; 0: feedback = -1  # 這段期間實際賠錢</a:t>
-            </a:r>
-          </a:p>
-          <a:p>
-            <a:pPr algn="l">
-              <a:lnSpc>
-                <a:spcPct val="115000"/>
-              </a:lnSpc>
-            </a:pPr>
-            <a:r>
-              <a:rPr sz="950" b="0">
-                <a:solidFill>
-                  <a:srgbClr val="D8DEE5"/>
-                </a:solidFill>
-                <a:latin typeface="Microsoft JhengHei"/>
-              </a:rPr>
-              <a:t>else:          feedback = 0</a:t>
-            </a:r>
-          </a:p>
-          <a:p>
-            <a:pPr algn="l">
-              <a:lnSpc>
-                <a:spcPct val="115000"/>
-              </a:lnSpc>
-            </a:pPr>
-            <a:endParaRPr sz="950" b="0">
-              <a:solidFill>
-                <a:srgbClr val="D8DEE5"/>
-              </a:solidFill>
-              <a:latin typeface="Microsoft JhengHei"/>
-            </a:endParaRPr>
-          </a:p>
-          <a:p>
-            <a:pPr algn="l">
-              <a:lnSpc>
-                <a:spcPct val="115000"/>
-              </a:lnSpc>
-            </a:pPr>
-            <a:r>
-              <a:rPr sz="950" b="0">
-                <a:solidFill>
-                  <a:srgbClr val="D8DEE5"/>
-                </a:solidFill>
-                <a:latin typeface="Microsoft JhengHei"/>
-              </a:rPr>
-              <a:t># access_counter += feedback  (可能是負的!)</a:t>
-            </a:r>
-          </a:p>
-          <a:p>
-            <a:pPr algn="l">
-              <a:lnSpc>
-                <a:spcPct val="115000"/>
-              </a:lnSpc>
-            </a:pPr>
-            <a:r>
-              <a:rPr sz="950" b="0">
-                <a:solidFill>
-                  <a:srgbClr val="D8DEE5"/>
-                </a:solidFill>
-                <a:latin typeface="Microsoft JhengHei"/>
-              </a:rPr>
-              <a:t># importance_score += access_counter * 5</a:t>
-            </a:r>
-          </a:p>
-        </p:txBody>
-      </p:sp>
-      <p:sp>
-        <p:nvSpPr>
-          <p:cNvPr id="8" name="TextBox 7"/>
-          <p:cNvSpPr txBox="1"/>
-          <p:nvPr/>
-        </p:nvSpPr>
-        <p:spPr>
-          <a:xfrm>
-            <a:off x="8092440" y="6583679"/>
-            <a:ext cx="3474720" cy="1600200"/>
-          </a:xfrm>
-          <a:prstGeom prst="rect">
-            <a:avLst/>
-          </a:prstGeom>
-          <a:noFill/>
-        </p:spPr>
-        <p:txBody>
-          <a:bodyPr wrap="square" lIns="0" tIns="0" rIns="0" bIns="0" anchor="t">
-            <a:spAutoFit/>
-          </a:bodyPr>
-          <a:lstStyle/>
-          <a:p>
-            <a:pPr algn="l">
-              <a:lnSpc>
-                <a:spcPct val="120000"/>
-              </a:lnSpc>
-            </a:pPr>
-            <a:r>
-              <a:rPr sz="950" b="0">
-                <a:solidFill>
-                  <a:srgbClr val="202020"/>
-                </a:solidFill>
-                <a:latin typeface="Microsoft JhengHei"/>
-              </a:rPr>
-              <a:t>回顧最近幾天(預設 7 天)投資組合</a:t>
-            </a:r>
-          </a:p>
-          <a:p>
-            <a:pPr algn="l">
-              <a:lnSpc>
-                <a:spcPct val="120000"/>
-              </a:lnSpc>
-            </a:pPr>
-            <a:r>
-              <a:rPr sz="950" b="0">
-                <a:solidFill>
-                  <a:srgbClr val="202020"/>
-                </a:solidFill>
-                <a:latin typeface="Microsoft JhengHei"/>
-              </a:rPr>
-              <a:t>的實際損益,賺錢才加分、賠錢反而</a:t>
-            </a:r>
-          </a:p>
-          <a:p>
-            <a:pPr algn="l">
-              <a:lnSpc>
-                <a:spcPct val="120000"/>
-              </a:lnSpc>
-            </a:pPr>
-            <a:r>
-              <a:rPr sz="950" b="0">
-                <a:solidFill>
-                  <a:srgbClr val="202020"/>
-                </a:solidFill>
-                <a:latin typeface="Microsoft JhengHei"/>
-              </a:rPr>
-              <a:t>扣分——不是「被引用就一定加分」,</a:t>
-            </a:r>
-          </a:p>
-          <a:p>
-            <a:pPr algn="l">
-              <a:lnSpc>
-                <a:spcPct val="120000"/>
-              </a:lnSpc>
-            </a:pPr>
-            <a:r>
-              <a:rPr sz="950" b="0">
-                <a:solidFill>
-                  <a:srgbClr val="202020"/>
-                </a:solidFill>
-                <a:latin typeface="Microsoft JhengHei"/>
-              </a:rPr>
-              <a:t>是用事後的真實結果,回頭校正這些</a:t>
-            </a:r>
-          </a:p>
-          <a:p>
-            <a:pPr algn="l">
-              <a:lnSpc>
-                <a:spcPct val="120000"/>
-              </a:lnSpc>
-            </a:pPr>
-            <a:r>
-              <a:rPr sz="950" b="0">
-                <a:solidFill>
-                  <a:srgbClr val="202020"/>
-                </a:solidFill>
-                <a:latin typeface="Microsoft JhengHei"/>
-              </a:rPr>
-              <a:t>記憶到底值不值得信任。</a:t>
-            </a:r>
-          </a:p>
-        </p:txBody>
-      </p:sp>
     </p:spTree>
   </p:cSld>
   <p:clrMapOvr>
